--- a/docs/curso/slides/m00-boas-vindas.pptx
+++ b/docs/curso/slides/m00-boas-vindas.pptx
@@ -2086,6 +2086,54 @@
           <a:chExt cx="0" cy="0"/>
         </a:xfrm>
       </p:grpSpPr>
+      <p:sp>
+        <p:nvSpPr>
+          <p:cNvPr id="25" name="Slide Number Placeholder 0"/>
+          <p:cNvSpPr>
+            <a:spLocks noGrp="1"/>
+          </p:cNvSpPr>
+          <p:nvPr>
+            <p:ph type="sldNum" sz="quarter" idx="4294967295"/>
+          </p:nvPr>
+        </p:nvSpPr>
+        <p:spPr>
+          <a:xfrm>
+            <a:off x="11292840" y="6556248"/>
+            <a:ext cx="548640" cy="256032"/>
+          </a:xfrm>
+          <a:prstGeom prst="rect">
+            <a:avLst/>
+          </a:prstGeom>
+          <a:extLst>
+            <a:ext uri="{C572A759-6A51-4108-AA02-DFA0A04FC94B}">
+              <ma14:wrappingTextBoxFlag xmlns:ma14="http://schemas.microsoft.com/office/mac/drawingml/2011/main" val="0"/>
+            </a:ext>
+          </a:extLst>
+        </p:spPr>
+        <p:txBody>
+          <a:bodyPr/>
+          <a:lstStyle>
+            <a:lvl1pPr>
+              <a:defRPr sz="900">
+                <a:solidFill>
+                  <a:srgbClr val="1B3A6B"/>
+                </a:solidFill>
+                <a:latin typeface="Arial"/>
+                <a:ea typeface="Arial"/>
+                <a:cs typeface="Arial"/>
+              </a:defRPr>
+            </a:lvl1pPr>
+          </a:lstStyle>
+          <a:p>
+            <a:pPr algn="r"/>
+            <a:fld id="{F7021451-1387-4CA6-816F-3879F97B5CBC}" type="slidenum">
+              <a:rPr b="1" lang="en-US"/>
+              <a:t>1000</a:t>
+            </a:fld>
+            <a:endParaRPr lang="en-US"/>
+          </a:p>
+        </p:txBody>
+      </p:sp>
     </p:spTree>
   </p:cSld>
   <p:clrMapOvr>
@@ -2111,6 +2159,54 @@
           <a:chExt cx="0" cy="0"/>
         </a:xfrm>
       </p:grpSpPr>
+      <p:sp>
+        <p:nvSpPr>
+          <p:cNvPr id="25" name="Slide Number Placeholder 0"/>
+          <p:cNvSpPr>
+            <a:spLocks noGrp="1"/>
+          </p:cNvSpPr>
+          <p:nvPr>
+            <p:ph type="sldNum" sz="quarter" idx="4294967295"/>
+          </p:nvPr>
+        </p:nvSpPr>
+        <p:spPr>
+          <a:xfrm>
+            <a:off x="11292840" y="6556248"/>
+            <a:ext cx="548640" cy="256032"/>
+          </a:xfrm>
+          <a:prstGeom prst="rect">
+            <a:avLst/>
+          </a:prstGeom>
+          <a:extLst>
+            <a:ext uri="{C572A759-6A51-4108-AA02-DFA0A04FC94B}">
+              <ma14:wrappingTextBoxFlag xmlns:ma14="http://schemas.microsoft.com/office/mac/drawingml/2011/main" val="0"/>
+            </a:ext>
+          </a:extLst>
+        </p:spPr>
+        <p:txBody>
+          <a:bodyPr/>
+          <a:lstStyle>
+            <a:lvl1pPr>
+              <a:defRPr sz="900">
+                <a:solidFill>
+                  <a:srgbClr val="1B3A6B"/>
+                </a:solidFill>
+                <a:latin typeface="Arial"/>
+                <a:ea typeface="Arial"/>
+                <a:cs typeface="Arial"/>
+              </a:defRPr>
+            </a:lvl1pPr>
+          </a:lstStyle>
+          <a:p>
+            <a:pPr algn="r"/>
+            <a:fld id="{F7021451-1387-4CA6-816F-3879F97B5CBC}" type="slidenum">
+              <a:rPr b="1" lang="en-US"/>
+              <a:t>null</a:t>
+            </a:fld>
+            <a:endParaRPr lang="en-US"/>
+          </a:p>
+        </p:txBody>
+      </p:sp>
     </p:spTree>
   </p:cSld>
   <p:clrMap bg1="lt1" tx1="dk1" bg2="lt2" tx2="dk2" accent1="accent1" accent2="accent2" accent3="accent3" accent4="accent4" accent5="accent5" accent6="accent6" hlink="hlink" folHlink="folHlink"/>
@@ -2873,6 +2969,45 @@
         </p:nvSpPr>
         <p:spPr>
           <a:xfrm>
+            <a:off x="457200" y="548640"/>
+            <a:ext cx="3474720" cy="1737360"/>
+          </a:xfrm>
+          <a:prstGeom prst="rect">
+            <a:avLst/>
+          </a:prstGeom>
+          <a:noFill/>
+          <a:ln/>
+        </p:spPr>
+        <p:txBody>
+          <a:bodyPr wrap="square" rtlCol="0" anchor="ctr"/>
+          <a:lstStyle/>
+          <a:p>
+            <a:pPr indent="0" marL="0">
+              <a:buNone/>
+            </a:pPr>
+            <a:r>
+              <a:rPr lang="en-US" sz="11000" b="1" dirty="0">
+                <a:solidFill>
+                  <a:srgbClr val="11396F"/>
+                </a:solidFill>
+                <a:latin typeface="Arial" pitchFamily="34" charset="0"/>
+                <a:ea typeface="Arial" pitchFamily="34" charset="-122"/>
+                <a:cs typeface="Arial" pitchFamily="34" charset="-120"/>
+              </a:rPr>
+              <a:t>03</a:t>
+            </a:r>
+            <a:endParaRPr lang="en-US" sz="11000" dirty="0"/>
+          </a:p>
+        </p:txBody>
+      </p:sp>
+      <p:sp>
+        <p:nvSpPr>
+          <p:cNvPr id="4" name="Text 2"/>
+          <p:cNvSpPr/>
+          <p:nvPr/>
+        </p:nvSpPr>
+        <p:spPr>
+          <a:xfrm>
             <a:off x="548640" y="2194560"/>
             <a:ext cx="3291840" cy="548640"/>
           </a:xfrm>
@@ -2906,7 +3041,46 @@
       </p:sp>
       <p:sp>
         <p:nvSpPr>
-          <p:cNvPr id="4" name="Text 2"/>
+          <p:cNvPr id="5" name="Text 3"/>
+          <p:cNvSpPr/>
+          <p:nvPr/>
+        </p:nvSpPr>
+        <p:spPr>
+          <a:xfrm>
+            <a:off x="548640" y="3200400"/>
+            <a:ext cx="3383280" cy="457200"/>
+          </a:xfrm>
+          <a:prstGeom prst="rect">
+            <a:avLst/>
+          </a:prstGeom>
+          <a:noFill/>
+          <a:ln/>
+        </p:spPr>
+        <p:txBody>
+          <a:bodyPr wrap="square" rtlCol="0" anchor="ctr"/>
+          <a:lstStyle/>
+          <a:p>
+            <a:pPr indent="0" marL="0">
+              <a:buNone/>
+            </a:pPr>
+            <a:r>
+              <a:rPr lang="en-US" sz="1100" dirty="0">
+                <a:solidFill>
+                  <a:srgbClr val="C7D2E3"/>
+                </a:solidFill>
+                <a:latin typeface="Arial" pitchFamily="34" charset="0"/>
+                <a:ea typeface="Arial" pitchFamily="34" charset="-122"/>
+                <a:cs typeface="Arial" pitchFamily="34" charset="-120"/>
+              </a:rPr>
+              <a:t>M0 · Etapa 1 · Fundamentos</a:t>
+            </a:r>
+            <a:endParaRPr lang="en-US" sz="1100" dirty="0"/>
+          </a:p>
+        </p:txBody>
+      </p:sp>
+      <p:sp>
+        <p:nvSpPr>
+          <p:cNvPr id="6" name="Text 4"/>
           <p:cNvSpPr/>
           <p:nvPr/>
         </p:nvSpPr>
@@ -2945,7 +3119,7 @@
       </p:sp>
       <p:pic>
         <p:nvPicPr>
-          <p:cNvPr id="5" name="Image 0" descr="/www/wwwroot/rexar/gdsolar/docs/curso/slides/assets/logo-gdsolar.png">    </p:cNvPr>
+          <p:cNvPr id="7" name="Image 0" descr="/www/wwwroot/rexar/gdsolar/docs/curso/slides/assets/logo-gdsolar.png">    </p:cNvPr>
           <p:cNvPicPr>
             <a:picLocks noChangeAspect="1"/>
           </p:cNvPicPr>
@@ -2969,7 +3143,7 @@
       </p:pic>
       <p:sp>
         <p:nvSpPr>
-          <p:cNvPr id="6" name="Text 3"/>
+          <p:cNvPr id="8" name="Text 5"/>
           <p:cNvSpPr/>
           <p:nvPr/>
         </p:nvSpPr>
@@ -3010,7 +3184,7 @@
       </p:sp>
       <p:sp>
         <p:nvSpPr>
-          <p:cNvPr id="7" name="Text 4"/>
+          <p:cNvPr id="9" name="Text 6"/>
           <p:cNvSpPr/>
           <p:nvPr/>
         </p:nvSpPr>
@@ -3051,7 +3225,7 @@
       </p:sp>
       <p:sp>
         <p:nvSpPr>
-          <p:cNvPr id="8" name="Text 5"/>
+          <p:cNvPr id="10" name="Text 7"/>
           <p:cNvSpPr/>
           <p:nvPr/>
         </p:nvSpPr>
@@ -3167,7 +3341,7 @@
         </p:blipFill>
         <p:spPr>
           <a:xfrm>
-            <a:off x="411480" y="6547104"/>
+            <a:off x="548640" y="6547104"/>
             <a:ext cx="274320" cy="274320"/>
           </a:xfrm>
           <a:prstGeom prst="rect">
@@ -3183,7 +3357,7 @@
         </p:nvSpPr>
         <p:spPr>
           <a:xfrm>
-            <a:off x="749808" y="6528816"/>
+            <a:off x="886968" y="6528816"/>
             <a:ext cx="6400800" cy="310896"/>
           </a:xfrm>
           <a:prstGeom prst="rect">
@@ -3223,7 +3397,7 @@
         <p:spPr>
           <a:xfrm>
             <a:off x="7132320" y="6528816"/>
-            <a:ext cx="4663440" cy="310896"/>
+            <a:ext cx="4023360" cy="310896"/>
           </a:xfrm>
           <a:prstGeom prst="rect">
             <a:avLst/>
@@ -3261,7 +3435,7 @@
         </p:nvSpPr>
         <p:spPr>
           <a:xfrm>
-            <a:off x="411480" y="384048"/>
+            <a:off x="548640" y="384048"/>
             <a:ext cx="82296" cy="658368"/>
           </a:xfrm>
           <a:prstGeom prst="rect">
@@ -3281,7 +3455,7 @@
         </p:nvSpPr>
         <p:spPr>
           <a:xfrm>
-            <a:off x="640080" y="292608"/>
+            <a:off x="777240" y="292608"/>
             <a:ext cx="10972800" cy="274320"/>
           </a:xfrm>
           <a:prstGeom prst="rect">
@@ -3320,8 +3494,8 @@
         </p:nvSpPr>
         <p:spPr>
           <a:xfrm>
-            <a:off x="640080" y="530352"/>
-            <a:ext cx="11155680" cy="566928"/>
+            <a:off x="777240" y="530352"/>
+            <a:ext cx="10881360" cy="566928"/>
           </a:xfrm>
           <a:prstGeom prst="rect">
             <a:avLst/>
@@ -3675,6 +3849,54 @@
               <a:t>Cliente = assinante: vê faturas, cobranças e economia</a:t>
             </a:r>
             <a:endParaRPr lang="en-US" sz="1500" dirty="0"/>
+          </a:p>
+        </p:txBody>
+      </p:sp>
+      <p:sp>
+        <p:nvSpPr>
+          <p:cNvPr id="25" name="Slide Number Placeholder 0"/>
+          <p:cNvSpPr>
+            <a:spLocks noGrp="1"/>
+          </p:cNvSpPr>
+          <p:nvPr>
+            <p:ph type="sldNum" sz="quarter" idx="4294967295"/>
+          </p:nvPr>
+        </p:nvSpPr>
+        <p:spPr>
+          <a:xfrm>
+            <a:off x="11292840" y="6556248"/>
+            <a:ext cx="548640" cy="256032"/>
+          </a:xfrm>
+          <a:prstGeom prst="rect">
+            <a:avLst/>
+          </a:prstGeom>
+          <a:extLst>
+            <a:ext uri="{C572A759-6A51-4108-AA02-DFA0A04FC94B}">
+              <ma14:wrappingTextBoxFlag xmlns:ma14="http://schemas.microsoft.com/office/mac/drawingml/2011/main" val="0"/>
+            </a:ext>
+          </a:extLst>
+        </p:spPr>
+        <p:txBody>
+          <a:bodyPr/>
+          <a:lstStyle>
+            <a:lvl1pPr>
+              <a:defRPr sz="900">
+                <a:solidFill>
+                  <a:srgbClr val="1B3A6B"/>
+                </a:solidFill>
+                <a:latin typeface="Arial"/>
+                <a:ea typeface="Arial"/>
+                <a:cs typeface="Arial"/>
+              </a:defRPr>
+            </a:lvl1pPr>
+          </a:lstStyle>
+          <a:p>
+            <a:pPr algn="r"/>
+            <a:fld id="{F7021451-1387-4CA6-816F-3879F97B5CBC}" type="slidenum">
+              <a:rPr b="1" lang="en-US"/>
+              <a:t>11</a:t>
+            </a:fld>
+            <a:endParaRPr lang="en-US"/>
           </a:p>
         </p:txBody>
       </p:sp>
@@ -3751,7 +3973,7 @@
         </p:blipFill>
         <p:spPr>
           <a:xfrm>
-            <a:off x="411480" y="6547104"/>
+            <a:off x="548640" y="6547104"/>
             <a:ext cx="274320" cy="274320"/>
           </a:xfrm>
           <a:prstGeom prst="rect">
@@ -3767,7 +3989,7 @@
         </p:nvSpPr>
         <p:spPr>
           <a:xfrm>
-            <a:off x="749808" y="6528816"/>
+            <a:off x="886968" y="6528816"/>
             <a:ext cx="6400800" cy="310896"/>
           </a:xfrm>
           <a:prstGeom prst="rect">
@@ -3807,7 +4029,7 @@
         <p:spPr>
           <a:xfrm>
             <a:off x="7132320" y="6528816"/>
-            <a:ext cx="4663440" cy="310896"/>
+            <a:ext cx="4023360" cy="310896"/>
           </a:xfrm>
           <a:prstGeom prst="rect">
             <a:avLst/>
@@ -3845,7 +4067,7 @@
         </p:nvSpPr>
         <p:spPr>
           <a:xfrm>
-            <a:off x="411480" y="384048"/>
+            <a:off x="548640" y="384048"/>
             <a:ext cx="82296" cy="658368"/>
           </a:xfrm>
           <a:prstGeom prst="rect">
@@ -3865,7 +4087,7 @@
         </p:nvSpPr>
         <p:spPr>
           <a:xfrm>
-            <a:off x="640080" y="292608"/>
+            <a:off x="777240" y="292608"/>
             <a:ext cx="10972800" cy="274320"/>
           </a:xfrm>
           <a:prstGeom prst="rect">
@@ -3904,8 +4126,8 @@
         </p:nvSpPr>
         <p:spPr>
           <a:xfrm>
-            <a:off x="640080" y="530352"/>
-            <a:ext cx="11155680" cy="566928"/>
+            <a:off x="777240" y="530352"/>
+            <a:ext cx="10881360" cy="566928"/>
           </a:xfrm>
           <a:prstGeom prst="rect">
             <a:avLst/>
@@ -4106,6 +4328,54 @@
               <a:t>Produtor = dono da usina: vê suas usinas e a geração</a:t>
             </a:r>
             <a:endParaRPr lang="en-US" sz="1500" dirty="0"/>
+          </a:p>
+        </p:txBody>
+      </p:sp>
+      <p:sp>
+        <p:nvSpPr>
+          <p:cNvPr id="25" name="Slide Number Placeholder 0"/>
+          <p:cNvSpPr>
+            <a:spLocks noGrp="1"/>
+          </p:cNvSpPr>
+          <p:nvPr>
+            <p:ph type="sldNum" sz="quarter" idx="4294967295"/>
+          </p:nvPr>
+        </p:nvSpPr>
+        <p:spPr>
+          <a:xfrm>
+            <a:off x="11292840" y="6556248"/>
+            <a:ext cx="548640" cy="256032"/>
+          </a:xfrm>
+          <a:prstGeom prst="rect">
+            <a:avLst/>
+          </a:prstGeom>
+          <a:extLst>
+            <a:ext uri="{C572A759-6A51-4108-AA02-DFA0A04FC94B}">
+              <ma14:wrappingTextBoxFlag xmlns:ma14="http://schemas.microsoft.com/office/mac/drawingml/2011/main" val="0"/>
+            </a:ext>
+          </a:extLst>
+        </p:spPr>
+        <p:txBody>
+          <a:bodyPr/>
+          <a:lstStyle>
+            <a:lvl1pPr>
+              <a:defRPr sz="900">
+                <a:solidFill>
+                  <a:srgbClr val="1B3A6B"/>
+                </a:solidFill>
+                <a:latin typeface="Arial"/>
+                <a:ea typeface="Arial"/>
+                <a:cs typeface="Arial"/>
+              </a:defRPr>
+            </a:lvl1pPr>
+          </a:lstStyle>
+          <a:p>
+            <a:pPr algn="r"/>
+            <a:fld id="{F7021451-1387-4CA6-816F-3879F97B5CBC}" type="slidenum">
+              <a:rPr b="1" lang="en-US"/>
+              <a:t>12</a:t>
+            </a:fld>
+            <a:endParaRPr lang="en-US"/>
           </a:p>
         </p:txBody>
       </p:sp>
@@ -4182,7 +4452,7 @@
         </p:blipFill>
         <p:spPr>
           <a:xfrm>
-            <a:off x="411480" y="6547104"/>
+            <a:off x="548640" y="6547104"/>
             <a:ext cx="274320" cy="274320"/>
           </a:xfrm>
           <a:prstGeom prst="rect">
@@ -4198,7 +4468,7 @@
         </p:nvSpPr>
         <p:spPr>
           <a:xfrm>
-            <a:off x="749808" y="6528816"/>
+            <a:off x="886968" y="6528816"/>
             <a:ext cx="6400800" cy="310896"/>
           </a:xfrm>
           <a:prstGeom prst="rect">
@@ -4238,7 +4508,7 @@
         <p:spPr>
           <a:xfrm>
             <a:off x="7132320" y="6528816"/>
-            <a:ext cx="4663440" cy="310896"/>
+            <a:ext cx="4023360" cy="310896"/>
           </a:xfrm>
           <a:prstGeom prst="rect">
             <a:avLst/>
@@ -4276,7 +4546,7 @@
         </p:nvSpPr>
         <p:spPr>
           <a:xfrm>
-            <a:off x="411480" y="384048"/>
+            <a:off x="548640" y="384048"/>
             <a:ext cx="82296" cy="658368"/>
           </a:xfrm>
           <a:prstGeom prst="rect">
@@ -4296,7 +4566,7 @@
         </p:nvSpPr>
         <p:spPr>
           <a:xfrm>
-            <a:off x="640080" y="292608"/>
+            <a:off x="777240" y="292608"/>
             <a:ext cx="10972800" cy="274320"/>
           </a:xfrm>
           <a:prstGeom prst="rect">
@@ -4335,8 +4605,8 @@
         </p:nvSpPr>
         <p:spPr>
           <a:xfrm>
-            <a:off x="640080" y="530352"/>
-            <a:ext cx="11155680" cy="566928"/>
+            <a:off x="777240" y="530352"/>
+            <a:ext cx="10881360" cy="566928"/>
           </a:xfrm>
           <a:prstGeom prst="rect">
             <a:avLst/>
@@ -4426,6 +4696,54 @@
           </a:prstGeom>
         </p:spPr>
       </p:pic>
+      <p:sp>
+        <p:nvSpPr>
+          <p:cNvPr id="25" name="Slide Number Placeholder 0"/>
+          <p:cNvSpPr>
+            <a:spLocks noGrp="1"/>
+          </p:cNvSpPr>
+          <p:nvPr>
+            <p:ph type="sldNum" sz="quarter" idx="4294967295"/>
+          </p:nvPr>
+        </p:nvSpPr>
+        <p:spPr>
+          <a:xfrm>
+            <a:off x="11292840" y="6556248"/>
+            <a:ext cx="548640" cy="256032"/>
+          </a:xfrm>
+          <a:prstGeom prst="rect">
+            <a:avLst/>
+          </a:prstGeom>
+          <a:extLst>
+            <a:ext uri="{C572A759-6A51-4108-AA02-DFA0A04FC94B}">
+              <ma14:wrappingTextBoxFlag xmlns:ma14="http://schemas.microsoft.com/office/mac/drawingml/2011/main" val="0"/>
+            </a:ext>
+          </a:extLst>
+        </p:spPr>
+        <p:txBody>
+          <a:bodyPr/>
+          <a:lstStyle>
+            <a:lvl1pPr>
+              <a:defRPr sz="900">
+                <a:solidFill>
+                  <a:srgbClr val="1B3A6B"/>
+                </a:solidFill>
+                <a:latin typeface="Arial"/>
+                <a:ea typeface="Arial"/>
+                <a:cs typeface="Arial"/>
+              </a:defRPr>
+            </a:lvl1pPr>
+          </a:lstStyle>
+          <a:p>
+            <a:pPr algn="r"/>
+            <a:fld id="{F7021451-1387-4CA6-816F-3879F97B5CBC}" type="slidenum">
+              <a:rPr b="1" lang="en-US"/>
+              <a:t>13</a:t>
+            </a:fld>
+            <a:endParaRPr lang="en-US"/>
+          </a:p>
+        </p:txBody>
+      </p:sp>
     </p:spTree>
   </p:cSld>
   <p:clrMapOvr>
@@ -4499,7 +4817,7 @@
         </p:blipFill>
         <p:spPr>
           <a:xfrm>
-            <a:off x="411480" y="6547104"/>
+            <a:off x="548640" y="6547104"/>
             <a:ext cx="274320" cy="274320"/>
           </a:xfrm>
           <a:prstGeom prst="rect">
@@ -4515,7 +4833,7 @@
         </p:nvSpPr>
         <p:spPr>
           <a:xfrm>
-            <a:off x="749808" y="6528816"/>
+            <a:off x="886968" y="6528816"/>
             <a:ext cx="6400800" cy="310896"/>
           </a:xfrm>
           <a:prstGeom prst="rect">
@@ -4555,7 +4873,7 @@
         <p:spPr>
           <a:xfrm>
             <a:off x="7132320" y="6528816"/>
-            <a:ext cx="4663440" cy="310896"/>
+            <a:ext cx="4023360" cy="310896"/>
           </a:xfrm>
           <a:prstGeom prst="rect">
             <a:avLst/>
@@ -4593,7 +4911,7 @@
         </p:nvSpPr>
         <p:spPr>
           <a:xfrm>
-            <a:off x="411480" y="384048"/>
+            <a:off x="548640" y="384048"/>
             <a:ext cx="82296" cy="658368"/>
           </a:xfrm>
           <a:prstGeom prst="rect">
@@ -4613,7 +4931,7 @@
         </p:nvSpPr>
         <p:spPr>
           <a:xfrm>
-            <a:off x="640080" y="292608"/>
+            <a:off x="777240" y="292608"/>
             <a:ext cx="10972800" cy="274320"/>
           </a:xfrm>
           <a:prstGeom prst="rect">
@@ -4652,8 +4970,8 @@
         </p:nvSpPr>
         <p:spPr>
           <a:xfrm>
-            <a:off x="640080" y="530352"/>
-            <a:ext cx="11155680" cy="566928"/>
+            <a:off x="777240" y="530352"/>
+            <a:ext cx="10881360" cy="566928"/>
           </a:xfrm>
           <a:prstGeom prst="rect">
             <a:avLst/>
@@ -4743,6 +5061,54 @@
           </a:prstGeom>
         </p:spPr>
       </p:pic>
+      <p:sp>
+        <p:nvSpPr>
+          <p:cNvPr id="25" name="Slide Number Placeholder 0"/>
+          <p:cNvSpPr>
+            <a:spLocks noGrp="1"/>
+          </p:cNvSpPr>
+          <p:nvPr>
+            <p:ph type="sldNum" sz="quarter" idx="4294967295"/>
+          </p:nvPr>
+        </p:nvSpPr>
+        <p:spPr>
+          <a:xfrm>
+            <a:off x="11292840" y="6556248"/>
+            <a:ext cx="548640" cy="256032"/>
+          </a:xfrm>
+          <a:prstGeom prst="rect">
+            <a:avLst/>
+          </a:prstGeom>
+          <a:extLst>
+            <a:ext uri="{C572A759-6A51-4108-AA02-DFA0A04FC94B}">
+              <ma14:wrappingTextBoxFlag xmlns:ma14="http://schemas.microsoft.com/office/mac/drawingml/2011/main" val="0"/>
+            </a:ext>
+          </a:extLst>
+        </p:spPr>
+        <p:txBody>
+          <a:bodyPr/>
+          <a:lstStyle>
+            <a:lvl1pPr>
+              <a:defRPr sz="900">
+                <a:solidFill>
+                  <a:srgbClr val="1B3A6B"/>
+                </a:solidFill>
+                <a:latin typeface="Arial"/>
+                <a:ea typeface="Arial"/>
+                <a:cs typeface="Arial"/>
+              </a:defRPr>
+            </a:lvl1pPr>
+          </a:lstStyle>
+          <a:p>
+            <a:pPr algn="r"/>
+            <a:fld id="{F7021451-1387-4CA6-816F-3879F97B5CBC}" type="slidenum">
+              <a:rPr b="1" lang="en-US"/>
+              <a:t>14</a:t>
+            </a:fld>
+            <a:endParaRPr lang="en-US"/>
+          </a:p>
+        </p:txBody>
+      </p:sp>
     </p:spTree>
   </p:cSld>
   <p:clrMapOvr>
@@ -4803,6 +5169,45 @@
         </p:nvSpPr>
         <p:spPr>
           <a:xfrm>
+            <a:off x="457200" y="548640"/>
+            <a:ext cx="3474720" cy="1737360"/>
+          </a:xfrm>
+          <a:prstGeom prst="rect">
+            <a:avLst/>
+          </a:prstGeom>
+          <a:noFill/>
+          <a:ln/>
+        </p:spPr>
+        <p:txBody>
+          <a:bodyPr wrap="square" rtlCol="0" anchor="ctr"/>
+          <a:lstStyle/>
+          <a:p>
+            <a:pPr indent="0" marL="0">
+              <a:buNone/>
+            </a:pPr>
+            <a:r>
+              <a:rPr lang="en-US" sz="11000" b="1" dirty="0">
+                <a:solidFill>
+                  <a:srgbClr val="11396F"/>
+                </a:solidFill>
+                <a:latin typeface="Arial" pitchFamily="34" charset="0"/>
+                <a:ea typeface="Arial" pitchFamily="34" charset="-122"/>
+                <a:cs typeface="Arial" pitchFamily="34" charset="-120"/>
+              </a:rPr>
+              <a:t>04</a:t>
+            </a:r>
+            <a:endParaRPr lang="en-US" sz="11000" dirty="0"/>
+          </a:p>
+        </p:txBody>
+      </p:sp>
+      <p:sp>
+        <p:nvSpPr>
+          <p:cNvPr id="4" name="Text 2"/>
+          <p:cNvSpPr/>
+          <p:nvPr/>
+        </p:nvSpPr>
+        <p:spPr>
+          <a:xfrm>
             <a:off x="548640" y="2194560"/>
             <a:ext cx="3291840" cy="548640"/>
           </a:xfrm>
@@ -4836,7 +5241,46 @@
       </p:sp>
       <p:sp>
         <p:nvSpPr>
-          <p:cNvPr id="4" name="Text 2"/>
+          <p:cNvPr id="5" name="Text 3"/>
+          <p:cNvSpPr/>
+          <p:nvPr/>
+        </p:nvSpPr>
+        <p:spPr>
+          <a:xfrm>
+            <a:off x="548640" y="3200400"/>
+            <a:ext cx="3383280" cy="457200"/>
+          </a:xfrm>
+          <a:prstGeom prst="rect">
+            <a:avLst/>
+          </a:prstGeom>
+          <a:noFill/>
+          <a:ln/>
+        </p:spPr>
+        <p:txBody>
+          <a:bodyPr wrap="square" rtlCol="0" anchor="ctr"/>
+          <a:lstStyle/>
+          <a:p>
+            <a:pPr indent="0" marL="0">
+              <a:buNone/>
+            </a:pPr>
+            <a:r>
+              <a:rPr lang="en-US" sz="1100" dirty="0">
+                <a:solidFill>
+                  <a:srgbClr val="C7D2E3"/>
+                </a:solidFill>
+                <a:latin typeface="Arial" pitchFamily="34" charset="0"/>
+                <a:ea typeface="Arial" pitchFamily="34" charset="-122"/>
+                <a:cs typeface="Arial" pitchFamily="34" charset="-120"/>
+              </a:rPr>
+              <a:t>M0 · Etapa 1 · Fundamentos</a:t>
+            </a:r>
+            <a:endParaRPr lang="en-US" sz="1100" dirty="0"/>
+          </a:p>
+        </p:txBody>
+      </p:sp>
+      <p:sp>
+        <p:nvSpPr>
+          <p:cNvPr id="6" name="Text 4"/>
           <p:cNvSpPr/>
           <p:nvPr/>
         </p:nvSpPr>
@@ -4875,7 +5319,7 @@
       </p:sp>
       <p:pic>
         <p:nvPicPr>
-          <p:cNvPr id="5" name="Image 0" descr="/www/wwwroot/rexar/gdsolar/docs/curso/slides/assets/logo-gdsolar.png">    </p:cNvPr>
+          <p:cNvPr id="7" name="Image 0" descr="/www/wwwroot/rexar/gdsolar/docs/curso/slides/assets/logo-gdsolar.png">    </p:cNvPr>
           <p:cNvPicPr>
             <a:picLocks noChangeAspect="1"/>
           </p:cNvPicPr>
@@ -4899,7 +5343,7 @@
       </p:pic>
       <p:sp>
         <p:nvSpPr>
-          <p:cNvPr id="6" name="Text 3"/>
+          <p:cNvPr id="8" name="Text 5"/>
           <p:cNvSpPr/>
           <p:nvPr/>
         </p:nvSpPr>
@@ -4940,7 +5384,7 @@
       </p:sp>
       <p:sp>
         <p:nvSpPr>
-          <p:cNvPr id="7" name="Text 4"/>
+          <p:cNvPr id="9" name="Text 6"/>
           <p:cNvSpPr/>
           <p:nvPr/>
         </p:nvSpPr>
@@ -4981,7 +5425,7 @@
       </p:sp>
       <p:sp>
         <p:nvSpPr>
-          <p:cNvPr id="8" name="Text 5"/>
+          <p:cNvPr id="10" name="Text 7"/>
           <p:cNvSpPr/>
           <p:nvPr/>
         </p:nvSpPr>
@@ -5160,7 +5604,7 @@
         </p:blipFill>
         <p:spPr>
           <a:xfrm>
-            <a:off x="411480" y="6547104"/>
+            <a:off x="548640" y="6547104"/>
             <a:ext cx="274320" cy="274320"/>
           </a:xfrm>
           <a:prstGeom prst="rect">
@@ -5176,7 +5620,7 @@
         </p:nvSpPr>
         <p:spPr>
           <a:xfrm>
-            <a:off x="749808" y="6528816"/>
+            <a:off x="886968" y="6528816"/>
             <a:ext cx="6400800" cy="310896"/>
           </a:xfrm>
           <a:prstGeom prst="rect">
@@ -5216,7 +5660,7 @@
         <p:spPr>
           <a:xfrm>
             <a:off x="7132320" y="6528816"/>
-            <a:ext cx="4663440" cy="310896"/>
+            <a:ext cx="4023360" cy="310896"/>
           </a:xfrm>
           <a:prstGeom prst="rect">
             <a:avLst/>
@@ -5254,7 +5698,7 @@
         </p:nvSpPr>
         <p:spPr>
           <a:xfrm>
-            <a:off x="411480" y="384048"/>
+            <a:off x="548640" y="384048"/>
             <a:ext cx="82296" cy="658368"/>
           </a:xfrm>
           <a:prstGeom prst="rect">
@@ -5274,7 +5718,7 @@
         </p:nvSpPr>
         <p:spPr>
           <a:xfrm>
-            <a:off x="640080" y="292608"/>
+            <a:off x="777240" y="292608"/>
             <a:ext cx="10972800" cy="274320"/>
           </a:xfrm>
           <a:prstGeom prst="rect">
@@ -5313,8 +5757,8 @@
         </p:nvSpPr>
         <p:spPr>
           <a:xfrm>
-            <a:off x="640080" y="530352"/>
-            <a:ext cx="11155680" cy="566928"/>
+            <a:off x="777240" y="530352"/>
+            <a:ext cx="10881360" cy="566928"/>
           </a:xfrm>
           <a:prstGeom prst="rect">
             <a:avLst/>
@@ -5354,12 +5798,12 @@
         </p:nvSpPr>
         <p:spPr>
           <a:xfrm>
-            <a:off x="411480" y="1325880"/>
-            <a:ext cx="3611880" cy="4937760"/>
+            <a:off x="548640" y="1325880"/>
+            <a:ext cx="3514344" cy="4937760"/>
           </a:xfrm>
           <a:prstGeom prst="roundRect">
             <a:avLst>
-              <a:gd name="adj" fmla="val 2025"/>
+              <a:gd name="adj" fmla="val 2082"/>
             </a:avLst>
           </a:prstGeom>
           <a:solidFill>
@@ -5388,8 +5832,8 @@
         </p:nvSpPr>
         <p:spPr>
           <a:xfrm>
-            <a:off x="411480" y="1325880"/>
-            <a:ext cx="3611880" cy="109728"/>
+            <a:off x="548640" y="1325880"/>
+            <a:ext cx="3514344" cy="109728"/>
           </a:xfrm>
           <a:prstGeom prst="rect">
             <a:avLst/>
@@ -5408,8 +5852,8 @@
         </p:nvSpPr>
         <p:spPr>
           <a:xfrm>
-            <a:off x="685800" y="1554480"/>
-            <a:ext cx="3063240" cy="685800"/>
+            <a:off x="822960" y="1554480"/>
+            <a:ext cx="2965704" cy="685800"/>
           </a:xfrm>
           <a:prstGeom prst="rect">
             <a:avLst/>
@@ -5449,8 +5893,8 @@
         </p:nvSpPr>
         <p:spPr>
           <a:xfrm>
-            <a:off x="685800" y="2286000"/>
-            <a:ext cx="3063240" cy="3749040"/>
+            <a:off x="822960" y="2286000"/>
+            <a:ext cx="2965704" cy="3749040"/>
           </a:xfrm>
           <a:prstGeom prst="rect">
             <a:avLst/>
@@ -5536,12 +5980,12 @@
         </p:nvSpPr>
         <p:spPr>
           <a:xfrm>
-            <a:off x="4297680" y="1325880"/>
-            <a:ext cx="3611880" cy="4937760"/>
+            <a:off x="4337304" y="1325880"/>
+            <a:ext cx="3514344" cy="4937760"/>
           </a:xfrm>
           <a:prstGeom prst="roundRect">
             <a:avLst>
-              <a:gd name="adj" fmla="val 2025"/>
+              <a:gd name="adj" fmla="val 2082"/>
             </a:avLst>
           </a:prstGeom>
           <a:solidFill>
@@ -5570,8 +6014,8 @@
         </p:nvSpPr>
         <p:spPr>
           <a:xfrm>
-            <a:off x="4297680" y="1325880"/>
-            <a:ext cx="3611880" cy="109728"/>
+            <a:off x="4337304" y="1325880"/>
+            <a:ext cx="3514344" cy="109728"/>
           </a:xfrm>
           <a:prstGeom prst="rect">
             <a:avLst/>
@@ -5590,8 +6034,8 @@
         </p:nvSpPr>
         <p:spPr>
           <a:xfrm>
-            <a:off x="4572000" y="1554480"/>
-            <a:ext cx="3063240" cy="685800"/>
+            <a:off x="4611624" y="1554480"/>
+            <a:ext cx="2965704" cy="685800"/>
           </a:xfrm>
           <a:prstGeom prst="rect">
             <a:avLst/>
@@ -5631,8 +6075,8 @@
         </p:nvSpPr>
         <p:spPr>
           <a:xfrm>
-            <a:off x="4572000" y="2286000"/>
-            <a:ext cx="3063240" cy="3749040"/>
+            <a:off x="4611624" y="2286000"/>
+            <a:ext cx="2965704" cy="3749040"/>
           </a:xfrm>
           <a:prstGeom prst="rect">
             <a:avLst/>
@@ -5654,7 +6098,7 @@
               <a:buChar char="●"/>
             </a:pPr>
             <a:r>
-              <a:rPr lang="en-US" sz="1300" dirty="0">
+              <a:rPr lang="en-US" sz="1700" dirty="0">
                 <a:solidFill>
                   <a:srgbClr val="1F2937"/>
                 </a:solidFill>
@@ -5664,7 +6108,7 @@
               </a:rPr>
               <a:t>- Nome da empresa (fictício)</a:t>
             </a:r>
-            <a:endParaRPr lang="en-US" sz="1300" dirty="0"/>
+            <a:endParaRPr lang="en-US" sz="1700" dirty="0"/>
           </a:p>
           <a:p>
             <a:pPr marL="342900" indent="-342900">
@@ -5675,7 +6119,7 @@
               <a:buChar char="●"/>
             </a:pPr>
             <a:r>
-              <a:rPr lang="en-US" sz="1300" dirty="0">
+              <a:rPr lang="en-US" sz="1700" dirty="0">
                 <a:solidFill>
                   <a:srgbClr val="1F2937"/>
                 </a:solidFill>
@@ -5685,7 +6129,7 @@
               </a:rPr>
               <a:t>- Cidade e estado de atuação</a:t>
             </a:r>
-            <a:endParaRPr lang="en-US" sz="1300" dirty="0"/>
+            <a:endParaRPr lang="en-US" sz="1700" dirty="0"/>
           </a:p>
           <a:p>
             <a:pPr marL="342900" indent="-342900">
@@ -5696,7 +6140,7 @@
               <a:buChar char="●"/>
             </a:pPr>
             <a:r>
-              <a:rPr lang="en-US" sz="1300" dirty="0">
+              <a:rPr lang="en-US" sz="1700" dirty="0">
                 <a:solidFill>
                   <a:srgbClr val="1F2937"/>
                 </a:solidFill>
@@ -5706,7 +6150,7 @@
               </a:rPr>
               <a:t>- Distribuidora da região</a:t>
             </a:r>
-            <a:endParaRPr lang="en-US" sz="1300" dirty="0"/>
+            <a:endParaRPr lang="en-US" sz="1700" dirty="0"/>
           </a:p>
           <a:p>
             <a:pPr marL="342900" indent="-342900">
@@ -5717,7 +6161,7 @@
               <a:buChar char="●"/>
             </a:pPr>
             <a:r>
-              <a:rPr lang="en-US" sz="1300" dirty="0">
+              <a:rPr lang="en-US" sz="1700" dirty="0">
                 <a:solidFill>
                   <a:srgbClr val="1F2937"/>
                 </a:solidFill>
@@ -5727,7 +6171,7 @@
               </a:rPr>
               <a:t>- Perfil: começando do zero / já tenho empresa solar</a:t>
             </a:r>
-            <a:endParaRPr lang="en-US" sz="1300" dirty="0"/>
+            <a:endParaRPr lang="en-US" sz="1700" dirty="0"/>
           </a:p>
           <a:p>
             <a:pPr marL="342900" indent="-342900">
@@ -5738,7 +6182,7 @@
               <a:buChar char="●"/>
             </a:pPr>
             <a:r>
-              <a:rPr lang="en-US" sz="1300" dirty="0">
+              <a:rPr lang="en-US" sz="1700" dirty="0">
                 <a:solidFill>
                   <a:srgbClr val="1F2937"/>
                 </a:solidFill>
@@ -5748,7 +6192,7 @@
               </a:rPr>
               <a:t>- Meta de 12 meses: usinas, clientes, kWh</a:t>
             </a:r>
-            <a:endParaRPr lang="en-US" sz="1300" dirty="0"/>
+            <a:endParaRPr lang="en-US" sz="1700" dirty="0"/>
           </a:p>
         </p:txBody>
       </p:sp>
@@ -5760,12 +6204,12 @@
         </p:nvSpPr>
         <p:spPr>
           <a:xfrm>
-            <a:off x="8183880" y="1325880"/>
-            <a:ext cx="3611880" cy="4937760"/>
+            <a:off x="8125968" y="1325880"/>
+            <a:ext cx="3514344" cy="4937760"/>
           </a:xfrm>
           <a:prstGeom prst="roundRect">
             <a:avLst>
-              <a:gd name="adj" fmla="val 2025"/>
+              <a:gd name="adj" fmla="val 2082"/>
             </a:avLst>
           </a:prstGeom>
           <a:solidFill>
@@ -5794,8 +6238,8 @@
         </p:nvSpPr>
         <p:spPr>
           <a:xfrm>
-            <a:off x="8183880" y="1325880"/>
-            <a:ext cx="3611880" cy="109728"/>
+            <a:off x="8125968" y="1325880"/>
+            <a:ext cx="3514344" cy="109728"/>
           </a:xfrm>
           <a:prstGeom prst="rect">
             <a:avLst/>
@@ -5814,8 +6258,8 @@
         </p:nvSpPr>
         <p:spPr>
           <a:xfrm>
-            <a:off x="8458200" y="1554480"/>
-            <a:ext cx="3063240" cy="685800"/>
+            <a:off x="8400288" y="1554480"/>
+            <a:ext cx="2965704" cy="685800"/>
           </a:xfrm>
           <a:prstGeom prst="rect">
             <a:avLst/>
@@ -5855,8 +6299,8 @@
         </p:nvSpPr>
         <p:spPr>
           <a:xfrm>
-            <a:off x="8458200" y="2286000"/>
-            <a:ext cx="3063240" cy="3749040"/>
+            <a:off x="8400288" y="2286000"/>
+            <a:ext cx="2965704" cy="3749040"/>
           </a:xfrm>
           <a:prstGeom prst="rect">
             <a:avLst/>
@@ -5878,7 +6322,7 @@
               <a:buChar char="●"/>
             </a:pPr>
             <a:r>
-              <a:rPr lang="en-US" sz="1300" dirty="0">
+              <a:rPr lang="en-US" sz="1700" dirty="0">
                 <a:solidFill>
                   <a:srgbClr val="1F2937"/>
                 </a:solidFill>
@@ -5888,7 +6332,7 @@
               </a:rPr>
               <a:t>- Solaris Assinaturas (fictícia)</a:t>
             </a:r>
-            <a:endParaRPr lang="en-US" sz="1300" dirty="0"/>
+            <a:endParaRPr lang="en-US" sz="1700" dirty="0"/>
           </a:p>
           <a:p>
             <a:pPr marL="342900" indent="-342900">
@@ -5899,7 +6343,7 @@
               <a:buChar char="●"/>
             </a:pPr>
             <a:r>
-              <a:rPr lang="en-US" sz="1300" dirty="0">
+              <a:rPr lang="en-US" sz="1700" dirty="0">
                 <a:solidFill>
                   <a:srgbClr val="1F2937"/>
                 </a:solidFill>
@@ -5909,7 +6353,7 @@
               </a:rPr>
               <a:t>- Maringá – PR</a:t>
             </a:r>
-            <a:endParaRPr lang="en-US" sz="1300" dirty="0"/>
+            <a:endParaRPr lang="en-US" sz="1700" dirty="0"/>
           </a:p>
           <a:p>
             <a:pPr marL="342900" indent="-342900">
@@ -5920,7 +6364,7 @@
               <a:buChar char="●"/>
             </a:pPr>
             <a:r>
-              <a:rPr lang="en-US" sz="1300" dirty="0">
+              <a:rPr lang="en-US" sz="1700" dirty="0">
                 <a:solidFill>
                   <a:srgbClr val="1F2937"/>
                 </a:solidFill>
@@ -5930,7 +6374,7 @@
               </a:rPr>
               <a:t>- Distribuidora da região: a do estado</a:t>
             </a:r>
-            <a:endParaRPr lang="en-US" sz="1300" dirty="0"/>
+            <a:endParaRPr lang="en-US" sz="1700" dirty="0"/>
           </a:p>
           <a:p>
             <a:pPr marL="342900" indent="-342900">
@@ -5941,7 +6385,7 @@
               <a:buChar char="●"/>
             </a:pPr>
             <a:r>
-              <a:rPr lang="en-US" sz="1300" dirty="0">
+              <a:rPr lang="en-US" sz="1700" dirty="0">
                 <a:solidFill>
                   <a:srgbClr val="1F2937"/>
                 </a:solidFill>
@@ -5951,7 +6395,7 @@
               </a:rPr>
               <a:t>- Empresa solar (integradora com 6 anos)</a:t>
             </a:r>
-            <a:endParaRPr lang="en-US" sz="1300" dirty="0"/>
+            <a:endParaRPr lang="en-US" sz="1700" dirty="0"/>
           </a:p>
           <a:p>
             <a:pPr marL="342900" indent="-342900">
@@ -5962,7 +6406,7 @@
               <a:buChar char="●"/>
             </a:pPr>
             <a:r>
-              <a:rPr lang="en-US" sz="1300" dirty="0">
+              <a:rPr lang="en-US" sz="1700" dirty="0">
                 <a:solidFill>
                   <a:srgbClr val="1F2937"/>
                 </a:solidFill>
@@ -5972,7 +6416,55 @@
               </a:rPr>
               <a:t>- 12 meses: 1 usina de 1 MW, 300 clientes</a:t>
             </a:r>
-            <a:endParaRPr lang="en-US" sz="1300" dirty="0"/>
+            <a:endParaRPr lang="en-US" sz="1700" dirty="0"/>
+          </a:p>
+        </p:txBody>
+      </p:sp>
+      <p:sp>
+        <p:nvSpPr>
+          <p:cNvPr id="25" name="Slide Number Placeholder 0"/>
+          <p:cNvSpPr>
+            <a:spLocks noGrp="1"/>
+          </p:cNvSpPr>
+          <p:nvPr>
+            <p:ph type="sldNum" sz="quarter" idx="4294967295"/>
+          </p:nvPr>
+        </p:nvSpPr>
+        <p:spPr>
+          <a:xfrm>
+            <a:off x="11292840" y="6556248"/>
+            <a:ext cx="548640" cy="256032"/>
+          </a:xfrm>
+          <a:prstGeom prst="rect">
+            <a:avLst/>
+          </a:prstGeom>
+          <a:extLst>
+            <a:ext uri="{C572A759-6A51-4108-AA02-DFA0A04FC94B}">
+              <ma14:wrappingTextBoxFlag xmlns:ma14="http://schemas.microsoft.com/office/mac/drawingml/2011/main" val="0"/>
+            </a:ext>
+          </a:extLst>
+        </p:spPr>
+        <p:txBody>
+          <a:bodyPr/>
+          <a:lstStyle>
+            <a:lvl1pPr>
+              <a:defRPr sz="900">
+                <a:solidFill>
+                  <a:srgbClr val="1B3A6B"/>
+                </a:solidFill>
+                <a:latin typeface="Arial"/>
+                <a:ea typeface="Arial"/>
+                <a:cs typeface="Arial"/>
+              </a:defRPr>
+            </a:lvl1pPr>
+          </a:lstStyle>
+          <a:p>
+            <a:pPr algn="r"/>
+            <a:fld id="{F7021451-1387-4CA6-816F-3879F97B5CBC}" type="slidenum">
+              <a:rPr b="1" lang="en-US"/>
+              <a:t>16</a:t>
+            </a:fld>
+            <a:endParaRPr lang="en-US"/>
           </a:p>
         </p:txBody>
       </p:sp>
@@ -6049,7 +6541,7 @@
         </p:blipFill>
         <p:spPr>
           <a:xfrm>
-            <a:off x="411480" y="6547104"/>
+            <a:off x="548640" y="6547104"/>
             <a:ext cx="274320" cy="274320"/>
           </a:xfrm>
           <a:prstGeom prst="rect">
@@ -6065,7 +6557,7 @@
         </p:nvSpPr>
         <p:spPr>
           <a:xfrm>
-            <a:off x="749808" y="6528816"/>
+            <a:off x="886968" y="6528816"/>
             <a:ext cx="6400800" cy="310896"/>
           </a:xfrm>
           <a:prstGeom prst="rect">
@@ -6105,7 +6597,7 @@
         <p:spPr>
           <a:xfrm>
             <a:off x="7132320" y="6528816"/>
-            <a:ext cx="4663440" cy="310896"/>
+            <a:ext cx="4023360" cy="310896"/>
           </a:xfrm>
           <a:prstGeom prst="rect">
             <a:avLst/>
@@ -6143,7 +6635,7 @@
         </p:nvSpPr>
         <p:spPr>
           <a:xfrm>
-            <a:off x="411480" y="384048"/>
+            <a:off x="548640" y="384048"/>
             <a:ext cx="82296" cy="658368"/>
           </a:xfrm>
           <a:prstGeom prst="rect">
@@ -6163,7 +6655,7 @@
         </p:nvSpPr>
         <p:spPr>
           <a:xfrm>
-            <a:off x="640080" y="292608"/>
+            <a:off x="777240" y="292608"/>
             <a:ext cx="10972800" cy="274320"/>
           </a:xfrm>
           <a:prstGeom prst="rect">
@@ -6202,8 +6694,8 @@
         </p:nvSpPr>
         <p:spPr>
           <a:xfrm>
-            <a:off x="640080" y="530352"/>
-            <a:ext cx="11155680" cy="566928"/>
+            <a:off x="777240" y="530352"/>
+            <a:ext cx="10881360" cy="566928"/>
           </a:xfrm>
           <a:prstGeom prst="rect">
             <a:avLst/>
@@ -6243,8 +6735,8 @@
         </p:nvSpPr>
         <p:spPr>
           <a:xfrm>
-            <a:off x="411480" y="1325880"/>
-            <a:ext cx="11384280" cy="4892040"/>
+            <a:off x="548640" y="1325880"/>
+            <a:ext cx="11091672" cy="4892040"/>
           </a:xfrm>
           <a:prstGeom prst="roundRect">
             <a:avLst>
@@ -6277,7 +6769,7 @@
         </p:nvSpPr>
         <p:spPr>
           <a:xfrm>
-            <a:off x="594360" y="1508760"/>
+            <a:off x="731520" y="1508760"/>
             <a:ext cx="457200" cy="457200"/>
           </a:xfrm>
           <a:prstGeom prst="ellipse">
@@ -6297,7 +6789,7 @@
         </p:nvSpPr>
         <p:spPr>
           <a:xfrm>
-            <a:off x="594360" y="1508760"/>
+            <a:off x="731520" y="1508760"/>
             <a:ext cx="457200" cy="457200"/>
           </a:xfrm>
           <a:prstGeom prst="rect">
@@ -6336,8 +6828,8 @@
         </p:nvSpPr>
         <p:spPr>
           <a:xfrm>
-            <a:off x="1188720" y="1435608"/>
-            <a:ext cx="10469880" cy="4672584"/>
+            <a:off x="1325880" y="1435608"/>
+            <a:ext cx="10177272" cy="4672584"/>
           </a:xfrm>
           <a:prstGeom prst="rect">
             <a:avLst/>
@@ -6366,6 +6858,54 @@
               <a:t>Cada módulo = uma peça da sua empresa</a:t>
             </a:r>
             <a:endParaRPr lang="en-US" sz="1800" dirty="0"/>
+          </a:p>
+        </p:txBody>
+      </p:sp>
+      <p:sp>
+        <p:nvSpPr>
+          <p:cNvPr id="25" name="Slide Number Placeholder 0"/>
+          <p:cNvSpPr>
+            <a:spLocks noGrp="1"/>
+          </p:cNvSpPr>
+          <p:nvPr>
+            <p:ph type="sldNum" sz="quarter" idx="4294967295"/>
+          </p:nvPr>
+        </p:nvSpPr>
+        <p:spPr>
+          <a:xfrm>
+            <a:off x="11292840" y="6556248"/>
+            <a:ext cx="548640" cy="256032"/>
+          </a:xfrm>
+          <a:prstGeom prst="rect">
+            <a:avLst/>
+          </a:prstGeom>
+          <a:extLst>
+            <a:ext uri="{C572A759-6A51-4108-AA02-DFA0A04FC94B}">
+              <ma14:wrappingTextBoxFlag xmlns:ma14="http://schemas.microsoft.com/office/mac/drawingml/2011/main" val="0"/>
+            </a:ext>
+          </a:extLst>
+        </p:spPr>
+        <p:txBody>
+          <a:bodyPr/>
+          <a:lstStyle>
+            <a:lvl1pPr>
+              <a:defRPr sz="900">
+                <a:solidFill>
+                  <a:srgbClr val="1B3A6B"/>
+                </a:solidFill>
+                <a:latin typeface="Arial"/>
+                <a:ea typeface="Arial"/>
+                <a:cs typeface="Arial"/>
+              </a:defRPr>
+            </a:lvl1pPr>
+          </a:lstStyle>
+          <a:p>
+            <a:pPr algn="r"/>
+            <a:fld id="{F7021451-1387-4CA6-816F-3879F97B5CBC}" type="slidenum">
+              <a:rPr b="1" lang="en-US"/>
+              <a:t>17</a:t>
+            </a:fld>
+            <a:endParaRPr lang="en-US"/>
           </a:p>
         </p:txBody>
       </p:sp>
@@ -6442,7 +6982,7 @@
         </p:blipFill>
         <p:spPr>
           <a:xfrm>
-            <a:off x="411480" y="6547104"/>
+            <a:off x="548640" y="6547104"/>
             <a:ext cx="274320" cy="274320"/>
           </a:xfrm>
           <a:prstGeom prst="rect">
@@ -6458,7 +6998,7 @@
         </p:nvSpPr>
         <p:spPr>
           <a:xfrm>
-            <a:off x="749808" y="6528816"/>
+            <a:off x="886968" y="6528816"/>
             <a:ext cx="6400800" cy="310896"/>
           </a:xfrm>
           <a:prstGeom prst="rect">
@@ -6498,7 +7038,7 @@
         <p:spPr>
           <a:xfrm>
             <a:off x="7132320" y="6528816"/>
-            <a:ext cx="4663440" cy="310896"/>
+            <a:ext cx="4023360" cy="310896"/>
           </a:xfrm>
           <a:prstGeom prst="rect">
             <a:avLst/>
@@ -6536,7 +7076,7 @@
         </p:nvSpPr>
         <p:spPr>
           <a:xfrm>
-            <a:off x="411480" y="384048"/>
+            <a:off x="548640" y="384048"/>
             <a:ext cx="82296" cy="658368"/>
           </a:xfrm>
           <a:prstGeom prst="rect">
@@ -6556,7 +7096,7 @@
         </p:nvSpPr>
         <p:spPr>
           <a:xfrm>
-            <a:off x="640080" y="292608"/>
+            <a:off x="777240" y="292608"/>
             <a:ext cx="10972800" cy="274320"/>
           </a:xfrm>
           <a:prstGeom prst="rect">
@@ -6595,8 +7135,8 @@
         </p:nvSpPr>
         <p:spPr>
           <a:xfrm>
-            <a:off x="640080" y="530352"/>
-            <a:ext cx="11155680" cy="566928"/>
+            <a:off x="777240" y="530352"/>
+            <a:ext cx="10881360" cy="566928"/>
           </a:xfrm>
           <a:prstGeom prst="rect">
             <a:avLst/>
@@ -6636,8 +7176,8 @@
         </p:nvSpPr>
         <p:spPr>
           <a:xfrm>
-            <a:off x="411480" y="1325880"/>
-            <a:ext cx="11384280" cy="4937760"/>
+            <a:off x="548640" y="1325880"/>
+            <a:ext cx="11091672" cy="4937760"/>
           </a:xfrm>
           <a:prstGeom prst="roundRect">
             <a:avLst>
@@ -6658,8 +7198,8 @@
         </p:nvSpPr>
         <p:spPr>
           <a:xfrm>
-            <a:off x="731520" y="1554480"/>
-            <a:ext cx="10744200" cy="4480560"/>
+            <a:off x="868680" y="1554480"/>
+            <a:ext cx="10451592" cy="4480560"/>
           </a:xfrm>
           <a:prstGeom prst="rect">
             <a:avLst/>
@@ -6703,6 +7243,54 @@
               <a:t>Ficha da minha empresa (modelo em 06-materiais-de-apoio.md): nome fictício da empresa, cidade/estado de atuação, distribuidora da região, perfil (começando do zero ou empresa solar), meta para 12 meses (ex.: 1 usina, 150 clientes). Postar na comunidade.</a:t>
             </a:r>
             <a:endParaRPr lang="en-US" sz="1300" dirty="0"/>
+          </a:p>
+        </p:txBody>
+      </p:sp>
+      <p:sp>
+        <p:nvSpPr>
+          <p:cNvPr id="25" name="Slide Number Placeholder 0"/>
+          <p:cNvSpPr>
+            <a:spLocks noGrp="1"/>
+          </p:cNvSpPr>
+          <p:nvPr>
+            <p:ph type="sldNum" sz="quarter" idx="4294967295"/>
+          </p:nvPr>
+        </p:nvSpPr>
+        <p:spPr>
+          <a:xfrm>
+            <a:off x="11292840" y="6556248"/>
+            <a:ext cx="548640" cy="256032"/>
+          </a:xfrm>
+          <a:prstGeom prst="rect">
+            <a:avLst/>
+          </a:prstGeom>
+          <a:extLst>
+            <a:ext uri="{C572A759-6A51-4108-AA02-DFA0A04FC94B}">
+              <ma14:wrappingTextBoxFlag xmlns:ma14="http://schemas.microsoft.com/office/mac/drawingml/2011/main" val="0"/>
+            </a:ext>
+          </a:extLst>
+        </p:spPr>
+        <p:txBody>
+          <a:bodyPr/>
+          <a:lstStyle>
+            <a:lvl1pPr>
+              <a:defRPr sz="900">
+                <a:solidFill>
+                  <a:srgbClr val="1B3A6B"/>
+                </a:solidFill>
+                <a:latin typeface="Arial"/>
+                <a:ea typeface="Arial"/>
+                <a:cs typeface="Arial"/>
+              </a:defRPr>
+            </a:lvl1pPr>
+          </a:lstStyle>
+          <a:p>
+            <a:pPr algn="r"/>
+            <a:fld id="{F7021451-1387-4CA6-816F-3879F97B5CBC}" type="slidenum">
+              <a:rPr b="1" lang="en-US"/>
+              <a:t>18</a:t>
+            </a:fld>
+            <a:endParaRPr lang="en-US"/>
           </a:p>
         </p:txBody>
       </p:sp>
@@ -6766,6 +7354,45 @@
         </p:nvSpPr>
         <p:spPr>
           <a:xfrm>
+            <a:off x="457200" y="548640"/>
+            <a:ext cx="3474720" cy="1737360"/>
+          </a:xfrm>
+          <a:prstGeom prst="rect">
+            <a:avLst/>
+          </a:prstGeom>
+          <a:noFill/>
+          <a:ln/>
+        </p:spPr>
+        <p:txBody>
+          <a:bodyPr wrap="square" rtlCol="0" anchor="ctr"/>
+          <a:lstStyle/>
+          <a:p>
+            <a:pPr indent="0" marL="0">
+              <a:buNone/>
+            </a:pPr>
+            <a:r>
+              <a:rPr lang="en-US" sz="11000" b="1" dirty="0">
+                <a:solidFill>
+                  <a:srgbClr val="11396F"/>
+                </a:solidFill>
+                <a:latin typeface="Arial" pitchFamily="34" charset="0"/>
+                <a:ea typeface="Arial" pitchFamily="34" charset="-122"/>
+                <a:cs typeface="Arial" pitchFamily="34" charset="-120"/>
+              </a:rPr>
+              <a:t>01</a:t>
+            </a:r>
+            <a:endParaRPr lang="en-US" sz="11000" dirty="0"/>
+          </a:p>
+        </p:txBody>
+      </p:sp>
+      <p:sp>
+        <p:nvSpPr>
+          <p:cNvPr id="4" name="Text 2"/>
+          <p:cNvSpPr/>
+          <p:nvPr/>
+        </p:nvSpPr>
+        <p:spPr>
+          <a:xfrm>
             <a:off x="548640" y="2194560"/>
             <a:ext cx="3291840" cy="548640"/>
           </a:xfrm>
@@ -6799,7 +7426,46 @@
       </p:sp>
       <p:sp>
         <p:nvSpPr>
-          <p:cNvPr id="4" name="Text 2"/>
+          <p:cNvPr id="5" name="Text 3"/>
+          <p:cNvSpPr/>
+          <p:nvPr/>
+        </p:nvSpPr>
+        <p:spPr>
+          <a:xfrm>
+            <a:off x="548640" y="3200400"/>
+            <a:ext cx="3383280" cy="457200"/>
+          </a:xfrm>
+          <a:prstGeom prst="rect">
+            <a:avLst/>
+          </a:prstGeom>
+          <a:noFill/>
+          <a:ln/>
+        </p:spPr>
+        <p:txBody>
+          <a:bodyPr wrap="square" rtlCol="0" anchor="ctr"/>
+          <a:lstStyle/>
+          <a:p>
+            <a:pPr indent="0" marL="0">
+              <a:buNone/>
+            </a:pPr>
+            <a:r>
+              <a:rPr lang="en-US" sz="1100" dirty="0">
+                <a:solidFill>
+                  <a:srgbClr val="C7D2E3"/>
+                </a:solidFill>
+                <a:latin typeface="Arial" pitchFamily="34" charset="0"/>
+                <a:ea typeface="Arial" pitchFamily="34" charset="-122"/>
+                <a:cs typeface="Arial" pitchFamily="34" charset="-120"/>
+              </a:rPr>
+              <a:t>M0 · Etapa 1 · Fundamentos</a:t>
+            </a:r>
+            <a:endParaRPr lang="en-US" sz="1100" dirty="0"/>
+          </a:p>
+        </p:txBody>
+      </p:sp>
+      <p:sp>
+        <p:nvSpPr>
+          <p:cNvPr id="6" name="Text 4"/>
           <p:cNvSpPr/>
           <p:nvPr/>
         </p:nvSpPr>
@@ -6838,7 +7504,7 @@
       </p:sp>
       <p:pic>
         <p:nvPicPr>
-          <p:cNvPr id="5" name="Image 0" descr="/www/wwwroot/rexar/gdsolar/docs/curso/slides/assets/logo-gdsolar.png">    </p:cNvPr>
+          <p:cNvPr id="7" name="Image 0" descr="/www/wwwroot/rexar/gdsolar/docs/curso/slides/assets/logo-gdsolar.png">    </p:cNvPr>
           <p:cNvPicPr>
             <a:picLocks noChangeAspect="1"/>
           </p:cNvPicPr>
@@ -6862,7 +7528,7 @@
       </p:pic>
       <p:sp>
         <p:nvSpPr>
-          <p:cNvPr id="6" name="Text 3"/>
+          <p:cNvPr id="8" name="Text 5"/>
           <p:cNvSpPr/>
           <p:nvPr/>
         </p:nvSpPr>
@@ -6903,7 +7569,7 @@
       </p:sp>
       <p:sp>
         <p:nvSpPr>
-          <p:cNvPr id="7" name="Text 4"/>
+          <p:cNvPr id="9" name="Text 6"/>
           <p:cNvSpPr/>
           <p:nvPr/>
         </p:nvSpPr>
@@ -6944,7 +7610,7 @@
       </p:sp>
       <p:sp>
         <p:nvSpPr>
-          <p:cNvPr id="8" name="Text 5"/>
+          <p:cNvPr id="10" name="Text 7"/>
           <p:cNvSpPr/>
           <p:nvPr/>
         </p:nvSpPr>
@@ -7123,7 +7789,7 @@
         </p:blipFill>
         <p:spPr>
           <a:xfrm>
-            <a:off x="411480" y="6547104"/>
+            <a:off x="548640" y="6547104"/>
             <a:ext cx="274320" cy="274320"/>
           </a:xfrm>
           <a:prstGeom prst="rect">
@@ -7139,7 +7805,7 @@
         </p:nvSpPr>
         <p:spPr>
           <a:xfrm>
-            <a:off x="749808" y="6528816"/>
+            <a:off x="886968" y="6528816"/>
             <a:ext cx="6400800" cy="310896"/>
           </a:xfrm>
           <a:prstGeom prst="rect">
@@ -7179,7 +7845,7 @@
         <p:spPr>
           <a:xfrm>
             <a:off x="7132320" y="6528816"/>
-            <a:ext cx="4663440" cy="310896"/>
+            <a:ext cx="4023360" cy="310896"/>
           </a:xfrm>
           <a:prstGeom prst="rect">
             <a:avLst/>
@@ -7217,7 +7883,7 @@
         </p:nvSpPr>
         <p:spPr>
           <a:xfrm>
-            <a:off x="411480" y="384048"/>
+            <a:off x="548640" y="384048"/>
             <a:ext cx="82296" cy="658368"/>
           </a:xfrm>
           <a:prstGeom prst="rect">
@@ -7237,7 +7903,7 @@
         </p:nvSpPr>
         <p:spPr>
           <a:xfrm>
-            <a:off x="640080" y="292608"/>
+            <a:off x="777240" y="292608"/>
             <a:ext cx="10972800" cy="274320"/>
           </a:xfrm>
           <a:prstGeom prst="rect">
@@ -7276,8 +7942,8 @@
         </p:nvSpPr>
         <p:spPr>
           <a:xfrm>
-            <a:off x="640080" y="530352"/>
-            <a:ext cx="11155680" cy="566928"/>
+            <a:off x="777240" y="530352"/>
+            <a:ext cx="10881360" cy="566928"/>
           </a:xfrm>
           <a:prstGeom prst="rect">
             <a:avLst/>
@@ -7317,8 +7983,8 @@
         </p:nvSpPr>
         <p:spPr>
           <a:xfrm>
-            <a:off x="411480" y="2651760"/>
-            <a:ext cx="2944368" cy="1463040"/>
+            <a:off x="548640" y="2651760"/>
+            <a:ext cx="2852928" cy="1463040"/>
           </a:xfrm>
           <a:prstGeom prst="chevron">
             <a:avLst/>
@@ -7342,8 +8008,8 @@
         </p:nvSpPr>
         <p:spPr>
           <a:xfrm>
-            <a:off x="731520" y="2651760"/>
-            <a:ext cx="2423160" cy="1463040"/>
+            <a:off x="868680" y="2651760"/>
+            <a:ext cx="2331720" cy="1463040"/>
           </a:xfrm>
           <a:prstGeom prst="rect">
             <a:avLst/>
@@ -7383,8 +8049,8 @@
         </p:nvSpPr>
         <p:spPr>
           <a:xfrm>
-            <a:off x="3246120" y="2651760"/>
-            <a:ext cx="2944368" cy="1463040"/>
+            <a:off x="3291840" y="2651760"/>
+            <a:ext cx="2852928" cy="1463040"/>
           </a:xfrm>
           <a:prstGeom prst="chevron">
             <a:avLst/>
@@ -7408,8 +8074,8 @@
         </p:nvSpPr>
         <p:spPr>
           <a:xfrm>
-            <a:off x="3566160" y="2651760"/>
-            <a:ext cx="2423160" cy="1463040"/>
+            <a:off x="3611880" y="2651760"/>
+            <a:ext cx="2331720" cy="1463040"/>
           </a:xfrm>
           <a:prstGeom prst="rect">
             <a:avLst/>
@@ -7449,8 +8115,8 @@
         </p:nvSpPr>
         <p:spPr>
           <a:xfrm>
-            <a:off x="6080760" y="2651760"/>
-            <a:ext cx="2944368" cy="1463040"/>
+            <a:off x="6035040" y="2651760"/>
+            <a:ext cx="2852928" cy="1463040"/>
           </a:xfrm>
           <a:prstGeom prst="chevron">
             <a:avLst/>
@@ -7474,8 +8140,8 @@
         </p:nvSpPr>
         <p:spPr>
           <a:xfrm>
-            <a:off x="6400800" y="2651760"/>
-            <a:ext cx="2423160" cy="1463040"/>
+            <a:off x="6355080" y="2651760"/>
+            <a:ext cx="2331720" cy="1463040"/>
           </a:xfrm>
           <a:prstGeom prst="rect">
             <a:avLst/>
@@ -7515,8 +8181,8 @@
         </p:nvSpPr>
         <p:spPr>
           <a:xfrm>
-            <a:off x="8915400" y="2651760"/>
-            <a:ext cx="2944368" cy="1463040"/>
+            <a:off x="8778240" y="2651760"/>
+            <a:ext cx="2852928" cy="1463040"/>
           </a:xfrm>
           <a:prstGeom prst="chevron">
             <a:avLst/>
@@ -7540,8 +8206,8 @@
         </p:nvSpPr>
         <p:spPr>
           <a:xfrm>
-            <a:off x="9235440" y="2651760"/>
-            <a:ext cx="2423160" cy="1463040"/>
+            <a:off x="9098280" y="2651760"/>
+            <a:ext cx="2331720" cy="1463040"/>
           </a:xfrm>
           <a:prstGeom prst="rect">
             <a:avLst/>
@@ -7570,6 +8236,54 @@
               <a:t>sua empresa organiza e cobra</a:t>
             </a:r>
             <a:endParaRPr lang="en-US" sz="1500" dirty="0"/>
+          </a:p>
+        </p:txBody>
+      </p:sp>
+      <p:sp>
+        <p:nvSpPr>
+          <p:cNvPr id="25" name="Slide Number Placeholder 0"/>
+          <p:cNvSpPr>
+            <a:spLocks noGrp="1"/>
+          </p:cNvSpPr>
+          <p:nvPr>
+            <p:ph type="sldNum" sz="quarter" idx="4294967295"/>
+          </p:nvPr>
+        </p:nvSpPr>
+        <p:spPr>
+          <a:xfrm>
+            <a:off x="11292840" y="6556248"/>
+            <a:ext cx="548640" cy="256032"/>
+          </a:xfrm>
+          <a:prstGeom prst="rect">
+            <a:avLst/>
+          </a:prstGeom>
+          <a:extLst>
+            <a:ext uri="{C572A759-6A51-4108-AA02-DFA0A04FC94B}">
+              <ma14:wrappingTextBoxFlag xmlns:ma14="http://schemas.microsoft.com/office/mac/drawingml/2011/main" val="0"/>
+            </a:ext>
+          </a:extLst>
+        </p:spPr>
+        <p:txBody>
+          <a:bodyPr/>
+          <a:lstStyle>
+            <a:lvl1pPr>
+              <a:defRPr sz="900">
+                <a:solidFill>
+                  <a:srgbClr val="1B3A6B"/>
+                </a:solidFill>
+                <a:latin typeface="Arial"/>
+                <a:ea typeface="Arial"/>
+                <a:cs typeface="Arial"/>
+              </a:defRPr>
+            </a:lvl1pPr>
+          </a:lstStyle>
+          <a:p>
+            <a:pPr algn="r"/>
+            <a:fld id="{F7021451-1387-4CA6-816F-3879F97B5CBC}" type="slidenum">
+              <a:rPr b="1" lang="en-US"/>
+              <a:t>3</a:t>
+            </a:fld>
+            <a:endParaRPr lang="en-US"/>
           </a:p>
         </p:txBody>
       </p:sp>
@@ -7646,7 +8360,7 @@
         </p:blipFill>
         <p:spPr>
           <a:xfrm>
-            <a:off x="411480" y="6547104"/>
+            <a:off x="548640" y="6547104"/>
             <a:ext cx="274320" cy="274320"/>
           </a:xfrm>
           <a:prstGeom prst="rect">
@@ -7662,7 +8376,7 @@
         </p:nvSpPr>
         <p:spPr>
           <a:xfrm>
-            <a:off x="749808" y="6528816"/>
+            <a:off x="886968" y="6528816"/>
             <a:ext cx="6400800" cy="310896"/>
           </a:xfrm>
           <a:prstGeom prst="rect">
@@ -7702,7 +8416,7 @@
         <p:spPr>
           <a:xfrm>
             <a:off x="7132320" y="6528816"/>
-            <a:ext cx="4663440" cy="310896"/>
+            <a:ext cx="4023360" cy="310896"/>
           </a:xfrm>
           <a:prstGeom prst="rect">
             <a:avLst/>
@@ -7740,7 +8454,7 @@
         </p:nvSpPr>
         <p:spPr>
           <a:xfrm>
-            <a:off x="411480" y="384048"/>
+            <a:off x="548640" y="384048"/>
             <a:ext cx="82296" cy="658368"/>
           </a:xfrm>
           <a:prstGeom prst="rect">
@@ -7760,7 +8474,7 @@
         </p:nvSpPr>
         <p:spPr>
           <a:xfrm>
-            <a:off x="640080" y="292608"/>
+            <a:off x="777240" y="292608"/>
             <a:ext cx="10972800" cy="274320"/>
           </a:xfrm>
           <a:prstGeom prst="rect">
@@ -7799,8 +8513,8 @@
         </p:nvSpPr>
         <p:spPr>
           <a:xfrm>
-            <a:off x="640080" y="530352"/>
-            <a:ext cx="11155680" cy="566928"/>
+            <a:off x="777240" y="530352"/>
+            <a:ext cx="10881360" cy="566928"/>
           </a:xfrm>
           <a:prstGeom prst="rect">
             <a:avLst/>
@@ -7840,12 +8554,12 @@
         </p:nvSpPr>
         <p:spPr>
           <a:xfrm>
-            <a:off x="411480" y="1325880"/>
-            <a:ext cx="3642360" cy="4892040"/>
+            <a:off x="548640" y="1325880"/>
+            <a:ext cx="3544824" cy="4892040"/>
           </a:xfrm>
           <a:prstGeom prst="roundRect">
             <a:avLst>
-              <a:gd name="adj" fmla="val 2008"/>
+              <a:gd name="adj" fmla="val 2064"/>
             </a:avLst>
           </a:prstGeom>
           <a:solidFill>
@@ -7874,7 +8588,7 @@
         </p:nvSpPr>
         <p:spPr>
           <a:xfrm>
-            <a:off x="594360" y="1508760"/>
+            <a:off x="731520" y="1508760"/>
             <a:ext cx="457200" cy="457200"/>
           </a:xfrm>
           <a:prstGeom prst="ellipse">
@@ -7894,7 +8608,7 @@
         </p:nvSpPr>
         <p:spPr>
           <a:xfrm>
-            <a:off x="594360" y="1508760"/>
+            <a:off x="731520" y="1508760"/>
             <a:ext cx="457200" cy="457200"/>
           </a:xfrm>
           <a:prstGeom prst="rect">
@@ -7933,8 +8647,8 @@
         </p:nvSpPr>
         <p:spPr>
           <a:xfrm>
-            <a:off x="1188720" y="1435608"/>
-            <a:ext cx="2727960" cy="4672584"/>
+            <a:off x="1325880" y="1435608"/>
+            <a:ext cx="2630424" cy="4672584"/>
           </a:xfrm>
           <a:prstGeom prst="rect">
             <a:avLst/>
@@ -7974,12 +8688,12 @@
         </p:nvSpPr>
         <p:spPr>
           <a:xfrm>
-            <a:off x="4282440" y="1325880"/>
-            <a:ext cx="3642360" cy="4892040"/>
+            <a:off x="4322064" y="1325880"/>
+            <a:ext cx="3544824" cy="4892040"/>
           </a:xfrm>
           <a:prstGeom prst="roundRect">
             <a:avLst>
-              <a:gd name="adj" fmla="val 2008"/>
+              <a:gd name="adj" fmla="val 2064"/>
             </a:avLst>
           </a:prstGeom>
           <a:solidFill>
@@ -8008,7 +8722,7 @@
         </p:nvSpPr>
         <p:spPr>
           <a:xfrm>
-            <a:off x="4465320" y="1508760"/>
+            <a:off x="4504944" y="1508760"/>
             <a:ext cx="457200" cy="457200"/>
           </a:xfrm>
           <a:prstGeom prst="ellipse">
@@ -8028,7 +8742,7 @@
         </p:nvSpPr>
         <p:spPr>
           <a:xfrm>
-            <a:off x="4465320" y="1508760"/>
+            <a:off x="4504944" y="1508760"/>
             <a:ext cx="457200" cy="457200"/>
           </a:xfrm>
           <a:prstGeom prst="rect">
@@ -8067,8 +8781,8 @@
         </p:nvSpPr>
         <p:spPr>
           <a:xfrm>
-            <a:off x="5059680" y="1435608"/>
-            <a:ext cx="2727960" cy="4672584"/>
+            <a:off x="5099304" y="1435608"/>
+            <a:ext cx="2630424" cy="4672584"/>
           </a:xfrm>
           <a:prstGeom prst="rect">
             <a:avLst/>
@@ -8108,12 +8822,12 @@
         </p:nvSpPr>
         <p:spPr>
           <a:xfrm>
-            <a:off x="8153400" y="1325880"/>
-            <a:ext cx="3642360" cy="4892040"/>
+            <a:off x="8095488" y="1325880"/>
+            <a:ext cx="3544824" cy="4892040"/>
           </a:xfrm>
           <a:prstGeom prst="roundRect">
             <a:avLst>
-              <a:gd name="adj" fmla="val 2008"/>
+              <a:gd name="adj" fmla="val 2064"/>
             </a:avLst>
           </a:prstGeom>
           <a:solidFill>
@@ -8142,7 +8856,7 @@
         </p:nvSpPr>
         <p:spPr>
           <a:xfrm>
-            <a:off x="8336280" y="1508760"/>
+            <a:off x="8278368" y="1508760"/>
             <a:ext cx="457200" cy="457200"/>
           </a:xfrm>
           <a:prstGeom prst="ellipse">
@@ -8162,7 +8876,7 @@
         </p:nvSpPr>
         <p:spPr>
           <a:xfrm>
-            <a:off x="8336280" y="1508760"/>
+            <a:off x="8278368" y="1508760"/>
             <a:ext cx="457200" cy="457200"/>
           </a:xfrm>
           <a:prstGeom prst="rect">
@@ -8201,8 +8915,8 @@
         </p:nvSpPr>
         <p:spPr>
           <a:xfrm>
-            <a:off x="8930640" y="1435608"/>
-            <a:ext cx="2727960" cy="4672584"/>
+            <a:off x="8872728" y="1435608"/>
+            <a:ext cx="2630424" cy="4672584"/>
           </a:xfrm>
           <a:prstGeom prst="rect">
             <a:avLst/>
@@ -8231,6 +8945,54 @@
               <a:t>Todos ganham</a:t>
             </a:r>
             <a:endParaRPr lang="en-US" sz="1800" dirty="0"/>
+          </a:p>
+        </p:txBody>
+      </p:sp>
+      <p:sp>
+        <p:nvSpPr>
+          <p:cNvPr id="25" name="Slide Number Placeholder 0"/>
+          <p:cNvSpPr>
+            <a:spLocks noGrp="1"/>
+          </p:cNvSpPr>
+          <p:nvPr>
+            <p:ph type="sldNum" sz="quarter" idx="4294967295"/>
+          </p:nvPr>
+        </p:nvSpPr>
+        <p:spPr>
+          <a:xfrm>
+            <a:off x="11292840" y="6556248"/>
+            <a:ext cx="548640" cy="256032"/>
+          </a:xfrm>
+          <a:prstGeom prst="rect">
+            <a:avLst/>
+          </a:prstGeom>
+          <a:extLst>
+            <a:ext uri="{C572A759-6A51-4108-AA02-DFA0A04FC94B}">
+              <ma14:wrappingTextBoxFlag xmlns:ma14="http://schemas.microsoft.com/office/mac/drawingml/2011/main" val="0"/>
+            </a:ext>
+          </a:extLst>
+        </p:spPr>
+        <p:txBody>
+          <a:bodyPr/>
+          <a:lstStyle>
+            <a:lvl1pPr>
+              <a:defRPr sz="900">
+                <a:solidFill>
+                  <a:srgbClr val="1B3A6B"/>
+                </a:solidFill>
+                <a:latin typeface="Arial"/>
+                <a:ea typeface="Arial"/>
+                <a:cs typeface="Arial"/>
+              </a:defRPr>
+            </a:lvl1pPr>
+          </a:lstStyle>
+          <a:p>
+            <a:pPr algn="r"/>
+            <a:fld id="{F7021451-1387-4CA6-816F-3879F97B5CBC}" type="slidenum">
+              <a:rPr b="1" lang="en-US"/>
+              <a:t>4</a:t>
+            </a:fld>
+            <a:endParaRPr lang="en-US"/>
           </a:p>
         </p:txBody>
       </p:sp>
@@ -8307,7 +9069,7 @@
         </p:blipFill>
         <p:spPr>
           <a:xfrm>
-            <a:off x="411480" y="6547104"/>
+            <a:off x="548640" y="6547104"/>
             <a:ext cx="274320" cy="274320"/>
           </a:xfrm>
           <a:prstGeom prst="rect">
@@ -8323,7 +9085,7 @@
         </p:nvSpPr>
         <p:spPr>
           <a:xfrm>
-            <a:off x="749808" y="6528816"/>
+            <a:off x="886968" y="6528816"/>
             <a:ext cx="6400800" cy="310896"/>
           </a:xfrm>
           <a:prstGeom prst="rect">
@@ -8363,7 +9125,7 @@
         <p:spPr>
           <a:xfrm>
             <a:off x="7132320" y="6528816"/>
-            <a:ext cx="4663440" cy="310896"/>
+            <a:ext cx="4023360" cy="310896"/>
           </a:xfrm>
           <a:prstGeom prst="rect">
             <a:avLst/>
@@ -8401,7 +9163,7 @@
         </p:nvSpPr>
         <p:spPr>
           <a:xfrm>
-            <a:off x="411480" y="384048"/>
+            <a:off x="548640" y="384048"/>
             <a:ext cx="82296" cy="658368"/>
           </a:xfrm>
           <a:prstGeom prst="rect">
@@ -8421,7 +9183,7 @@
         </p:nvSpPr>
         <p:spPr>
           <a:xfrm>
-            <a:off x="640080" y="292608"/>
+            <a:off x="777240" y="292608"/>
             <a:ext cx="10972800" cy="274320"/>
           </a:xfrm>
           <a:prstGeom prst="rect">
@@ -8460,8 +9222,8 @@
         </p:nvSpPr>
         <p:spPr>
           <a:xfrm>
-            <a:off x="640080" y="530352"/>
-            <a:ext cx="11155680" cy="566928"/>
+            <a:off x="777240" y="530352"/>
+            <a:ext cx="10881360" cy="566928"/>
           </a:xfrm>
           <a:prstGeom prst="rect">
             <a:avLst/>
@@ -8502,7 +9264,7 @@
         <p:spPr>
           <a:xfrm>
             <a:off x="548640" y="1325880"/>
-            <a:ext cx="11155680" cy="4937760"/>
+            <a:ext cx="5486400" cy="4937760"/>
           </a:xfrm>
           <a:prstGeom prst="rect">
             <a:avLst/>
@@ -8523,7 +9285,7 @@
               <a:buNone/>
             </a:pPr>
             <a:r>
-              <a:rPr lang="en-US" sz="1400" dirty="0">
+              <a:rPr lang="en-US" sz="1800" dirty="0">
                 <a:solidFill>
                   <a:srgbClr val="1F2937"/>
                 </a:solidFill>
@@ -8533,7 +9295,7 @@
               </a:rPr>
               <a:t>1. Ler qualquer conta de luz com energia compensada</a:t>
             </a:r>
-            <a:endParaRPr lang="en-US" sz="1400" dirty="0"/>
+            <a:endParaRPr lang="en-US" sz="1800" dirty="0"/>
           </a:p>
           <a:p>
             <a:pPr indent="0" marL="0">
@@ -8543,7 +9305,7 @@
               <a:buNone/>
             </a:pPr>
             <a:r>
-              <a:rPr lang="en-US" sz="1400" dirty="0">
+              <a:rPr lang="en-US" sz="1800" dirty="0">
                 <a:solidFill>
                   <a:srgbClr val="1F2937"/>
                 </a:solidFill>
@@ -8553,7 +9315,7 @@
               </a:rPr>
               <a:t>2. Fazer a conta do kWh: cliente, produtor e sua empresa</a:t>
             </a:r>
-            <a:endParaRPr lang="en-US" sz="1400" dirty="0"/>
+            <a:endParaRPr lang="en-US" sz="1800" dirty="0"/>
           </a:p>
           <a:p>
             <a:pPr indent="0" marL="0">
@@ -8563,7 +9325,7 @@
               <a:buNone/>
             </a:pPr>
             <a:r>
-              <a:rPr lang="en-US" sz="1400" dirty="0">
+              <a:rPr lang="en-US" sz="1800" dirty="0">
                 <a:solidFill>
                   <a:srgbClr val="1F2937"/>
                 </a:solidFill>
@@ -8573,7 +9335,7 @@
               </a:rPr>
               <a:t>3. Montar propostas para clientes e donos de usina</a:t>
             </a:r>
-            <a:endParaRPr lang="en-US" sz="1400" dirty="0"/>
+            <a:endParaRPr lang="en-US" sz="1800" dirty="0"/>
           </a:p>
           <a:p>
             <a:pPr indent="0" marL="0">
@@ -8583,7 +9345,7 @@
               <a:buNone/>
             </a:pPr>
             <a:r>
-              <a:rPr lang="en-US" sz="1400" dirty="0">
+              <a:rPr lang="en-US" sz="1800" dirty="0">
                 <a:solidFill>
                   <a:srgbClr val="1F2937"/>
                 </a:solidFill>
@@ -8593,8 +9355,32 @@
               </a:rPr>
               <a:t>4. Distribuir a energia da usina sem vender o que não existe</a:t>
             </a:r>
-            <a:endParaRPr lang="en-US" sz="1400" dirty="0"/>
-          </a:p>
+            <a:endParaRPr lang="en-US" sz="1800" dirty="0"/>
+          </a:p>
+        </p:txBody>
+      </p:sp>
+      <p:sp>
+        <p:nvSpPr>
+          <p:cNvPr id="10" name="Text 7"/>
+          <p:cNvSpPr/>
+          <p:nvPr/>
+        </p:nvSpPr>
+        <p:spPr>
+          <a:xfrm>
+            <a:off x="6263640" y="1325880"/>
+            <a:ext cx="5486400" cy="4937760"/>
+          </a:xfrm>
+          <a:prstGeom prst="rect">
+            <a:avLst/>
+          </a:prstGeom>
+          <a:noFill/>
+          <a:ln/>
+        </p:spPr>
+        <p:txBody>
+          <a:bodyPr wrap="square" rtlCol="0" anchor="t">
+            <a:normAutofit/>
+          </a:bodyPr>
+          <a:lstStyle/>
           <a:p>
             <a:pPr indent="0" marL="0">
               <a:spcAft>
@@ -8603,7 +9389,7 @@
               <a:buNone/>
             </a:pPr>
             <a:r>
-              <a:rPr lang="en-US" sz="1400" dirty="0">
+              <a:rPr lang="en-US" sz="1800" dirty="0">
                 <a:solidFill>
                   <a:srgbClr val="1F2937"/>
                 </a:solidFill>
@@ -8613,7 +9399,7 @@
               </a:rPr>
               <a:t>5. Fechar o mês: faturas, cobranças, Pix e boleto</a:t>
             </a:r>
-            <a:endParaRPr lang="en-US" sz="1400" dirty="0"/>
+            <a:endParaRPr lang="en-US" sz="1800" dirty="0"/>
           </a:p>
           <a:p>
             <a:pPr indent="0" marL="0">
@@ -8623,7 +9409,7 @@
               <a:buNone/>
             </a:pPr>
             <a:r>
-              <a:rPr lang="en-US" sz="1400" dirty="0">
+              <a:rPr lang="en-US" sz="1800" dirty="0">
                 <a:solidFill>
                   <a:srgbClr val="1F2937"/>
                 </a:solidFill>
@@ -8633,7 +9419,7 @@
               </a:rPr>
               <a:t>6. Medir o negócio com indicadores e relatórios</a:t>
             </a:r>
-            <a:endParaRPr lang="en-US" sz="1400" dirty="0"/>
+            <a:endParaRPr lang="en-US" sz="1800" dirty="0"/>
           </a:p>
           <a:p>
             <a:pPr indent="0" marL="0">
@@ -8643,7 +9429,7 @@
               <a:buNone/>
             </a:pPr>
             <a:r>
-              <a:rPr lang="en-US" sz="1400" dirty="0">
+              <a:rPr lang="en-US" sz="1800" dirty="0">
                 <a:solidFill>
                   <a:srgbClr val="1F2937"/>
                 </a:solidFill>
@@ -8653,7 +9439,55 @@
               </a:rPr>
               <a:t>7. Montar o plano da sua empresa</a:t>
             </a:r>
-            <a:endParaRPr lang="en-US" sz="1400" dirty="0"/>
+            <a:endParaRPr lang="en-US" sz="1800" dirty="0"/>
+          </a:p>
+        </p:txBody>
+      </p:sp>
+      <p:sp>
+        <p:nvSpPr>
+          <p:cNvPr id="25" name="Slide Number Placeholder 0"/>
+          <p:cNvSpPr>
+            <a:spLocks noGrp="1"/>
+          </p:cNvSpPr>
+          <p:nvPr>
+            <p:ph type="sldNum" sz="quarter" idx="4294967295"/>
+          </p:nvPr>
+        </p:nvSpPr>
+        <p:spPr>
+          <a:xfrm>
+            <a:off x="11292840" y="6556248"/>
+            <a:ext cx="548640" cy="256032"/>
+          </a:xfrm>
+          <a:prstGeom prst="rect">
+            <a:avLst/>
+          </a:prstGeom>
+          <a:extLst>
+            <a:ext uri="{C572A759-6A51-4108-AA02-DFA0A04FC94B}">
+              <ma14:wrappingTextBoxFlag xmlns:ma14="http://schemas.microsoft.com/office/mac/drawingml/2011/main" val="0"/>
+            </a:ext>
+          </a:extLst>
+        </p:spPr>
+        <p:txBody>
+          <a:bodyPr/>
+          <a:lstStyle>
+            <a:lvl1pPr>
+              <a:defRPr sz="900">
+                <a:solidFill>
+                  <a:srgbClr val="1B3A6B"/>
+                </a:solidFill>
+                <a:latin typeface="Arial"/>
+                <a:ea typeface="Arial"/>
+                <a:cs typeface="Arial"/>
+              </a:defRPr>
+            </a:lvl1pPr>
+          </a:lstStyle>
+          <a:p>
+            <a:pPr algn="r"/>
+            <a:fld id="{F7021451-1387-4CA6-816F-3879F97B5CBC}" type="slidenum">
+              <a:rPr b="1" lang="en-US"/>
+              <a:t>5</a:t>
+            </a:fld>
+            <a:endParaRPr lang="en-US"/>
           </a:p>
         </p:txBody>
       </p:sp>
@@ -8730,7 +9564,7 @@
         </p:blipFill>
         <p:spPr>
           <a:xfrm>
-            <a:off x="411480" y="6547104"/>
+            <a:off x="548640" y="6547104"/>
             <a:ext cx="274320" cy="274320"/>
           </a:xfrm>
           <a:prstGeom prst="rect">
@@ -8746,7 +9580,7 @@
         </p:nvSpPr>
         <p:spPr>
           <a:xfrm>
-            <a:off x="749808" y="6528816"/>
+            <a:off x="886968" y="6528816"/>
             <a:ext cx="6400800" cy="310896"/>
           </a:xfrm>
           <a:prstGeom prst="rect">
@@ -8786,7 +9620,7 @@
         <p:spPr>
           <a:xfrm>
             <a:off x="7132320" y="6528816"/>
-            <a:ext cx="4663440" cy="310896"/>
+            <a:ext cx="4023360" cy="310896"/>
           </a:xfrm>
           <a:prstGeom prst="rect">
             <a:avLst/>
@@ -8824,7 +9658,7 @@
         </p:nvSpPr>
         <p:spPr>
           <a:xfrm>
-            <a:off x="411480" y="384048"/>
+            <a:off x="548640" y="384048"/>
             <a:ext cx="82296" cy="658368"/>
           </a:xfrm>
           <a:prstGeom prst="rect">
@@ -8844,7 +9678,7 @@
         </p:nvSpPr>
         <p:spPr>
           <a:xfrm>
-            <a:off x="640080" y="292608"/>
+            <a:off x="777240" y="292608"/>
             <a:ext cx="10972800" cy="274320"/>
           </a:xfrm>
           <a:prstGeom prst="rect">
@@ -8883,8 +9717,8 @@
         </p:nvSpPr>
         <p:spPr>
           <a:xfrm>
-            <a:off x="640080" y="530352"/>
-            <a:ext cx="11155680" cy="566928"/>
+            <a:off x="777240" y="530352"/>
+            <a:ext cx="10881360" cy="566928"/>
           </a:xfrm>
           <a:prstGeom prst="rect">
             <a:avLst/>
@@ -8924,8 +9758,8 @@
         </p:nvSpPr>
         <p:spPr>
           <a:xfrm>
-            <a:off x="411480" y="1325880"/>
-            <a:ext cx="11384280" cy="4937760"/>
+            <a:off x="548640" y="1325880"/>
+            <a:ext cx="11091672" cy="4937760"/>
           </a:xfrm>
           <a:prstGeom prst="roundRect">
             <a:avLst>
@@ -8951,7 +9785,7 @@
         </p:nvSpPr>
         <p:spPr>
           <a:xfrm>
-            <a:off x="594360" y="1508760"/>
+            <a:off x="731520" y="1508760"/>
             <a:ext cx="822960" cy="384048"/>
           </a:xfrm>
           <a:prstGeom prst="roundRect">
@@ -8973,7 +9807,7 @@
         </p:nvSpPr>
         <p:spPr>
           <a:xfrm>
-            <a:off x="594360" y="1508760"/>
+            <a:off x="731520" y="1508760"/>
             <a:ext cx="822960" cy="384048"/>
           </a:xfrm>
           <a:prstGeom prst="rect">
@@ -9012,8 +9846,8 @@
         </p:nvSpPr>
         <p:spPr>
           <a:xfrm>
-            <a:off x="1508760" y="1463040"/>
-            <a:ext cx="10149840" cy="502920"/>
+            <a:off x="1645920" y="1463040"/>
+            <a:ext cx="9857232" cy="502920"/>
           </a:xfrm>
           <a:prstGeom prst="rect">
             <a:avLst/>
@@ -9053,8 +9887,8 @@
         </p:nvSpPr>
         <p:spPr>
           <a:xfrm>
-            <a:off x="640080" y="2057400"/>
-            <a:ext cx="10927080" cy="4069080"/>
+            <a:off x="777240" y="2057400"/>
+            <a:ext cx="10634472" cy="4069080"/>
           </a:xfrm>
           <a:prstGeom prst="rect">
             <a:avLst/>
@@ -9083,6 +9917,54 @@
               <a:t>Você vai praticar numa plataforma real</a:t>
             </a:r>
             <a:endParaRPr lang="en-US" sz="1500" dirty="0"/>
+          </a:p>
+        </p:txBody>
+      </p:sp>
+      <p:sp>
+        <p:nvSpPr>
+          <p:cNvPr id="25" name="Slide Number Placeholder 0"/>
+          <p:cNvSpPr>
+            <a:spLocks noGrp="1"/>
+          </p:cNvSpPr>
+          <p:nvPr>
+            <p:ph type="sldNum" sz="quarter" idx="4294967295"/>
+          </p:nvPr>
+        </p:nvSpPr>
+        <p:spPr>
+          <a:xfrm>
+            <a:off x="11292840" y="6556248"/>
+            <a:ext cx="548640" cy="256032"/>
+          </a:xfrm>
+          <a:prstGeom prst="rect">
+            <a:avLst/>
+          </a:prstGeom>
+          <a:extLst>
+            <a:ext uri="{C572A759-6A51-4108-AA02-DFA0A04FC94B}">
+              <ma14:wrappingTextBoxFlag xmlns:ma14="http://schemas.microsoft.com/office/mac/drawingml/2011/main" val="0"/>
+            </a:ext>
+          </a:extLst>
+        </p:spPr>
+        <p:txBody>
+          <a:bodyPr/>
+          <a:lstStyle>
+            <a:lvl1pPr>
+              <a:defRPr sz="900">
+                <a:solidFill>
+                  <a:srgbClr val="1B3A6B"/>
+                </a:solidFill>
+                <a:latin typeface="Arial"/>
+                <a:ea typeface="Arial"/>
+                <a:cs typeface="Arial"/>
+              </a:defRPr>
+            </a:lvl1pPr>
+          </a:lstStyle>
+          <a:p>
+            <a:pPr algn="r"/>
+            <a:fld id="{F7021451-1387-4CA6-816F-3879F97B5CBC}" type="slidenum">
+              <a:rPr b="1" lang="en-US"/>
+              <a:t>6</a:t>
+            </a:fld>
+            <a:endParaRPr lang="en-US"/>
           </a:p>
         </p:txBody>
       </p:sp>
@@ -9146,6 +10028,45 @@
         </p:nvSpPr>
         <p:spPr>
           <a:xfrm>
+            <a:off x="457200" y="548640"/>
+            <a:ext cx="3474720" cy="1737360"/>
+          </a:xfrm>
+          <a:prstGeom prst="rect">
+            <a:avLst/>
+          </a:prstGeom>
+          <a:noFill/>
+          <a:ln/>
+        </p:spPr>
+        <p:txBody>
+          <a:bodyPr wrap="square" rtlCol="0" anchor="ctr"/>
+          <a:lstStyle/>
+          <a:p>
+            <a:pPr indent="0" marL="0">
+              <a:buNone/>
+            </a:pPr>
+            <a:r>
+              <a:rPr lang="en-US" sz="11000" b="1" dirty="0">
+                <a:solidFill>
+                  <a:srgbClr val="11396F"/>
+                </a:solidFill>
+                <a:latin typeface="Arial" pitchFamily="34" charset="0"/>
+                <a:ea typeface="Arial" pitchFamily="34" charset="-122"/>
+                <a:cs typeface="Arial" pitchFamily="34" charset="-120"/>
+              </a:rPr>
+              <a:t>02</a:t>
+            </a:r>
+            <a:endParaRPr lang="en-US" sz="11000" dirty="0"/>
+          </a:p>
+        </p:txBody>
+      </p:sp>
+      <p:sp>
+        <p:nvSpPr>
+          <p:cNvPr id="4" name="Text 2"/>
+          <p:cNvSpPr/>
+          <p:nvPr/>
+        </p:nvSpPr>
+        <p:spPr>
+          <a:xfrm>
             <a:off x="548640" y="2194560"/>
             <a:ext cx="3291840" cy="548640"/>
           </a:xfrm>
@@ -9179,7 +10100,46 @@
       </p:sp>
       <p:sp>
         <p:nvSpPr>
-          <p:cNvPr id="4" name="Text 2"/>
+          <p:cNvPr id="5" name="Text 3"/>
+          <p:cNvSpPr/>
+          <p:nvPr/>
+        </p:nvSpPr>
+        <p:spPr>
+          <a:xfrm>
+            <a:off x="548640" y="3200400"/>
+            <a:ext cx="3383280" cy="457200"/>
+          </a:xfrm>
+          <a:prstGeom prst="rect">
+            <a:avLst/>
+          </a:prstGeom>
+          <a:noFill/>
+          <a:ln/>
+        </p:spPr>
+        <p:txBody>
+          <a:bodyPr wrap="square" rtlCol="0" anchor="ctr"/>
+          <a:lstStyle/>
+          <a:p>
+            <a:pPr indent="0" marL="0">
+              <a:buNone/>
+            </a:pPr>
+            <a:r>
+              <a:rPr lang="en-US" sz="1100" dirty="0">
+                <a:solidFill>
+                  <a:srgbClr val="C7D2E3"/>
+                </a:solidFill>
+                <a:latin typeface="Arial" pitchFamily="34" charset="0"/>
+                <a:ea typeface="Arial" pitchFamily="34" charset="-122"/>
+                <a:cs typeface="Arial" pitchFamily="34" charset="-120"/>
+              </a:rPr>
+              <a:t>M0 · Etapa 1 · Fundamentos</a:t>
+            </a:r>
+            <a:endParaRPr lang="en-US" sz="1100" dirty="0"/>
+          </a:p>
+        </p:txBody>
+      </p:sp>
+      <p:sp>
+        <p:nvSpPr>
+          <p:cNvPr id="6" name="Text 4"/>
           <p:cNvSpPr/>
           <p:nvPr/>
         </p:nvSpPr>
@@ -9218,7 +10178,7 @@
       </p:sp>
       <p:pic>
         <p:nvPicPr>
-          <p:cNvPr id="5" name="Image 0" descr="/www/wwwroot/rexar/gdsolar/docs/curso/slides/assets/logo-gdsolar.png">    </p:cNvPr>
+          <p:cNvPr id="7" name="Image 0" descr="/www/wwwroot/rexar/gdsolar/docs/curso/slides/assets/logo-gdsolar.png">    </p:cNvPr>
           <p:cNvPicPr>
             <a:picLocks noChangeAspect="1"/>
           </p:cNvPicPr>
@@ -9242,7 +10202,7 @@
       </p:pic>
       <p:sp>
         <p:nvSpPr>
-          <p:cNvPr id="6" name="Text 3"/>
+          <p:cNvPr id="8" name="Text 5"/>
           <p:cNvSpPr/>
           <p:nvPr/>
         </p:nvSpPr>
@@ -9283,7 +10243,7 @@
       </p:sp>
       <p:sp>
         <p:nvSpPr>
-          <p:cNvPr id="7" name="Text 4"/>
+          <p:cNvPr id="9" name="Text 6"/>
           <p:cNvSpPr/>
           <p:nvPr/>
         </p:nvSpPr>
@@ -9324,7 +10284,7 @@
       </p:sp>
       <p:sp>
         <p:nvSpPr>
-          <p:cNvPr id="8" name="Text 5"/>
+          <p:cNvPr id="10" name="Text 7"/>
           <p:cNvSpPr/>
           <p:nvPr/>
         </p:nvSpPr>
@@ -9503,7 +10463,7 @@
         </p:blipFill>
         <p:spPr>
           <a:xfrm>
-            <a:off x="411480" y="6547104"/>
+            <a:off x="548640" y="6547104"/>
             <a:ext cx="274320" cy="274320"/>
           </a:xfrm>
           <a:prstGeom prst="rect">
@@ -9519,7 +10479,7 @@
         </p:nvSpPr>
         <p:spPr>
           <a:xfrm>
-            <a:off x="749808" y="6528816"/>
+            <a:off x="886968" y="6528816"/>
             <a:ext cx="6400800" cy="310896"/>
           </a:xfrm>
           <a:prstGeom prst="rect">
@@ -9559,7 +10519,7 @@
         <p:spPr>
           <a:xfrm>
             <a:off x="7132320" y="6528816"/>
-            <a:ext cx="4663440" cy="310896"/>
+            <a:ext cx="4023360" cy="310896"/>
           </a:xfrm>
           <a:prstGeom prst="rect">
             <a:avLst/>
@@ -9597,7 +10557,7 @@
         </p:nvSpPr>
         <p:spPr>
           <a:xfrm>
-            <a:off x="411480" y="384048"/>
+            <a:off x="548640" y="384048"/>
             <a:ext cx="82296" cy="658368"/>
           </a:xfrm>
           <a:prstGeom prst="rect">
@@ -9617,7 +10577,7 @@
         </p:nvSpPr>
         <p:spPr>
           <a:xfrm>
-            <a:off x="640080" y="292608"/>
+            <a:off x="777240" y="292608"/>
             <a:ext cx="10972800" cy="274320"/>
           </a:xfrm>
           <a:prstGeom prst="rect">
@@ -9656,8 +10616,8 @@
         </p:nvSpPr>
         <p:spPr>
           <a:xfrm>
-            <a:off x="640080" y="530352"/>
-            <a:ext cx="11155680" cy="566928"/>
+            <a:off x="777240" y="530352"/>
+            <a:ext cx="10881360" cy="566928"/>
           </a:xfrm>
           <a:prstGeom prst="rect">
             <a:avLst/>
@@ -9697,12 +10657,12 @@
         </p:nvSpPr>
         <p:spPr>
           <a:xfrm>
-            <a:off x="411480" y="1325880"/>
-            <a:ext cx="3611880" cy="4937760"/>
+            <a:off x="548640" y="1325880"/>
+            <a:ext cx="3514344" cy="4937760"/>
           </a:xfrm>
           <a:prstGeom prst="roundRect">
             <a:avLst>
-              <a:gd name="adj" fmla="val 2025"/>
+              <a:gd name="adj" fmla="val 2082"/>
             </a:avLst>
           </a:prstGeom>
           <a:solidFill>
@@ -9731,8 +10691,8 @@
         </p:nvSpPr>
         <p:spPr>
           <a:xfrm>
-            <a:off x="411480" y="1325880"/>
-            <a:ext cx="3611880" cy="109728"/>
+            <a:off x="548640" y="1325880"/>
+            <a:ext cx="3514344" cy="109728"/>
           </a:xfrm>
           <a:prstGeom prst="rect">
             <a:avLst/>
@@ -9751,8 +10711,8 @@
         </p:nvSpPr>
         <p:spPr>
           <a:xfrm>
-            <a:off x="685800" y="1554480"/>
-            <a:ext cx="3063240" cy="685800"/>
+            <a:off x="822960" y="1554480"/>
+            <a:ext cx="2965704" cy="685800"/>
           </a:xfrm>
           <a:prstGeom prst="rect">
             <a:avLst/>
@@ -9792,8 +10752,8 @@
         </p:nvSpPr>
         <p:spPr>
           <a:xfrm>
-            <a:off x="685800" y="2286000"/>
-            <a:ext cx="3063240" cy="3749040"/>
+            <a:off x="822960" y="2286000"/>
+            <a:ext cx="2965704" cy="3749040"/>
           </a:xfrm>
           <a:prstGeom prst="rect">
             <a:avLst/>
@@ -9814,7 +10774,7 @@
               <a:buNone/>
             </a:pPr>
             <a:r>
-              <a:rPr lang="en-US" sz="1400" dirty="0">
+              <a:rPr lang="en-US" sz="1700" dirty="0">
                 <a:solidFill>
                   <a:srgbClr val="1F2937"/>
                 </a:solidFill>
@@ -9824,7 +10784,7 @@
               </a:rPr>
               <a:t>1. Fundamentos (M0–M1)</a:t>
             </a:r>
-            <a:endParaRPr lang="en-US" sz="1400" dirty="0"/>
+            <a:endParaRPr lang="en-US" sz="1700" dirty="0"/>
           </a:p>
           <a:p>
             <a:pPr indent="0" marL="0">
@@ -9834,7 +10794,7 @@
               <a:buNone/>
             </a:pPr>
             <a:r>
-              <a:rPr lang="en-US" sz="1400" dirty="0">
+              <a:rPr lang="en-US" sz="1700" dirty="0">
                 <a:solidFill>
                   <a:srgbClr val="1F2937"/>
                 </a:solidFill>
@@ -9844,7 +10804,7 @@
               </a:rPr>
               <a:t>2. Regulação e negócio (M2–M3)</a:t>
             </a:r>
-            <a:endParaRPr lang="en-US" sz="1400" dirty="0"/>
+            <a:endParaRPr lang="en-US" sz="1700" dirty="0"/>
           </a:p>
           <a:p>
             <a:pPr indent="0" marL="0">
@@ -9854,7 +10814,7 @@
               <a:buNone/>
             </a:pPr>
             <a:r>
-              <a:rPr lang="en-US" sz="1400" dirty="0">
+              <a:rPr lang="en-US" sz="1700" dirty="0">
                 <a:solidFill>
                   <a:srgbClr val="1F2937"/>
                 </a:solidFill>
@@ -9864,7 +10824,7 @@
               </a:rPr>
               <a:t>3. Operação ponta a ponta (M4–M9)</a:t>
             </a:r>
-            <a:endParaRPr lang="en-US" sz="1400" dirty="0"/>
+            <a:endParaRPr lang="en-US" sz="1700" dirty="0"/>
           </a:p>
           <a:p>
             <a:pPr indent="0" marL="0">
@@ -9874,7 +10834,7 @@
               <a:buNone/>
             </a:pPr>
             <a:r>
-              <a:rPr lang="en-US" sz="1400" dirty="0">
+              <a:rPr lang="en-US" sz="1700" dirty="0">
                 <a:solidFill>
                   <a:srgbClr val="1F2937"/>
                 </a:solidFill>
@@ -9884,7 +10844,7 @@
               </a:rPr>
               <a:t>4. Gestão e estratégia (M10–M12)</a:t>
             </a:r>
-            <a:endParaRPr lang="en-US" sz="1400" dirty="0"/>
+            <a:endParaRPr lang="en-US" sz="1700" dirty="0"/>
           </a:p>
         </p:txBody>
       </p:sp>
@@ -9896,12 +10856,12 @@
         </p:nvSpPr>
         <p:spPr>
           <a:xfrm>
-            <a:off x="4297680" y="1325880"/>
-            <a:ext cx="3611880" cy="4937760"/>
+            <a:off x="4337304" y="1325880"/>
+            <a:ext cx="3514344" cy="4937760"/>
           </a:xfrm>
           <a:prstGeom prst="roundRect">
             <a:avLst>
-              <a:gd name="adj" fmla="val 2025"/>
+              <a:gd name="adj" fmla="val 2082"/>
             </a:avLst>
           </a:prstGeom>
           <a:solidFill>
@@ -9930,8 +10890,8 @@
         </p:nvSpPr>
         <p:spPr>
           <a:xfrm>
-            <a:off x="4297680" y="1325880"/>
-            <a:ext cx="3611880" cy="109728"/>
+            <a:off x="4337304" y="1325880"/>
+            <a:ext cx="3514344" cy="109728"/>
           </a:xfrm>
           <a:prstGeom prst="rect">
             <a:avLst/>
@@ -9950,8 +10910,8 @@
         </p:nvSpPr>
         <p:spPr>
           <a:xfrm>
-            <a:off x="4572000" y="1554480"/>
-            <a:ext cx="3063240" cy="685800"/>
+            <a:off x="4611624" y="1554480"/>
+            <a:ext cx="2965704" cy="685800"/>
           </a:xfrm>
           <a:prstGeom prst="rect">
             <a:avLst/>
@@ -9991,8 +10951,8 @@
         </p:nvSpPr>
         <p:spPr>
           <a:xfrm>
-            <a:off x="4572000" y="2286000"/>
-            <a:ext cx="3063240" cy="3749040"/>
+            <a:off x="4611624" y="2286000"/>
+            <a:ext cx="2965704" cy="3749040"/>
           </a:xfrm>
           <a:prstGeom prst="rect">
             <a:avLst/>
@@ -10057,12 +11017,12 @@
         </p:nvSpPr>
         <p:spPr>
           <a:xfrm>
-            <a:off x="8183880" y="1325880"/>
-            <a:ext cx="3611880" cy="4937760"/>
+            <a:off x="8125968" y="1325880"/>
+            <a:ext cx="3514344" cy="4937760"/>
           </a:xfrm>
           <a:prstGeom prst="roundRect">
             <a:avLst>
-              <a:gd name="adj" fmla="val 2025"/>
+              <a:gd name="adj" fmla="val 2082"/>
             </a:avLst>
           </a:prstGeom>
           <a:solidFill>
@@ -10091,8 +11051,8 @@
         </p:nvSpPr>
         <p:spPr>
           <a:xfrm>
-            <a:off x="8183880" y="1325880"/>
-            <a:ext cx="3611880" cy="109728"/>
+            <a:off x="8125968" y="1325880"/>
+            <a:ext cx="3514344" cy="109728"/>
           </a:xfrm>
           <a:prstGeom prst="rect">
             <a:avLst/>
@@ -10111,8 +11071,8 @@
         </p:nvSpPr>
         <p:spPr>
           <a:xfrm>
-            <a:off x="8458200" y="1554480"/>
-            <a:ext cx="3063240" cy="685800"/>
+            <a:off x="8400288" y="1554480"/>
+            <a:ext cx="2965704" cy="685800"/>
           </a:xfrm>
           <a:prstGeom prst="rect">
             <a:avLst/>
@@ -10152,8 +11112,8 @@
         </p:nvSpPr>
         <p:spPr>
           <a:xfrm>
-            <a:off x="8458200" y="2286000"/>
-            <a:ext cx="3063240" cy="3749040"/>
+            <a:off x="8400288" y="2286000"/>
+            <a:ext cx="2965704" cy="3749040"/>
           </a:xfrm>
           <a:prstGeom prst="rect">
             <a:avLst/>
@@ -10228,6 +11188,54 @@
               <a:t>Projeto final = sua empresa operando</a:t>
             </a:r>
             <a:endParaRPr lang="en-US" sz="1700" dirty="0"/>
+          </a:p>
+        </p:txBody>
+      </p:sp>
+      <p:sp>
+        <p:nvSpPr>
+          <p:cNvPr id="25" name="Slide Number Placeholder 0"/>
+          <p:cNvSpPr>
+            <a:spLocks noGrp="1"/>
+          </p:cNvSpPr>
+          <p:nvPr>
+            <p:ph type="sldNum" sz="quarter" idx="4294967295"/>
+          </p:nvPr>
+        </p:nvSpPr>
+        <p:spPr>
+          <a:xfrm>
+            <a:off x="11292840" y="6556248"/>
+            <a:ext cx="548640" cy="256032"/>
+          </a:xfrm>
+          <a:prstGeom prst="rect">
+            <a:avLst/>
+          </a:prstGeom>
+          <a:extLst>
+            <a:ext uri="{C572A759-6A51-4108-AA02-DFA0A04FC94B}">
+              <ma14:wrappingTextBoxFlag xmlns:ma14="http://schemas.microsoft.com/office/mac/drawingml/2011/main" val="0"/>
+            </a:ext>
+          </a:extLst>
+        </p:spPr>
+        <p:txBody>
+          <a:bodyPr/>
+          <a:lstStyle>
+            <a:lvl1pPr>
+              <a:defRPr sz="900">
+                <a:solidFill>
+                  <a:srgbClr val="1B3A6B"/>
+                </a:solidFill>
+                <a:latin typeface="Arial"/>
+                <a:ea typeface="Arial"/>
+                <a:cs typeface="Arial"/>
+              </a:defRPr>
+            </a:lvl1pPr>
+          </a:lstStyle>
+          <a:p>
+            <a:pPr algn="r"/>
+            <a:fld id="{F7021451-1387-4CA6-816F-3879F97B5CBC}" type="slidenum">
+              <a:rPr b="1" lang="en-US"/>
+              <a:t>8</a:t>
+            </a:fld>
+            <a:endParaRPr lang="en-US"/>
           </a:p>
         </p:txBody>
       </p:sp>
@@ -10304,7 +11312,7 @@
         </p:blipFill>
         <p:spPr>
           <a:xfrm>
-            <a:off x="411480" y="6547104"/>
+            <a:off x="548640" y="6547104"/>
             <a:ext cx="274320" cy="274320"/>
           </a:xfrm>
           <a:prstGeom prst="rect">
@@ -10320,7 +11328,7 @@
         </p:nvSpPr>
         <p:spPr>
           <a:xfrm>
-            <a:off x="749808" y="6528816"/>
+            <a:off x="886968" y="6528816"/>
             <a:ext cx="6400800" cy="310896"/>
           </a:xfrm>
           <a:prstGeom prst="rect">
@@ -10360,7 +11368,7 @@
         <p:spPr>
           <a:xfrm>
             <a:off x="7132320" y="6528816"/>
-            <a:ext cx="4663440" cy="310896"/>
+            <a:ext cx="4023360" cy="310896"/>
           </a:xfrm>
           <a:prstGeom prst="rect">
             <a:avLst/>
@@ -10398,7 +11406,7 @@
         </p:nvSpPr>
         <p:spPr>
           <a:xfrm>
-            <a:off x="411480" y="384048"/>
+            <a:off x="548640" y="384048"/>
             <a:ext cx="82296" cy="658368"/>
           </a:xfrm>
           <a:prstGeom prst="rect">
@@ -10418,7 +11426,7 @@
         </p:nvSpPr>
         <p:spPr>
           <a:xfrm>
-            <a:off x="640080" y="292608"/>
+            <a:off x="777240" y="292608"/>
             <a:ext cx="10972800" cy="274320"/>
           </a:xfrm>
           <a:prstGeom prst="rect">
@@ -10457,8 +11465,8 @@
         </p:nvSpPr>
         <p:spPr>
           <a:xfrm>
-            <a:off x="640080" y="530352"/>
-            <a:ext cx="11155680" cy="566928"/>
+            <a:off x="777240" y="530352"/>
+            <a:ext cx="10881360" cy="566928"/>
           </a:xfrm>
           <a:prstGeom prst="rect">
             <a:avLst/>
@@ -10498,8 +11506,8 @@
         </p:nvSpPr>
         <p:spPr>
           <a:xfrm>
-            <a:off x="411480" y="1325880"/>
-            <a:ext cx="5577840" cy="2331720"/>
+            <a:off x="548640" y="1325880"/>
+            <a:ext cx="5431536" cy="2331720"/>
           </a:xfrm>
           <a:prstGeom prst="roundRect">
             <a:avLst>
@@ -10532,7 +11540,7 @@
         </p:nvSpPr>
         <p:spPr>
           <a:xfrm>
-            <a:off x="594360" y="1508760"/>
+            <a:off x="731520" y="1508760"/>
             <a:ext cx="457200" cy="457200"/>
           </a:xfrm>
           <a:prstGeom prst="ellipse">
@@ -10552,7 +11560,7 @@
         </p:nvSpPr>
         <p:spPr>
           <a:xfrm>
-            <a:off x="594360" y="1508760"/>
+            <a:off x="731520" y="1508760"/>
             <a:ext cx="457200" cy="457200"/>
           </a:xfrm>
           <a:prstGeom prst="rect">
@@ -10591,8 +11599,8 @@
         </p:nvSpPr>
         <p:spPr>
           <a:xfrm>
-            <a:off x="1188720" y="1435608"/>
-            <a:ext cx="4663440" cy="2112264"/>
+            <a:off x="1325880" y="1435608"/>
+            <a:ext cx="4517136" cy="2112264"/>
           </a:xfrm>
           <a:prstGeom prst="rect">
             <a:avLst/>
@@ -10632,8 +11640,8 @@
         </p:nvSpPr>
         <p:spPr>
           <a:xfrm>
-            <a:off x="6217920" y="1325880"/>
-            <a:ext cx="5577840" cy="2331720"/>
+            <a:off x="6208776" y="1325880"/>
+            <a:ext cx="5431536" cy="2331720"/>
           </a:xfrm>
           <a:prstGeom prst="roundRect">
             <a:avLst>
@@ -10666,7 +11674,7 @@
         </p:nvSpPr>
         <p:spPr>
           <a:xfrm>
-            <a:off x="6400800" y="1508760"/>
+            <a:off x="6391656" y="1508760"/>
             <a:ext cx="457200" cy="457200"/>
           </a:xfrm>
           <a:prstGeom prst="ellipse">
@@ -10686,7 +11694,7 @@
         </p:nvSpPr>
         <p:spPr>
           <a:xfrm>
-            <a:off x="6400800" y="1508760"/>
+            <a:off x="6391656" y="1508760"/>
             <a:ext cx="457200" cy="457200"/>
           </a:xfrm>
           <a:prstGeom prst="rect">
@@ -10725,8 +11733,8 @@
         </p:nvSpPr>
         <p:spPr>
           <a:xfrm>
-            <a:off x="6995160" y="1435608"/>
-            <a:ext cx="4663440" cy="2112264"/>
+            <a:off x="6986016" y="1435608"/>
+            <a:ext cx="4517136" cy="2112264"/>
           </a:xfrm>
           <a:prstGeom prst="rect">
             <a:avLst/>
@@ -10766,8 +11774,8 @@
         </p:nvSpPr>
         <p:spPr>
           <a:xfrm>
-            <a:off x="411480" y="3886200"/>
-            <a:ext cx="5577840" cy="2331720"/>
+            <a:off x="548640" y="3886200"/>
+            <a:ext cx="5431536" cy="2331720"/>
           </a:xfrm>
           <a:prstGeom prst="roundRect">
             <a:avLst>
@@ -10800,7 +11808,7 @@
         </p:nvSpPr>
         <p:spPr>
           <a:xfrm>
-            <a:off x="594360" y="4069080"/>
+            <a:off x="731520" y="4069080"/>
             <a:ext cx="457200" cy="457200"/>
           </a:xfrm>
           <a:prstGeom prst="ellipse">
@@ -10820,7 +11828,7 @@
         </p:nvSpPr>
         <p:spPr>
           <a:xfrm>
-            <a:off x="594360" y="4069080"/>
+            <a:off x="731520" y="4069080"/>
             <a:ext cx="457200" cy="457200"/>
           </a:xfrm>
           <a:prstGeom prst="rect">
@@ -10859,8 +11867,8 @@
         </p:nvSpPr>
         <p:spPr>
           <a:xfrm>
-            <a:off x="1188720" y="3995928"/>
-            <a:ext cx="4663440" cy="2112264"/>
+            <a:off x="1325880" y="3995928"/>
+            <a:ext cx="4517136" cy="2112264"/>
           </a:xfrm>
           <a:prstGeom prst="rect">
             <a:avLst/>
@@ -10900,8 +11908,8 @@
         </p:nvSpPr>
         <p:spPr>
           <a:xfrm>
-            <a:off x="6217920" y="3886200"/>
-            <a:ext cx="5577840" cy="2331720"/>
+            <a:off x="6208776" y="3886200"/>
+            <a:ext cx="5431536" cy="2331720"/>
           </a:xfrm>
           <a:prstGeom prst="roundRect">
             <a:avLst>
@@ -10934,7 +11942,7 @@
         </p:nvSpPr>
         <p:spPr>
           <a:xfrm>
-            <a:off x="6400800" y="4069080"/>
+            <a:off x="6391656" y="4069080"/>
             <a:ext cx="457200" cy="457200"/>
           </a:xfrm>
           <a:prstGeom prst="ellipse">
@@ -10954,7 +11962,7 @@
         </p:nvSpPr>
         <p:spPr>
           <a:xfrm>
-            <a:off x="6400800" y="4069080"/>
+            <a:off x="6391656" y="4069080"/>
             <a:ext cx="457200" cy="457200"/>
           </a:xfrm>
           <a:prstGeom prst="rect">
@@ -10993,8 +12001,8 @@
         </p:nvSpPr>
         <p:spPr>
           <a:xfrm>
-            <a:off x="6995160" y="3995928"/>
-            <a:ext cx="4663440" cy="2112264"/>
+            <a:off x="6986016" y="3995928"/>
+            <a:ext cx="4517136" cy="2112264"/>
           </a:xfrm>
           <a:prstGeom prst="rect">
             <a:avLst/>
@@ -11023,6 +12031,54 @@
               <a:t>- Use a calculadora e os modelos no seu negócio real</a:t>
             </a:r>
             <a:endParaRPr lang="en-US" sz="1800" dirty="0"/>
+          </a:p>
+        </p:txBody>
+      </p:sp>
+      <p:sp>
+        <p:nvSpPr>
+          <p:cNvPr id="25" name="Slide Number Placeholder 0"/>
+          <p:cNvSpPr>
+            <a:spLocks noGrp="1"/>
+          </p:cNvSpPr>
+          <p:nvPr>
+            <p:ph type="sldNum" sz="quarter" idx="4294967295"/>
+          </p:nvPr>
+        </p:nvSpPr>
+        <p:spPr>
+          <a:xfrm>
+            <a:off x="11292840" y="6556248"/>
+            <a:ext cx="548640" cy="256032"/>
+          </a:xfrm>
+          <a:prstGeom prst="rect">
+            <a:avLst/>
+          </a:prstGeom>
+          <a:extLst>
+            <a:ext uri="{C572A759-6A51-4108-AA02-DFA0A04FC94B}">
+              <ma14:wrappingTextBoxFlag xmlns:ma14="http://schemas.microsoft.com/office/mac/drawingml/2011/main" val="0"/>
+            </a:ext>
+          </a:extLst>
+        </p:spPr>
+        <p:txBody>
+          <a:bodyPr/>
+          <a:lstStyle>
+            <a:lvl1pPr>
+              <a:defRPr sz="900">
+                <a:solidFill>
+                  <a:srgbClr val="1B3A6B"/>
+                </a:solidFill>
+                <a:latin typeface="Arial"/>
+                <a:ea typeface="Arial"/>
+                <a:cs typeface="Arial"/>
+              </a:defRPr>
+            </a:lvl1pPr>
+          </a:lstStyle>
+          <a:p>
+            <a:pPr algn="r"/>
+            <a:fld id="{F7021451-1387-4CA6-816F-3879F97B5CBC}" type="slidenum">
+              <a:rPr b="1" lang="en-US"/>
+              <a:t>9</a:t>
+            </a:fld>
+            <a:endParaRPr lang="en-US"/>
           </a:p>
         </p:txBody>
       </p:sp>

--- a/docs/curso/slides/m00-boas-vindas.pptx
+++ b/docs/curso/slides/m00-boas-vindas.pptx
@@ -23,9 +23,13 @@
     <p:sldId id="271" r:id="rId17"/>
     <p:sldId id="272" r:id="rId18"/>
     <p:sldId id="273" r:id="rId19"/>
+    <p:sldId id="274" r:id="rId20"/>
+    <p:sldId id="275" r:id="rId21"/>
+    <p:sldId id="276" r:id="rId22"/>
+    <p:sldId id="277" r:id="rId23"/>
   </p:sldIdLst>
   <p:notesMasterIdLst>
-    <p:notesMasterId r:id="rId20"/>
+    <p:notesMasterId r:id="rId24"/>
   </p:notesMasterIdLst>
   <p:sldSz cx="12192000" cy="6858000"/>
   <p:notesSz cx="6858000" cy="12192000"/>
@@ -695,10 +699,10 @@
           <a:p>
             <a:r>
               <a:rPr lang="en-US" dirty="0"/>
-              <a:t>Abra o endereço que veio no e-mail. Na tela de login, digite o seu e-mail e a senha. Na primeira entrada, troque a senha por uma só sua. Repare na barra no rodapé: ela mostra que você está num ambiente de aula e permite trocar de perfil. Já, já a gente usa.
-Você entrou como Administrador. Esse é o perfil do dono da empresa: ele vê tudo e configura tudo. No painel inicial, o dashboard, aparecem os números da operação: clientes ativos, propostas, faturas aguardando revisão, cobranças em aberto e vencidas, quanto há a receber. No menu lateral estão os módulos que vamos usar no curso inteiro. Cliente Consumidor, com clientes, propostas, contratos e unidades consumidoras. Produtores Solar, com os donos de usina e as propostas para eles. Usinas Solar, com as usinas, a gestão de energia e a geração mensal. Financeiro, com as faturas da distribuidora, as cobranças e os pagamentos. Relatórios. E Configurações, onde ficam as regras do seu negócio, como o desconto padrão que você oferece. No canto superior, o sino mostra os alertas operacionais — tudo o que precisa de atenção. Não se preocupe em entender cada tela agora: cada uma tem a sua aula.
-Agora troque para o perfil Consultor, na barra do rodapé. O consultor é o vendedor da sua empresa. Ele prospecta clientes e donos de usina, faz propostas e acompanha a carteira dele. Repare na lista de clientes: aparecem menos clientes do que no administrador. Isso é proposital. Cada consultor só enxerga a própria carteira. Quando a sua empresa tiver cinco, dez vendedores, um não vê o cliente do outro. Isso protege a sua base comercial e evita conflito entre vendedores.
-Agora troque para Cliente. Este é o portal que o seu assinante vê. Ele acompanha as faturas da distribuidora, as cobranças da sua empresa e, principalmente, quanto já economizou — esse número no topo é uma ferramenta poderosa de retenção, e vamos falar muito dele no módulo de relatórios. Ao abrir uma cobrança, o cliente vê o valor e, quando houver, o Pix copia e cola e o boleto para pagar. Quanto mais o cliente resolve sozinho no portal, menos ele liga para a sua empresa.</a:t>
+              <a:t>Abra o endereço recebido por e-mail, entre com seu e-mail e senha e troque a senha no primeiro acesso.
+Como Administrador (o dono), veja no dashboard clientes, faturas em revisão, cobranças e valores a receber. O sino mostra os alertas.
+Troque para Consultor: ele vê só a própria carteira de clientes, produtores e propostas.
+Troque para Cliente: o portal mostra faturas, cobranças com Pix ou boleto e a economia acumulada.</a:t>
             </a:r>
             <a:endParaRPr lang="en-US" dirty="0"/>
           </a:p>
@@ -786,7 +790,7 @@
           <a:p>
             <a:r>
               <a:rPr lang="en-US" dirty="0"/>
-              <a:t>Por fim, o perfil Produtor. É o dono da usina que fornece a energia para a sua operação. Ele vê as usinas dele e o histórico de geração mês a mês. Para o produtor, transparência é confiança: ele precisa sentir que a usina dele está bem cuidada e bem aproveitada.</a:t>
+              <a:t>Troque para Produtor: ele acompanha as próprias usinas e a geração de cada mês.</a:t>
             </a:r>
             <a:endParaRPr lang="en-US" dirty="0"/>
           </a:p>
@@ -1138,9 +1142,9 @@
           <a:p>
             <a:r>
               <a:rPr lang="en-US" dirty="0"/>
-              <a:t>O seu laboratório já começa com alguns dados de exemplo, iguais para todos os alunos, para que as aulas em vídeo batam exatamente com o que você vê. Tem uma distribuidora de exemplo, com a tarifa cadastrada. Tem uma usina de referência, a UFV Sol Nascente I, com quinhentos quilowatts-pico e geração média de sessenta mil quilowatts-hora por mês — não se preocupe com esses termos agora, eles são o assunto do próximo módulo. E tem três clientes de exemplo: uma padaria, uma clínica e uma residência. Nas aulas, a gente vai usar esses exemplos para aprender. E você vai criar, por cima deles, a sua própria empresa.
-Agora pegue o modelo da ficha da sua empresa, que está nos materiais desta aula. São cinco campos. Primeiro, o nome da sua empresa. Pode ser um nome de teste ou o nome que você pretende usar de verdade. Segundo, a cidade e o estado onde você vai atuar. Isso importa muito, porque a geração distribuída funciona dentro da área de uma distribuidora: a usina e os clientes precisam estar na área da mesma distribuidora. Então, terceiro campo: qual é a distribuidora da sua região. Se não souber, olhe a sua própria conta de luz, o nome está no topo. Quarto, o seu perfil: você está começando do zero ou já tem uma empresa de energia solar? E quinto, uma meta para doze meses: quantas usinas, quantos clientes. Não precisa ser precisa. É um ponto de partida que a gente vai testar com números no módulo 3.
-Veja um exemplo. A Solaris Assinaturas, empresa fictícia, vai atuar em Maringá, no Paraná, na área da distribuidora do estado. O perfil é de uma integradora com seis anos de mercado, que já instalou centenas de sistemas e quer começar a vender assinaturas. A meta para doze meses é ter uma usina de um megawatt e trezentos clientes. Será que essa meta é coerente? Uma usina de um megawatt atende trezentos clientes? Qual tipo de cliente? Quanto essa empresa fatura por mês? Você ainda não precisa saber responder. Ao longo dos próximos módulos, você vai ganhar as ferramentas para responder isso com números.</a:t>
+              <a:t>O laboratório já começa com uma distribuidora, uma usina de referência e três clientes de exemplo, iguais para todos. Por cima deles, você cria a sua empresa.
+Preencha a ficha da sua empresa. O campo mais importante é a distribuidora: usina e clientes precisam estar na área da mesma distribuidora.
+Veja o exemplo da Solaris. A meta parece boa, mas será coerente? Ao longo do curso, você terá as ferramentas para responder com números.</a:t>
             </a:r>
             <a:endParaRPr lang="en-US" dirty="0"/>
           </a:p>
@@ -1228,7 +1232,7 @@
           <a:p>
             <a:r>
               <a:rPr lang="en-US" dirty="0"/>
-              <a:t>Olhe o caminho. No módulo 3, você faz a conta do seu modelo de negócio. No 4, cadastra a sua usina e o produtor. No 5, faz as propostas para os primeiros clientes. No 6, contratos e distribuição da energia. No 7, recebe e confere as faturas. No 8, cobra e recebe. No 9, monta a rotina mensal. No 10, mede tudo com indicadores. No 11, fecha o plano de negócio. E no 12, apresenta a sua operação funcionando.</a:t>
+              <a:t>Cada módulo acrescenta uma peça: a conta, a usina, os clientes, os contratos, as faturas, as cobranças, a rotina, os indicadores e o plano.</a:t>
             </a:r>
             <a:endParaRPr lang="en-US" dirty="0"/>
           </a:p>
@@ -1358,6 +1362,94 @@
 </p:notes>
 </file>
 
+<file path=ppt/notesSlides/notesSlide19.xml><?xml version="1.0" encoding="utf-8"?>
+<p:notes xmlns:a="http://schemas.openxmlformats.org/drawingml/2006/main" xmlns:r="http://schemas.openxmlformats.org/officeDocument/2006/relationships" xmlns:p="http://schemas.openxmlformats.org/presentationml/2006/main">
+  <p:cSld>
+    <p:spTree>
+      <p:nvGrpSpPr>
+        <p:cNvPr id="1" name=""/>
+        <p:cNvGrpSpPr/>
+        <p:nvPr/>
+      </p:nvGrpSpPr>
+      <p:grpSpPr>
+        <a:xfrm>
+          <a:off x="0" y="0"/>
+          <a:ext cx="0" cy="0"/>
+          <a:chOff x="0" y="0"/>
+          <a:chExt cx="0" cy="0"/>
+        </a:xfrm>
+      </p:grpSpPr>
+      <p:sp>
+        <p:nvSpPr>
+          <p:cNvPr id="2" name="Slide Image Placeholder 1"/>
+          <p:cNvSpPr>
+            <a:spLocks noGrp="1" noRot="1" noChangeAspect="1"/>
+          </p:cNvSpPr>
+          <p:nvPr>
+            <p:ph type="sldImg"/>
+          </p:nvPr>
+        </p:nvSpPr>
+        <p:spPr/>
+      </p:sp>
+      <p:sp>
+        <p:nvSpPr>
+          <p:cNvPr id="3" name="Notes Placeholder 2"/>
+          <p:cNvSpPr>
+            <a:spLocks noGrp="1"/>
+          </p:cNvSpPr>
+          <p:nvPr>
+            <p:ph type="body" idx="1"/>
+          </p:nvPr>
+        </p:nvSpPr>
+        <p:spPr/>
+        <p:txBody>
+          <a:bodyPr/>
+          <a:lstStyle/>
+          <a:p>
+            <a:r>
+              <a:rPr lang="en-US" dirty="0"/>
+              <a:t/>
+            </a:r>
+            <a:endParaRPr lang="en-US" dirty="0"/>
+          </a:p>
+        </p:txBody>
+      </p:sp>
+      <p:sp>
+        <p:nvSpPr>
+          <p:cNvPr id="4" name="Slide Number Placeholder 3"/>
+          <p:cNvSpPr>
+            <a:spLocks noGrp="1"/>
+          </p:cNvSpPr>
+          <p:nvPr>
+            <p:ph type="sldNum" sz="quarter" idx="10"/>
+          </p:nvPr>
+        </p:nvSpPr>
+        <p:spPr/>
+        <p:txBody>
+          <a:bodyPr/>
+          <a:lstStyle/>
+          <a:p>
+            <a:fld id="{F7021451-1387-4CA6-816F-3879F97B5CBC}" type="slidenum">
+              <a:rPr lang="en-US"/>
+              <a:t>19</a:t>
+            </a:fld>
+            <a:endParaRPr lang="en-US"/>
+          </a:p>
+        </p:txBody>
+      </p:sp>
+    </p:spTree>
+    <p:extLst>
+      <p:ext uri="{BB962C8B-B14F-4D97-AF65-F5344CB8AC3E}">
+        <p14:creationId xmlns:p14="http://schemas.microsoft.com/office/powerpoint/2010/main" val="1024086991"/>
+      </p:ext>
+    </p:extLst>
+  </p:cSld>
+  <p:clrMapOvr>
+    <a:masterClrMapping/>
+  </p:clrMapOvr>
+</p:notes>
+</file>
+
 <file path=ppt/notesSlides/notesSlide2.xml><?xml version="1.0" encoding="utf-8"?>
 <p:notes xmlns:a="http://schemas.openxmlformats.org/drawingml/2006/main" xmlns:r="http://schemas.openxmlformats.org/officeDocument/2006/relationships" xmlns:p="http://schemas.openxmlformats.org/presentationml/2006/main">
   <p:cSld>
@@ -1428,6 +1520,270 @@
             <a:fld id="{F7021451-1387-4CA6-816F-3879F97B5CBC}" type="slidenum">
               <a:rPr lang="en-US"/>
               <a:t>2</a:t>
+            </a:fld>
+            <a:endParaRPr lang="en-US"/>
+          </a:p>
+        </p:txBody>
+      </p:sp>
+    </p:spTree>
+    <p:extLst>
+      <p:ext uri="{BB962C8B-B14F-4D97-AF65-F5344CB8AC3E}">
+        <p14:creationId xmlns:p14="http://schemas.microsoft.com/office/powerpoint/2010/main" val="1024086991"/>
+      </p:ext>
+    </p:extLst>
+  </p:cSld>
+  <p:clrMapOvr>
+    <a:masterClrMapping/>
+  </p:clrMapOvr>
+</p:notes>
+</file>
+
+<file path=ppt/notesSlides/notesSlide20.xml><?xml version="1.0" encoding="utf-8"?>
+<p:notes xmlns:a="http://schemas.openxmlformats.org/drawingml/2006/main" xmlns:r="http://schemas.openxmlformats.org/officeDocument/2006/relationships" xmlns:p="http://schemas.openxmlformats.org/presentationml/2006/main">
+  <p:cSld>
+    <p:spTree>
+      <p:nvGrpSpPr>
+        <p:cNvPr id="1" name=""/>
+        <p:cNvGrpSpPr/>
+        <p:nvPr/>
+      </p:nvGrpSpPr>
+      <p:grpSpPr>
+        <a:xfrm>
+          <a:off x="0" y="0"/>
+          <a:ext cx="0" cy="0"/>
+          <a:chOff x="0" y="0"/>
+          <a:chExt cx="0" cy="0"/>
+        </a:xfrm>
+      </p:grpSpPr>
+      <p:sp>
+        <p:nvSpPr>
+          <p:cNvPr id="2" name="Slide Image Placeholder 1"/>
+          <p:cNvSpPr>
+            <a:spLocks noGrp="1" noRot="1" noChangeAspect="1"/>
+          </p:cNvSpPr>
+          <p:nvPr>
+            <p:ph type="sldImg"/>
+          </p:nvPr>
+        </p:nvSpPr>
+        <p:spPr/>
+      </p:sp>
+      <p:sp>
+        <p:nvSpPr>
+          <p:cNvPr id="3" name="Notes Placeholder 2"/>
+          <p:cNvSpPr>
+            <a:spLocks noGrp="1"/>
+          </p:cNvSpPr>
+          <p:nvPr>
+            <p:ph type="body" idx="1"/>
+          </p:nvPr>
+        </p:nvSpPr>
+        <p:spPr/>
+        <p:txBody>
+          <a:bodyPr/>
+          <a:lstStyle/>
+          <a:p>
+            <a:r>
+              <a:rPr lang="en-US" dirty="0"/>
+              <a:t/>
+            </a:r>
+            <a:endParaRPr lang="en-US" dirty="0"/>
+          </a:p>
+        </p:txBody>
+      </p:sp>
+      <p:sp>
+        <p:nvSpPr>
+          <p:cNvPr id="4" name="Slide Number Placeholder 3"/>
+          <p:cNvSpPr>
+            <a:spLocks noGrp="1"/>
+          </p:cNvSpPr>
+          <p:nvPr>
+            <p:ph type="sldNum" sz="quarter" idx="10"/>
+          </p:nvPr>
+        </p:nvSpPr>
+        <p:spPr/>
+        <p:txBody>
+          <a:bodyPr/>
+          <a:lstStyle/>
+          <a:p>
+            <a:fld id="{F7021451-1387-4CA6-816F-3879F97B5CBC}" type="slidenum">
+              <a:rPr lang="en-US"/>
+              <a:t>20</a:t>
+            </a:fld>
+            <a:endParaRPr lang="en-US"/>
+          </a:p>
+        </p:txBody>
+      </p:sp>
+    </p:spTree>
+    <p:extLst>
+      <p:ext uri="{BB962C8B-B14F-4D97-AF65-F5344CB8AC3E}">
+        <p14:creationId xmlns:p14="http://schemas.microsoft.com/office/powerpoint/2010/main" val="1024086991"/>
+      </p:ext>
+    </p:extLst>
+  </p:cSld>
+  <p:clrMapOvr>
+    <a:masterClrMapping/>
+  </p:clrMapOvr>
+</p:notes>
+</file>
+
+<file path=ppt/notesSlides/notesSlide21.xml><?xml version="1.0" encoding="utf-8"?>
+<p:notes xmlns:a="http://schemas.openxmlformats.org/drawingml/2006/main" xmlns:r="http://schemas.openxmlformats.org/officeDocument/2006/relationships" xmlns:p="http://schemas.openxmlformats.org/presentationml/2006/main">
+  <p:cSld>
+    <p:spTree>
+      <p:nvGrpSpPr>
+        <p:cNvPr id="1" name=""/>
+        <p:cNvGrpSpPr/>
+        <p:nvPr/>
+      </p:nvGrpSpPr>
+      <p:grpSpPr>
+        <a:xfrm>
+          <a:off x="0" y="0"/>
+          <a:ext cx="0" cy="0"/>
+          <a:chOff x="0" y="0"/>
+          <a:chExt cx="0" cy="0"/>
+        </a:xfrm>
+      </p:grpSpPr>
+      <p:sp>
+        <p:nvSpPr>
+          <p:cNvPr id="2" name="Slide Image Placeholder 1"/>
+          <p:cNvSpPr>
+            <a:spLocks noGrp="1" noRot="1" noChangeAspect="1"/>
+          </p:cNvSpPr>
+          <p:nvPr>
+            <p:ph type="sldImg"/>
+          </p:nvPr>
+        </p:nvSpPr>
+        <p:spPr/>
+      </p:sp>
+      <p:sp>
+        <p:nvSpPr>
+          <p:cNvPr id="3" name="Notes Placeholder 2"/>
+          <p:cNvSpPr>
+            <a:spLocks noGrp="1"/>
+          </p:cNvSpPr>
+          <p:nvPr>
+            <p:ph type="body" idx="1"/>
+          </p:nvPr>
+        </p:nvSpPr>
+        <p:spPr/>
+        <p:txBody>
+          <a:bodyPr/>
+          <a:lstStyle/>
+          <a:p>
+            <a:r>
+              <a:rPr lang="en-US" dirty="0"/>
+              <a:t/>
+            </a:r>
+            <a:endParaRPr lang="en-US" dirty="0"/>
+          </a:p>
+        </p:txBody>
+      </p:sp>
+      <p:sp>
+        <p:nvSpPr>
+          <p:cNvPr id="4" name="Slide Number Placeholder 3"/>
+          <p:cNvSpPr>
+            <a:spLocks noGrp="1"/>
+          </p:cNvSpPr>
+          <p:nvPr>
+            <p:ph type="sldNum" sz="quarter" idx="10"/>
+          </p:nvPr>
+        </p:nvSpPr>
+        <p:spPr/>
+        <p:txBody>
+          <a:bodyPr/>
+          <a:lstStyle/>
+          <a:p>
+            <a:fld id="{F7021451-1387-4CA6-816F-3879F97B5CBC}" type="slidenum">
+              <a:rPr lang="en-US"/>
+              <a:t>21</a:t>
+            </a:fld>
+            <a:endParaRPr lang="en-US"/>
+          </a:p>
+        </p:txBody>
+      </p:sp>
+    </p:spTree>
+    <p:extLst>
+      <p:ext uri="{BB962C8B-B14F-4D97-AF65-F5344CB8AC3E}">
+        <p14:creationId xmlns:p14="http://schemas.microsoft.com/office/powerpoint/2010/main" val="1024086991"/>
+      </p:ext>
+    </p:extLst>
+  </p:cSld>
+  <p:clrMapOvr>
+    <a:masterClrMapping/>
+  </p:clrMapOvr>
+</p:notes>
+</file>
+
+<file path=ppt/notesSlides/notesSlide22.xml><?xml version="1.0" encoding="utf-8"?>
+<p:notes xmlns:a="http://schemas.openxmlformats.org/drawingml/2006/main" xmlns:r="http://schemas.openxmlformats.org/officeDocument/2006/relationships" xmlns:p="http://schemas.openxmlformats.org/presentationml/2006/main">
+  <p:cSld>
+    <p:spTree>
+      <p:nvGrpSpPr>
+        <p:cNvPr id="1" name=""/>
+        <p:cNvGrpSpPr/>
+        <p:nvPr/>
+      </p:nvGrpSpPr>
+      <p:grpSpPr>
+        <a:xfrm>
+          <a:off x="0" y="0"/>
+          <a:ext cx="0" cy="0"/>
+          <a:chOff x="0" y="0"/>
+          <a:chExt cx="0" cy="0"/>
+        </a:xfrm>
+      </p:grpSpPr>
+      <p:sp>
+        <p:nvSpPr>
+          <p:cNvPr id="2" name="Slide Image Placeholder 1"/>
+          <p:cNvSpPr>
+            <a:spLocks noGrp="1" noRot="1" noChangeAspect="1"/>
+          </p:cNvSpPr>
+          <p:nvPr>
+            <p:ph type="sldImg"/>
+          </p:nvPr>
+        </p:nvSpPr>
+        <p:spPr/>
+      </p:sp>
+      <p:sp>
+        <p:nvSpPr>
+          <p:cNvPr id="3" name="Notes Placeholder 2"/>
+          <p:cNvSpPr>
+            <a:spLocks noGrp="1"/>
+          </p:cNvSpPr>
+          <p:nvPr>
+            <p:ph type="body" idx="1"/>
+          </p:nvPr>
+        </p:nvSpPr>
+        <p:spPr/>
+        <p:txBody>
+          <a:bodyPr/>
+          <a:lstStyle/>
+          <a:p>
+            <a:r>
+              <a:rPr lang="en-US" dirty="0"/>
+              <a:t/>
+            </a:r>
+            <a:endParaRPr lang="en-US" dirty="0"/>
+          </a:p>
+        </p:txBody>
+      </p:sp>
+      <p:sp>
+        <p:nvSpPr>
+          <p:cNvPr id="4" name="Slide Number Placeholder 3"/>
+          <p:cNvSpPr>
+            <a:spLocks noGrp="1"/>
+          </p:cNvSpPr>
+          <p:nvPr>
+            <p:ph type="sldNum" sz="quarter" idx="10"/>
+          </p:nvPr>
+        </p:nvSpPr>
+        <p:spPr/>
+        <p:txBody>
+          <a:bodyPr/>
+          <a:lstStyle/>
+          <a:p>
+            <a:fld id="{F7021451-1387-4CA6-816F-3879F97B5CBC}" type="slidenum">
+              <a:rPr lang="en-US"/>
+              <a:t>22</a:t>
             </a:fld>
             <a:endParaRPr lang="en-US"/>
           </a:p>
@@ -1492,7 +1848,7 @@
           <a:p>
             <a:r>
               <a:rPr lang="en-US" dirty="0"/>
-              <a:t>Vamos começar com a imagem do negócio inteiro. De um lado, existe uma usina solar. Ela pode ser sua, pode ser de um parceiro, pode ser de um dono de terreno que construiu a usina como investimento. Essa usina injeta energia na rede da distribuidora, aquela empresa que entrega a energia na sua casa. Do outro lado estão os clientes: residências, comércios, pequenas empresas. A energia que a usina injeta vira créditos, e esses créditos são distribuídos entre os clientes. Na conta de luz do cliente, esses créditos abatem o consumo. O cliente passa a pagar bem menos para a distribuidora. E, em troca, paga uma mensalidade para a sua empresa — sempre menor do que a economia que ele teve. Esse é o coração da assinatura de energia: o cliente economiza, o dono da usina recebe pela energia gerada, e a sua empresa ganha por organizar tudo isso. Tudo isso é permitido e regulado por lei, a Lei 14.300 de 2022, que vamos estudar em detalhe no módulo 2.</a:t>
+              <a:t>Veja o negócio inteiro numa imagem. A usina injeta energia na rede da distribuidora, essa energia vira créditos, e os créditos abatem a conta dos clientes. O cliente paga menos à distribuidora e uma mensalidade menor à sua empresa. É permitido e regulado pela Lei 14.300.</a:t>
             </a:r>
             <a:endParaRPr lang="en-US" dirty="0"/>
           </a:p>
@@ -1580,7 +1936,7 @@
           <a:p>
             <a:r>
               <a:rPr lang="en-US" dirty="0"/>
-              <a:t>Por que tanta gente está entrando nesse mercado? Três motivos. Primeiro, a receita é recorrente: um cliente que assina hoje paga todo mês, por anos, enquanto o contrato estiver ativo. É muito diferente de vender um sistema solar, receber uma vez e precisar vender de novo. Segundo, o negócio escala: a mesma estrutura que atende cinquenta clientes atende quinhentos, desde que você tenha processos e um bom sistema. E terceiro, todo mundo ganha: o cliente economiza sem investir, o produtor tem renda com a usina e a sua empresa tem margem. Agora, atenção: um negócio bom não é um negócio fácil. Existem regras, existe o custo da rede que vem subindo ano a ano, existe inadimplência, existe a operação mensal de faturas e cobranças. Quem ignora isso quebra. Quem domina isso constrói uma empresa sólida. É isso que vamos fazer juntos.</a:t>
+              <a:t>Três motivos fazem desse um bom negócio: a receita é recorrente, a estrutura escala e todo mundo ganha. Mas negócio bom não é negócio fácil: existem regras, custos de rede, inadimplência e uma operação mensal. É isso que você vai dominar.</a:t>
             </a:r>
             <a:endParaRPr lang="en-US" dirty="0"/>
           </a:p>
@@ -1668,7 +2024,7 @@
           <a:p>
             <a:r>
               <a:rPr lang="en-US" dirty="0"/>
-              <a:t>Ao final do curso, você vai saber fazer sete coisas. Ler qualquer conta de luz com energia compensada e explicar cada linha para o seu cliente. Fazer a conta do quilowatt-hora: quanto o cliente economiza, quanto o dono da usina recebe e quanto fica para a sua empresa. Montar propostas comerciais, tanto para quem consome energia quanto para quem tem uma usina. Distribuir a energia de uma usina entre vários clientes sem prometer mais energia do que ela gera — um erro que já quebrou empresas. Fechar o mês: receber as faturas da distribuidora, conferir, gerar as cobranças e receber por Pix ou boleto. Medir o negócio com os indicadores certos. E, por fim, montar o plano da sua empresa em uma página, com números.</a:t>
+              <a:t>Na tela estão as sete coisas que você vai saber fazer ao final. Repare que todas são práticas: ler, calcular, propor, distribuir, cobrar, medir e planejar.</a:t>
             </a:r>
             <a:endParaRPr lang="en-US" dirty="0"/>
           </a:p>
@@ -1756,7 +2112,7 @@
           <a:p>
             <a:r>
               <a:rPr lang="en-US" dirty="0"/>
-              <a:t>E aqui está o grande diferencial deste curso: você não vai aprender só em slides. Você vai praticar numa plataforma profissional de gestão de geração distribuída, a mesma usada numa operação real de assinatura de energia. Cada aluno recebe um ambiente de laboratório, com dados fictícios, onde vai cadastrar usinas, clientes, propostas, receber faturas, gerar cobranças e emitir Pix. É como um simulador de voo para a sua empresa: você erra aqui, aprende aqui, e chega no mundo real sabendo exatamente o que fazer.</a:t>
+              <a:t>Você vai praticar numa plataforma real</a:t>
             </a:r>
             <a:endParaRPr lang="en-US" dirty="0"/>
           </a:p>
@@ -1932,9 +2288,9 @@
           <a:p>
             <a:r>
               <a:rPr lang="en-US" dirty="0"/>
-              <a:t>O curso tem treze módulos, divididos em quatro etapas, e cada etapa sobe um degrau. Na primeira, Fundamentos, você entende energia, quilowatt-hora, como funciona a geração solar, como a energia chega até o cliente e como é formada a conta de luz. Na segunda, Regulação e Negócio, você aprende as regras da geração distribuída e faz a conta que mostra se um modelo de assinatura dá lucro. A terceira etapa é a maior: Operação de ponta a ponta. Aqui você vai, na prática, conseguir usinas, vender para clientes, assinar contratos, distribuir a energia, receber as faturas, cobrar e manter a rotina da empresa funcionando. E na quarta etapa, Gestão e Estratégia, você aprende a medir o negócio, gerir riscos, escalar e montar o seu plano — e entrega o projeto final.
-Você vai encontrar dois tipos de aula. As aulas expositivas, como esta, explicam um conceito com exemplos e contas. Elas são curtas, de oito a quinze minutos, para você assistir com foco. E os laboratórios, que são gravações de tela na plataforma, mostrando passo a passo o que fazer. O laboratório tem também um roteiro escrito, para você repetir no seu ambiente no seu ritmo. A regra de ouro é: assistiu ao laboratório, faça o laboratório. Não deixe acumular. O conhecimento de operação só fixa quando você faz com as próprias mãos.
-Cada módulo termina com um quiz rápido, para você conferir se entendeu o essencial, e com um entregável: uma pequena peça do seu projeto, como a ficha da sua empresa, a conta do seu modelo de negócio ou a proposta para o seu primeiro cliente. Somando tudo, os entregáveis viram o projeto final: uma operação completa simulada, com usina, mais de vinte clientes, três meses de faturamento e um relatório executivo. Esse projeto é o seu certificado de que você sabe fazer — e pode virar, de verdade, o plano da sua empresa.</a:t>
+              <a:t>São quatro etapas, e cada uma sobe um degrau: primeiro os fundamentos de energia, depois as regras e a conta do negócio, então a operação de ponta a ponta e, por fim, a gestão da empresa.
+Há dois tipos de aula: as expositivas, que explicam o conceito, e os laboratórios, guiados por telas e passos na tela. A regra de ouro: viu o laboratório, faça o laboratório.
+Cada módulo tem um teste rápido e um entregável. Somados, eles viram o projeto final: a sua empresa operando.</a:t>
             </a:r>
             <a:endParaRPr lang="en-US" dirty="0"/>
           </a:p>
@@ -2022,7 +2378,7 @@
           <a:p>
             <a:r>
               <a:rPr lang="en-US" dirty="0"/>
-              <a:t>Algumas dicas práticas. Reserve de três a cinco horas por semana: é o suficiente para um módulo. Se você está numa turma com acompanhamento, siga o cronograma, porque os encontros ao vivo acompanham os módulos. Anote as dúvidas e leve para a comunidade ou para o ao vivo — é ali que você vai ouvir as perguntas de outros empreendedores, e muitas vezes elas são as suas também. E use tudo o que receber no seu negócio real desde já: a calculadora, os modelos de proposta, os checklists.</a:t>
+              <a:t>Reserve de três a cinco horas por semana e use desde já os materiais no seu negócio real.</a:t>
             </a:r>
             <a:endParaRPr lang="en-US" dirty="0"/>
           </a:p>
@@ -3693,7 +4049,7 @@
                 <a:ea typeface="Arial" pitchFamily="34" charset="-122"/>
                 <a:cs typeface="Arial" pitchFamily="34" charset="-120"/>
               </a:rPr>
-              <a:t>1. Abra o endereço do e-mail · 2. Entre com seu e-mail e senha</a:t>
+              <a:t>Abra o endereço recebido por e-mail, entre com seu e-mail e senha e troque a senha no primeiro acesso.</a:t>
             </a:r>
             <a:endParaRPr lang="en-US" sz="1500" dirty="0"/>
           </a:p>
@@ -3744,7 +4100,7 @@
                 <a:ea typeface="Arial" pitchFamily="34" charset="-122"/>
                 <a:cs typeface="Arial" pitchFamily="34" charset="-120"/>
               </a:rPr>
-              <a:t>Administrador = dono da empresa: vê tudo</a:t>
+              <a:t>Como Administrador (o dono), veja no dashboard clientes, faturas em revisão, cobranças e valores a receber. O sino mostra os alertas.</a:t>
             </a:r>
             <a:endParaRPr lang="en-US" sz="1500" dirty="0"/>
           </a:p>
@@ -3795,7 +4151,7 @@
                 <a:ea typeface="Arial" pitchFamily="34" charset="-122"/>
                 <a:cs typeface="Arial" pitchFamily="34" charset="-120"/>
               </a:rPr>
-              <a:t>Consultor = vendedor: vê só a própria carteira</a:t>
+              <a:t>Troque para Consultor: ele vê só a própria carteira de clientes, produtores e propostas.</a:t>
             </a:r>
             <a:endParaRPr lang="en-US" sz="1500" dirty="0"/>
           </a:p>
@@ -3846,7 +4202,7 @@
                 <a:ea typeface="Arial" pitchFamily="34" charset="-122"/>
                 <a:cs typeface="Arial" pitchFamily="34" charset="-120"/>
               </a:rPr>
-              <a:t>Cliente = assinante: vê faturas, cobranças e economia</a:t>
+              <a:t>Troque para Cliente: o portal mostra faturas, cobranças com Pix ou boleto e a economia acumulada.</a:t>
             </a:r>
             <a:endParaRPr lang="en-US" sz="1500" dirty="0"/>
           </a:p>
@@ -4325,7 +4681,7 @@
                 <a:ea typeface="Arial" pitchFamily="34" charset="-122"/>
                 <a:cs typeface="Arial" pitchFamily="34" charset="-120"/>
               </a:rPr>
-              <a:t>Produtor = dono da usina: vê suas usinas e a geração</a:t>
+              <a:t>Troque para Produtor: ele acompanha as próprias usinas e a geração de cada mês.</a:t>
             </a:r>
             <a:endParaRPr lang="en-US" sz="1500" dirty="0"/>
           </a:p>
@@ -5894,7 +6250,7 @@
         <p:spPr>
           <a:xfrm>
             <a:off x="822960" y="2286000"/>
-            <a:ext cx="2965704" cy="3749040"/>
+            <a:ext cx="2965704" cy="2286000"/>
           </a:xfrm>
           <a:prstGeom prst="rect">
             <a:avLst/>
@@ -5975,6 +6331,65 @@
       <p:sp>
         <p:nvSpPr>
           <p:cNvPr id="13" name="Shape 10"/>
+          <p:cNvSpPr/>
+          <p:nvPr/>
+        </p:nvSpPr>
+        <p:spPr>
+          <a:xfrm>
+            <a:off x="822960" y="4663440"/>
+            <a:ext cx="2965704" cy="18288"/>
+          </a:xfrm>
+          <a:prstGeom prst="rect">
+            <a:avLst/>
+          </a:prstGeom>
+          <a:solidFill>
+            <a:srgbClr val="D8E0EC"/>
+          </a:solidFill>
+          <a:ln/>
+        </p:spPr>
+      </p:sp>
+      <p:sp>
+        <p:nvSpPr>
+          <p:cNvPr id="14" name="Text 11"/>
+          <p:cNvSpPr/>
+          <p:nvPr/>
+        </p:nvSpPr>
+        <p:spPr>
+          <a:xfrm>
+            <a:off x="822960" y="4754880"/>
+            <a:ext cx="2965704" cy="1371600"/>
+          </a:xfrm>
+          <a:prstGeom prst="rect">
+            <a:avLst/>
+          </a:prstGeom>
+          <a:noFill/>
+          <a:ln/>
+        </p:spPr>
+        <p:txBody>
+          <a:bodyPr wrap="square" rtlCol="0" anchor="t"/>
+          <a:lstStyle/>
+          <a:p>
+            <a:pPr indent="0" marL="0">
+              <a:buNone/>
+            </a:pPr>
+            <a:r>
+              <a:rPr lang="en-US" sz="1300" i="1" dirty="0">
+                <a:solidFill>
+                  <a:srgbClr val="64748B"/>
+                </a:solidFill>
+                <a:latin typeface="Arial" pitchFamily="34" charset="0"/>
+                <a:ea typeface="Arial" pitchFamily="34" charset="-122"/>
+                <a:cs typeface="Arial" pitchFamily="34" charset="-120"/>
+              </a:rPr>
+              <a:t>O laboratório já começa com uma distribuidora, uma usina de referência e três clientes de exemplo, iguais para todos. Por cima deles, você cria a sua empresa.</a:t>
+            </a:r>
+            <a:endParaRPr lang="en-US" sz="1300" dirty="0"/>
+          </a:p>
+        </p:txBody>
+      </p:sp>
+      <p:sp>
+        <p:nvSpPr>
+          <p:cNvPr id="15" name="Shape 12"/>
           <p:cNvSpPr/>
           <p:nvPr/>
         </p:nvSpPr>
@@ -6008,7 +6423,7 @@
       </p:sp>
       <p:sp>
         <p:nvSpPr>
-          <p:cNvPr id="14" name="Shape 11"/>
+          <p:cNvPr id="16" name="Shape 13"/>
           <p:cNvSpPr/>
           <p:nvPr/>
         </p:nvSpPr>
@@ -6028,7 +6443,7 @@
       </p:sp>
       <p:sp>
         <p:nvSpPr>
-          <p:cNvPr id="15" name="Text 12"/>
+          <p:cNvPr id="17" name="Text 14"/>
           <p:cNvSpPr/>
           <p:nvPr/>
         </p:nvSpPr>
@@ -6069,14 +6484,14 @@
       </p:sp>
       <p:sp>
         <p:nvSpPr>
-          <p:cNvPr id="16" name="Text 13"/>
+          <p:cNvPr id="18" name="Text 15"/>
           <p:cNvSpPr/>
           <p:nvPr/>
         </p:nvSpPr>
         <p:spPr>
           <a:xfrm>
             <a:off x="4611624" y="2286000"/>
-            <a:ext cx="2965704" cy="3749040"/>
+            <a:ext cx="2965704" cy="2286000"/>
           </a:xfrm>
           <a:prstGeom prst="rect">
             <a:avLst/>
@@ -6098,7 +6513,7 @@
               <a:buChar char="●"/>
             </a:pPr>
             <a:r>
-              <a:rPr lang="en-US" sz="1700" dirty="0">
+              <a:rPr lang="en-US" sz="1400" dirty="0">
                 <a:solidFill>
                   <a:srgbClr val="1F2937"/>
                 </a:solidFill>
@@ -6108,7 +6523,7 @@
               </a:rPr>
               <a:t>- Nome da empresa (fictício)</a:t>
             </a:r>
-            <a:endParaRPr lang="en-US" sz="1700" dirty="0"/>
+            <a:endParaRPr lang="en-US" sz="1400" dirty="0"/>
           </a:p>
           <a:p>
             <a:pPr marL="342900" indent="-342900">
@@ -6119,7 +6534,7 @@
               <a:buChar char="●"/>
             </a:pPr>
             <a:r>
-              <a:rPr lang="en-US" sz="1700" dirty="0">
+              <a:rPr lang="en-US" sz="1400" dirty="0">
                 <a:solidFill>
                   <a:srgbClr val="1F2937"/>
                 </a:solidFill>
@@ -6129,7 +6544,7 @@
               </a:rPr>
               <a:t>- Cidade e estado de atuação</a:t>
             </a:r>
-            <a:endParaRPr lang="en-US" sz="1700" dirty="0"/>
+            <a:endParaRPr lang="en-US" sz="1400" dirty="0"/>
           </a:p>
           <a:p>
             <a:pPr marL="342900" indent="-342900">
@@ -6140,7 +6555,7 @@
               <a:buChar char="●"/>
             </a:pPr>
             <a:r>
-              <a:rPr lang="en-US" sz="1700" dirty="0">
+              <a:rPr lang="en-US" sz="1400" dirty="0">
                 <a:solidFill>
                   <a:srgbClr val="1F2937"/>
                 </a:solidFill>
@@ -6150,7 +6565,7 @@
               </a:rPr>
               <a:t>- Distribuidora da região</a:t>
             </a:r>
-            <a:endParaRPr lang="en-US" sz="1700" dirty="0"/>
+            <a:endParaRPr lang="en-US" sz="1400" dirty="0"/>
           </a:p>
           <a:p>
             <a:pPr marL="342900" indent="-342900">
@@ -6161,7 +6576,7 @@
               <a:buChar char="●"/>
             </a:pPr>
             <a:r>
-              <a:rPr lang="en-US" sz="1700" dirty="0">
+              <a:rPr lang="en-US" sz="1400" dirty="0">
                 <a:solidFill>
                   <a:srgbClr val="1F2937"/>
                 </a:solidFill>
@@ -6171,7 +6586,7 @@
               </a:rPr>
               <a:t>- Perfil: começando do zero / já tenho empresa solar</a:t>
             </a:r>
-            <a:endParaRPr lang="en-US" sz="1700" dirty="0"/>
+            <a:endParaRPr lang="en-US" sz="1400" dirty="0"/>
           </a:p>
           <a:p>
             <a:pPr marL="342900" indent="-342900">
@@ -6182,7 +6597,7 @@
               <a:buChar char="●"/>
             </a:pPr>
             <a:r>
-              <a:rPr lang="en-US" sz="1700" dirty="0">
+              <a:rPr lang="en-US" sz="1400" dirty="0">
                 <a:solidFill>
                   <a:srgbClr val="1F2937"/>
                 </a:solidFill>
@@ -6192,13 +6607,72 @@
               </a:rPr>
               <a:t>- Meta de 12 meses: usinas, clientes, kWh</a:t>
             </a:r>
-            <a:endParaRPr lang="en-US" sz="1700" dirty="0"/>
-          </a:p>
-        </p:txBody>
-      </p:sp>
-      <p:sp>
-        <p:nvSpPr>
-          <p:cNvPr id="17" name="Shape 14"/>
+            <a:endParaRPr lang="en-US" sz="1400" dirty="0"/>
+          </a:p>
+        </p:txBody>
+      </p:sp>
+      <p:sp>
+        <p:nvSpPr>
+          <p:cNvPr id="19" name="Shape 16"/>
+          <p:cNvSpPr/>
+          <p:nvPr/>
+        </p:nvSpPr>
+        <p:spPr>
+          <a:xfrm>
+            <a:off x="4611624" y="4663440"/>
+            <a:ext cx="2965704" cy="18288"/>
+          </a:xfrm>
+          <a:prstGeom prst="rect">
+            <a:avLst/>
+          </a:prstGeom>
+          <a:solidFill>
+            <a:srgbClr val="D8E0EC"/>
+          </a:solidFill>
+          <a:ln/>
+        </p:spPr>
+      </p:sp>
+      <p:sp>
+        <p:nvSpPr>
+          <p:cNvPr id="20" name="Text 17"/>
+          <p:cNvSpPr/>
+          <p:nvPr/>
+        </p:nvSpPr>
+        <p:spPr>
+          <a:xfrm>
+            <a:off x="4611624" y="4754880"/>
+            <a:ext cx="2965704" cy="1371600"/>
+          </a:xfrm>
+          <a:prstGeom prst="rect">
+            <a:avLst/>
+          </a:prstGeom>
+          <a:noFill/>
+          <a:ln/>
+        </p:spPr>
+        <p:txBody>
+          <a:bodyPr wrap="square" rtlCol="0" anchor="t"/>
+          <a:lstStyle/>
+          <a:p>
+            <a:pPr indent="0" marL="0">
+              <a:buNone/>
+            </a:pPr>
+            <a:r>
+              <a:rPr lang="en-US" sz="1300" i="1" dirty="0">
+                <a:solidFill>
+                  <a:srgbClr val="64748B"/>
+                </a:solidFill>
+                <a:latin typeface="Arial" pitchFamily="34" charset="0"/>
+                <a:ea typeface="Arial" pitchFamily="34" charset="-122"/>
+                <a:cs typeface="Arial" pitchFamily="34" charset="-120"/>
+              </a:rPr>
+              <a:t>Preencha a ficha da sua empresa. O campo mais importante é a distribuidora: usina e clientes precisam estar na área da mesma distribuidora.</a:t>
+            </a:r>
+            <a:endParaRPr lang="en-US" sz="1300" dirty="0"/>
+          </a:p>
+        </p:txBody>
+      </p:sp>
+      <p:sp>
+        <p:nvSpPr>
+          <p:cNvPr id="21" name="Shape 18"/>
           <p:cNvSpPr/>
           <p:nvPr/>
         </p:nvSpPr>
@@ -6232,7 +6706,7 @@
       </p:sp>
       <p:sp>
         <p:nvSpPr>
-          <p:cNvPr id="18" name="Shape 15"/>
+          <p:cNvPr id="22" name="Shape 19"/>
           <p:cNvSpPr/>
           <p:nvPr/>
         </p:nvSpPr>
@@ -6252,7 +6726,7 @@
       </p:sp>
       <p:sp>
         <p:nvSpPr>
-          <p:cNvPr id="19" name="Text 16"/>
+          <p:cNvPr id="23" name="Text 20"/>
           <p:cNvSpPr/>
           <p:nvPr/>
         </p:nvSpPr>
@@ -6293,14 +6767,14 @@
       </p:sp>
       <p:sp>
         <p:nvSpPr>
-          <p:cNvPr id="20" name="Text 17"/>
+          <p:cNvPr id="24" name="Text 21"/>
           <p:cNvSpPr/>
           <p:nvPr/>
         </p:nvSpPr>
         <p:spPr>
           <a:xfrm>
             <a:off x="8400288" y="2286000"/>
-            <a:ext cx="2965704" cy="3749040"/>
+            <a:ext cx="2965704" cy="2286000"/>
           </a:xfrm>
           <a:prstGeom prst="rect">
             <a:avLst/>
@@ -6322,7 +6796,7 @@
               <a:buChar char="●"/>
             </a:pPr>
             <a:r>
-              <a:rPr lang="en-US" sz="1700" dirty="0">
+              <a:rPr lang="en-US" sz="1200" dirty="0">
                 <a:solidFill>
                   <a:srgbClr val="1F2937"/>
                 </a:solidFill>
@@ -6332,7 +6806,7 @@
               </a:rPr>
               <a:t>- Solaris Assinaturas (fictícia)</a:t>
             </a:r>
-            <a:endParaRPr lang="en-US" sz="1700" dirty="0"/>
+            <a:endParaRPr lang="en-US" sz="1200" dirty="0"/>
           </a:p>
           <a:p>
             <a:pPr marL="342900" indent="-342900">
@@ -6343,7 +6817,7 @@
               <a:buChar char="●"/>
             </a:pPr>
             <a:r>
-              <a:rPr lang="en-US" sz="1700" dirty="0">
+              <a:rPr lang="en-US" sz="1200" dirty="0">
                 <a:solidFill>
                   <a:srgbClr val="1F2937"/>
                 </a:solidFill>
@@ -6353,7 +6827,7 @@
               </a:rPr>
               <a:t>- Maringá – PR</a:t>
             </a:r>
-            <a:endParaRPr lang="en-US" sz="1700" dirty="0"/>
+            <a:endParaRPr lang="en-US" sz="1200" dirty="0"/>
           </a:p>
           <a:p>
             <a:pPr marL="342900" indent="-342900">
@@ -6364,7 +6838,7 @@
               <a:buChar char="●"/>
             </a:pPr>
             <a:r>
-              <a:rPr lang="en-US" sz="1700" dirty="0">
+              <a:rPr lang="en-US" sz="1200" dirty="0">
                 <a:solidFill>
                   <a:srgbClr val="1F2937"/>
                 </a:solidFill>
@@ -6374,7 +6848,7 @@
               </a:rPr>
               <a:t>- Distribuidora da região: a do estado</a:t>
             </a:r>
-            <a:endParaRPr lang="en-US" sz="1700" dirty="0"/>
+            <a:endParaRPr lang="en-US" sz="1200" dirty="0"/>
           </a:p>
           <a:p>
             <a:pPr marL="342900" indent="-342900">
@@ -6385,7 +6859,7 @@
               <a:buChar char="●"/>
             </a:pPr>
             <a:r>
-              <a:rPr lang="en-US" sz="1700" dirty="0">
+              <a:rPr lang="en-US" sz="1200" dirty="0">
                 <a:solidFill>
                   <a:srgbClr val="1F2937"/>
                 </a:solidFill>
@@ -6395,7 +6869,7 @@
               </a:rPr>
               <a:t>- Empresa solar (integradora com 6 anos)</a:t>
             </a:r>
-            <a:endParaRPr lang="en-US" sz="1700" dirty="0"/>
+            <a:endParaRPr lang="en-US" sz="1200" dirty="0"/>
           </a:p>
           <a:p>
             <a:pPr marL="342900" indent="-342900">
@@ -6406,7 +6880,7 @@
               <a:buChar char="●"/>
             </a:pPr>
             <a:r>
-              <a:rPr lang="en-US" sz="1700" dirty="0">
+              <a:rPr lang="en-US" sz="1200" dirty="0">
                 <a:solidFill>
                   <a:srgbClr val="1F2937"/>
                 </a:solidFill>
@@ -6416,7 +6890,66 @@
               </a:rPr>
               <a:t>- 12 meses: 1 usina de 1 MW, 300 clientes</a:t>
             </a:r>
-            <a:endParaRPr lang="en-US" sz="1700" dirty="0"/>
+            <a:endParaRPr lang="en-US" sz="1200" dirty="0"/>
+          </a:p>
+        </p:txBody>
+      </p:sp>
+      <p:sp>
+        <p:nvSpPr>
+          <p:cNvPr id="25" name="Shape 22"/>
+          <p:cNvSpPr/>
+          <p:nvPr/>
+        </p:nvSpPr>
+        <p:spPr>
+          <a:xfrm>
+            <a:off x="8400288" y="4663440"/>
+            <a:ext cx="2965704" cy="18288"/>
+          </a:xfrm>
+          <a:prstGeom prst="rect">
+            <a:avLst/>
+          </a:prstGeom>
+          <a:solidFill>
+            <a:srgbClr val="D8E0EC"/>
+          </a:solidFill>
+          <a:ln/>
+        </p:spPr>
+      </p:sp>
+      <p:sp>
+        <p:nvSpPr>
+          <p:cNvPr id="26" name="Text 23"/>
+          <p:cNvSpPr/>
+          <p:nvPr/>
+        </p:nvSpPr>
+        <p:spPr>
+          <a:xfrm>
+            <a:off x="8400288" y="4754880"/>
+            <a:ext cx="2965704" cy="1371600"/>
+          </a:xfrm>
+          <a:prstGeom prst="rect">
+            <a:avLst/>
+          </a:prstGeom>
+          <a:noFill/>
+          <a:ln/>
+        </p:spPr>
+        <p:txBody>
+          <a:bodyPr wrap="square" rtlCol="0" anchor="t"/>
+          <a:lstStyle/>
+          <a:p>
+            <a:pPr indent="0" marL="0">
+              <a:buNone/>
+            </a:pPr>
+            <a:r>
+              <a:rPr lang="en-US" sz="1300" i="1" dirty="0">
+                <a:solidFill>
+                  <a:srgbClr val="64748B"/>
+                </a:solidFill>
+                <a:latin typeface="Arial" pitchFamily="34" charset="0"/>
+                <a:ea typeface="Arial" pitchFamily="34" charset="-122"/>
+                <a:cs typeface="Arial" pitchFamily="34" charset="-120"/>
+              </a:rPr>
+              <a:t>Veja o exemplo da Solaris. A meta parece boa, mas será coerente? Ao longo do curso, você terá as ferramentas para responder com números.</a:t>
+            </a:r>
+            <a:endParaRPr lang="en-US" sz="1300" dirty="0"/>
           </a:p>
         </p:txBody>
       </p:sp>
@@ -6736,11 +7269,11 @@
         <p:spPr>
           <a:xfrm>
             <a:off x="548640" y="1325880"/>
-            <a:ext cx="11091672" cy="4892040"/>
+            <a:ext cx="11091672" cy="3977640"/>
           </a:xfrm>
           <a:prstGeom prst="roundRect">
             <a:avLst>
-              <a:gd name="adj" fmla="val 1495"/>
+              <a:gd name="adj" fmla="val 1839"/>
             </a:avLst>
           </a:prstGeom>
           <a:solidFill>
@@ -6829,7 +7362,7 @@
         <p:spPr>
           <a:xfrm>
             <a:off x="1325880" y="1435608"/>
-            <a:ext cx="10177272" cy="4672584"/>
+            <a:ext cx="10177272" cy="3758184"/>
           </a:xfrm>
           <a:prstGeom prst="rect">
             <a:avLst/>
@@ -6858,6 +7391,92 @@
               <a:t>Cada módulo = uma peça da sua empresa</a:t>
             </a:r>
             <a:endParaRPr lang="en-US" sz="1800" dirty="0"/>
+          </a:p>
+        </p:txBody>
+      </p:sp>
+      <p:sp>
+        <p:nvSpPr>
+          <p:cNvPr id="13" name="Shape 10"/>
+          <p:cNvSpPr/>
+          <p:nvPr/>
+        </p:nvSpPr>
+        <p:spPr>
+          <a:xfrm>
+            <a:off x="548640" y="5413248"/>
+            <a:ext cx="11091672" cy="868680"/>
+          </a:xfrm>
+          <a:prstGeom prst="roundRect">
+            <a:avLst>
+              <a:gd name="adj" fmla="val 8421"/>
+            </a:avLst>
+          </a:prstGeom>
+          <a:solidFill>
+            <a:srgbClr val="EEF3FA"/>
+          </a:solidFill>
+          <a:ln w="6350">
+            <a:solidFill>
+              <a:srgbClr val="D8E0EC"/>
+            </a:solidFill>
+            <a:prstDash val="solid"/>
+          </a:ln>
+        </p:spPr>
+      </p:sp>
+      <p:sp>
+        <p:nvSpPr>
+          <p:cNvPr id="14" name="Shape 11"/>
+          <p:cNvSpPr/>
+          <p:nvPr/>
+        </p:nvSpPr>
+        <p:spPr>
+          <a:xfrm>
+            <a:off x="548640" y="5413248"/>
+            <a:ext cx="91440" cy="868680"/>
+          </a:xfrm>
+          <a:prstGeom prst="rect">
+            <a:avLst/>
+          </a:prstGeom>
+          <a:solidFill>
+            <a:srgbClr val="F7A23B"/>
+          </a:solidFill>
+          <a:ln/>
+        </p:spPr>
+      </p:sp>
+      <p:sp>
+        <p:nvSpPr>
+          <p:cNvPr id="15" name="Text 12"/>
+          <p:cNvSpPr/>
+          <p:nvPr/>
+        </p:nvSpPr>
+        <p:spPr>
+          <a:xfrm>
+            <a:off x="777240" y="5458968"/>
+            <a:ext cx="10744200" cy="777240"/>
+          </a:xfrm>
+          <a:prstGeom prst="rect">
+            <a:avLst/>
+          </a:prstGeom>
+          <a:noFill/>
+          <a:ln/>
+        </p:spPr>
+        <p:txBody>
+          <a:bodyPr wrap="square" rtlCol="0" anchor="ctr"/>
+          <a:lstStyle/>
+          <a:p>
+            <a:pPr indent="0" marL="0">
+              <a:buNone/>
+            </a:pPr>
+            <a:r>
+              <a:rPr lang="en-US" sz="1500" dirty="0">
+                <a:solidFill>
+                  <a:srgbClr val="1F2937"/>
+                </a:solidFill>
+                <a:latin typeface="Arial" pitchFamily="34" charset="0"/>
+                <a:ea typeface="Arial" pitchFamily="34" charset="-122"/>
+                <a:cs typeface="Arial" pitchFamily="34" charset="-120"/>
+              </a:rPr>
+              <a:t>Cada módulo acrescenta uma peça: a conta, a usina, os clientes, os contratos, as faturas, as cobranças, a rotina, os indicadores e o plano.</a:t>
+            </a:r>
+            <a:endParaRPr lang="en-US" sz="1500" dirty="0"/>
           </a:p>
         </p:txBody>
       </p:sp>
@@ -7062,7 +7681,7 @@
                 <a:ea typeface="Arial" pitchFamily="34" charset="-122"/>
                 <a:cs typeface="Arial" pitchFamily="34" charset="-120"/>
               </a:rPr>
-              <a:t>M0 · Fechamento</a:t>
+              <a:t>M0 · Teste rápido</a:t>
             </a:r>
             <a:endParaRPr lang="en-US" sz="900" dirty="0"/>
           </a:p>
@@ -7121,7 +7740,7 @@
                 <a:ea typeface="Arial" pitchFamily="34" charset="-122"/>
                 <a:cs typeface="Arial" pitchFamily="34" charset="-120"/>
               </a:rPr>
-              <a:t>FECHAMENTO DO MÓDULO</a:t>
+              <a:t>QUESTÕES 1–2 DE 5</a:t>
             </a:r>
             <a:endParaRPr lang="en-US" sz="1000" dirty="0"/>
           </a:p>
@@ -7162,7 +7781,7 @@
                 <a:ea typeface="Arial" pitchFamily="34" charset="-122"/>
                 <a:cs typeface="Arial" pitchFamily="34" charset="-120"/>
               </a:rPr>
-              <a:t>Pratique e entregue</a:t>
+              <a:t>Teste rápido</a:t>
             </a:r>
             <a:endParaRPr lang="en-US" sz="2600" dirty="0"/>
           </a:p>
@@ -7177,12 +7796,10 @@
         <p:spPr>
           <a:xfrm>
             <a:off x="548640" y="1325880"/>
-            <a:ext cx="11091672" cy="4937760"/>
-          </a:xfrm>
-          <a:prstGeom prst="roundRect">
-            <a:avLst>
-              <a:gd name="adj" fmla="val 1852"/>
-            </a:avLst>
+            <a:ext cx="502920" cy="502920"/>
+          </a:xfrm>
+          <a:prstGeom prst="ellipse">
+            <a:avLst/>
           </a:prstGeom>
           <a:solidFill>
             <a:srgbClr val="1B3A6B"/>
@@ -7198,26 +7815,129 @@
         </p:nvSpPr>
         <p:spPr>
           <a:xfrm>
-            <a:off x="868680" y="1554480"/>
-            <a:ext cx="10451592" cy="4480560"/>
-          </a:xfrm>
-          <a:prstGeom prst="rect">
-            <a:avLst/>
-          </a:prstGeom>
-          <a:noFill/>
-          <a:ln/>
-        </p:spPr>
-        <p:txBody>
-          <a:bodyPr wrap="square" rtlCol="0" anchor="t">
-            <a:normAutofit/>
-          </a:bodyPr>
-          <a:lstStyle/>
-          <a:p>
-            <a:pPr indent="0" marL="0">
-              <a:buNone/>
-            </a:pPr>
-            <a:r>
-              <a:rPr lang="en-US" sz="1300" b="1" spc="100" kern="0" dirty="0">
+            <a:off x="548640" y="1325880"/>
+            <a:ext cx="502920" cy="502920"/>
+          </a:xfrm>
+          <a:prstGeom prst="rect">
+            <a:avLst/>
+          </a:prstGeom>
+          <a:noFill/>
+          <a:ln/>
+        </p:spPr>
+        <p:txBody>
+          <a:bodyPr wrap="square" rtlCol="0" anchor="ctr"/>
+          <a:lstStyle/>
+          <a:p>
+            <a:pPr algn="ctr" indent="0" marL="0">
+              <a:buNone/>
+            </a:pPr>
+            <a:r>
+              <a:rPr lang="en-US" sz="1600" b="1" dirty="0">
+                <a:solidFill>
+                  <a:srgbClr val="FFFFFF"/>
+                </a:solidFill>
+                <a:latin typeface="Arial" pitchFamily="34" charset="0"/>
+                <a:ea typeface="Arial" pitchFamily="34" charset="-122"/>
+                <a:cs typeface="Arial" pitchFamily="34" charset="-120"/>
+              </a:rPr>
+              <a:t>1</a:t>
+            </a:r>
+            <a:endParaRPr lang="en-US" sz="1600" dirty="0"/>
+          </a:p>
+        </p:txBody>
+      </p:sp>
+      <p:sp>
+        <p:nvSpPr>
+          <p:cNvPr id="11" name="Text 8"/>
+          <p:cNvSpPr/>
+          <p:nvPr/>
+        </p:nvSpPr>
+        <p:spPr>
+          <a:xfrm>
+            <a:off x="1234440" y="1280160"/>
+            <a:ext cx="10424160" cy="640080"/>
+          </a:xfrm>
+          <a:prstGeom prst="rect">
+            <a:avLst/>
+          </a:prstGeom>
+          <a:noFill/>
+          <a:ln/>
+        </p:spPr>
+        <p:txBody>
+          <a:bodyPr wrap="square" rtlCol="0" anchor="ctr"/>
+          <a:lstStyle/>
+          <a:p>
+            <a:pPr indent="0" marL="0">
+              <a:buNone/>
+            </a:pPr>
+            <a:r>
+              <a:rPr lang="en-US" sz="1800" b="1" dirty="0">
+                <a:solidFill>
+                  <a:srgbClr val="1B3A6B"/>
+                </a:solidFill>
+                <a:latin typeface="Arial" pitchFamily="34" charset="0"/>
+                <a:ea typeface="Arial" pitchFamily="34" charset="-122"/>
+                <a:cs typeface="Arial" pitchFamily="34" charset="-120"/>
+              </a:rPr>
+              <a:t>Qual é a principal fonte de receita de uma empresa de assinatura de energia?</a:t>
+            </a:r>
+            <a:endParaRPr lang="en-US" sz="1800" dirty="0"/>
+          </a:p>
+        </p:txBody>
+      </p:sp>
+      <p:sp>
+        <p:nvSpPr>
+          <p:cNvPr id="12" name="Shape 9"/>
+          <p:cNvSpPr/>
+          <p:nvPr/>
+        </p:nvSpPr>
+        <p:spPr>
+          <a:xfrm>
+            <a:off x="548640" y="2057400"/>
+            <a:ext cx="2601468" cy="1463040"/>
+          </a:xfrm>
+          <a:prstGeom prst="roundRect">
+            <a:avLst>
+              <a:gd name="adj" fmla="val 5000"/>
+            </a:avLst>
+          </a:prstGeom>
+          <a:solidFill>
+            <a:srgbClr val="FFFFFF"/>
+          </a:solidFill>
+          <a:ln w="9525">
+            <a:solidFill>
+              <a:srgbClr val="D8E0EC"/>
+            </a:solidFill>
+            <a:prstDash val="solid"/>
+          </a:ln>
+        </p:spPr>
+      </p:sp>
+      <p:sp>
+        <p:nvSpPr>
+          <p:cNvPr id="13" name="Text 10"/>
+          <p:cNvSpPr/>
+          <p:nvPr/>
+        </p:nvSpPr>
+        <p:spPr>
+          <a:xfrm>
+            <a:off x="685800" y="2148840"/>
+            <a:ext cx="365760" cy="365760"/>
+          </a:xfrm>
+          <a:prstGeom prst="rect">
+            <a:avLst/>
+          </a:prstGeom>
+          <a:noFill/>
+          <a:ln/>
+        </p:spPr>
+        <p:txBody>
+          <a:bodyPr wrap="square" rtlCol="0" anchor="ctr"/>
+          <a:lstStyle/>
+          <a:p>
+            <a:pPr indent="0" marL="0">
+              <a:buNone/>
+            </a:pPr>
+            <a:r>
+              <a:rPr lang="en-US" sz="1400" b="1" dirty="0">
                 <a:solidFill>
                   <a:srgbClr val="F7A23B"/>
                 </a:solidFill>
@@ -7225,14 +7945,412 @@
                 <a:ea typeface="Arial" pitchFamily="34" charset="-122"/>
                 <a:cs typeface="Arial" pitchFamily="34" charset="-120"/>
               </a:rPr>
-              <a:t>ENTREGÁVEL DO MÓDULO
-</a:t>
-            </a:r>
-            <a:pPr indent="0" marL="0">
-              <a:buNone/>
-            </a:pPr>
-            <a:r>
-              <a:rPr lang="en-US" sz="1600" dirty="0">
+              <a:t>A</a:t>
+            </a:r>
+            <a:endParaRPr lang="en-US" sz="1400" dirty="0"/>
+          </a:p>
+        </p:txBody>
+      </p:sp>
+      <p:sp>
+        <p:nvSpPr>
+          <p:cNvPr id="14" name="Text 11"/>
+          <p:cNvSpPr/>
+          <p:nvPr/>
+        </p:nvSpPr>
+        <p:spPr>
+          <a:xfrm>
+            <a:off x="685800" y="2514600"/>
+            <a:ext cx="2327148" cy="914400"/>
+          </a:xfrm>
+          <a:prstGeom prst="rect">
+            <a:avLst/>
+          </a:prstGeom>
+          <a:noFill/>
+          <a:ln/>
+        </p:spPr>
+        <p:txBody>
+          <a:bodyPr wrap="square" rtlCol="0" anchor="t"/>
+          <a:lstStyle/>
+          <a:p>
+            <a:pPr indent="0" marL="0">
+              <a:buNone/>
+            </a:pPr>
+            <a:r>
+              <a:rPr lang="en-US" sz="1500" dirty="0">
+                <a:solidFill>
+                  <a:srgbClr val="1F2937"/>
+                </a:solidFill>
+                <a:latin typeface="Arial" pitchFamily="34" charset="0"/>
+                <a:ea typeface="Arial" pitchFamily="34" charset="-122"/>
+                <a:cs typeface="Arial" pitchFamily="34" charset="-120"/>
+              </a:rPr>
+              <a:t>Receita mensal recorrente sobre a energia compensada dos clientes</a:t>
+            </a:r>
+            <a:endParaRPr lang="en-US" sz="1500" dirty="0"/>
+          </a:p>
+        </p:txBody>
+      </p:sp>
+      <p:sp>
+        <p:nvSpPr>
+          <p:cNvPr id="15" name="Shape 12"/>
+          <p:cNvSpPr/>
+          <p:nvPr/>
+        </p:nvSpPr>
+        <p:spPr>
+          <a:xfrm>
+            <a:off x="3378708" y="2057400"/>
+            <a:ext cx="2601468" cy="1463040"/>
+          </a:xfrm>
+          <a:prstGeom prst="roundRect">
+            <a:avLst>
+              <a:gd name="adj" fmla="val 5000"/>
+            </a:avLst>
+          </a:prstGeom>
+          <a:solidFill>
+            <a:srgbClr val="FFFFFF"/>
+          </a:solidFill>
+          <a:ln w="9525">
+            <a:solidFill>
+              <a:srgbClr val="D8E0EC"/>
+            </a:solidFill>
+            <a:prstDash val="solid"/>
+          </a:ln>
+        </p:spPr>
+      </p:sp>
+      <p:sp>
+        <p:nvSpPr>
+          <p:cNvPr id="16" name="Text 13"/>
+          <p:cNvSpPr/>
+          <p:nvPr/>
+        </p:nvSpPr>
+        <p:spPr>
+          <a:xfrm>
+            <a:off x="3515868" y="2148840"/>
+            <a:ext cx="365760" cy="365760"/>
+          </a:xfrm>
+          <a:prstGeom prst="rect">
+            <a:avLst/>
+          </a:prstGeom>
+          <a:noFill/>
+          <a:ln/>
+        </p:spPr>
+        <p:txBody>
+          <a:bodyPr wrap="square" rtlCol="0" anchor="ctr"/>
+          <a:lstStyle/>
+          <a:p>
+            <a:pPr indent="0" marL="0">
+              <a:buNone/>
+            </a:pPr>
+            <a:r>
+              <a:rPr lang="en-US" sz="1400" b="1" dirty="0">
+                <a:solidFill>
+                  <a:srgbClr val="F7A23B"/>
+                </a:solidFill>
+                <a:latin typeface="Arial" pitchFamily="34" charset="0"/>
+                <a:ea typeface="Arial" pitchFamily="34" charset="-122"/>
+                <a:cs typeface="Arial" pitchFamily="34" charset="-120"/>
+              </a:rPr>
+              <a:t>B</a:t>
+            </a:r>
+            <a:endParaRPr lang="en-US" sz="1400" dirty="0"/>
+          </a:p>
+        </p:txBody>
+      </p:sp>
+      <p:sp>
+        <p:nvSpPr>
+          <p:cNvPr id="17" name="Text 14"/>
+          <p:cNvSpPr/>
+          <p:nvPr/>
+        </p:nvSpPr>
+        <p:spPr>
+          <a:xfrm>
+            <a:off x="3515868" y="2514600"/>
+            <a:ext cx="2327148" cy="914400"/>
+          </a:xfrm>
+          <a:prstGeom prst="rect">
+            <a:avLst/>
+          </a:prstGeom>
+          <a:noFill/>
+          <a:ln/>
+        </p:spPr>
+        <p:txBody>
+          <a:bodyPr wrap="square" rtlCol="0" anchor="t"/>
+          <a:lstStyle/>
+          <a:p>
+            <a:pPr indent="0" marL="0">
+              <a:buNone/>
+            </a:pPr>
+            <a:r>
+              <a:rPr lang="en-US" sz="1500" dirty="0">
+                <a:solidFill>
+                  <a:srgbClr val="1F2937"/>
+                </a:solidFill>
+                <a:latin typeface="Arial" pitchFamily="34" charset="0"/>
+                <a:ea typeface="Arial" pitchFamily="34" charset="-122"/>
+                <a:cs typeface="Arial" pitchFamily="34" charset="-120"/>
+              </a:rPr>
+              <a:t>venda de painéis</a:t>
+            </a:r>
+            <a:endParaRPr lang="en-US" sz="1500" dirty="0"/>
+          </a:p>
+        </p:txBody>
+      </p:sp>
+      <p:sp>
+        <p:nvSpPr>
+          <p:cNvPr id="18" name="Shape 15"/>
+          <p:cNvSpPr/>
+          <p:nvPr/>
+        </p:nvSpPr>
+        <p:spPr>
+          <a:xfrm>
+            <a:off x="6208776" y="2057400"/>
+            <a:ext cx="2601468" cy="1463040"/>
+          </a:xfrm>
+          <a:prstGeom prst="roundRect">
+            <a:avLst>
+              <a:gd name="adj" fmla="val 5000"/>
+            </a:avLst>
+          </a:prstGeom>
+          <a:solidFill>
+            <a:srgbClr val="FFFFFF"/>
+          </a:solidFill>
+          <a:ln w="9525">
+            <a:solidFill>
+              <a:srgbClr val="D8E0EC"/>
+            </a:solidFill>
+            <a:prstDash val="solid"/>
+          </a:ln>
+        </p:spPr>
+      </p:sp>
+      <p:sp>
+        <p:nvSpPr>
+          <p:cNvPr id="19" name="Text 16"/>
+          <p:cNvSpPr/>
+          <p:nvPr/>
+        </p:nvSpPr>
+        <p:spPr>
+          <a:xfrm>
+            <a:off x="6345936" y="2148840"/>
+            <a:ext cx="365760" cy="365760"/>
+          </a:xfrm>
+          <a:prstGeom prst="rect">
+            <a:avLst/>
+          </a:prstGeom>
+          <a:noFill/>
+          <a:ln/>
+        </p:spPr>
+        <p:txBody>
+          <a:bodyPr wrap="square" rtlCol="0" anchor="ctr"/>
+          <a:lstStyle/>
+          <a:p>
+            <a:pPr indent="0" marL="0">
+              <a:buNone/>
+            </a:pPr>
+            <a:r>
+              <a:rPr lang="en-US" sz="1400" b="1" dirty="0">
+                <a:solidFill>
+                  <a:srgbClr val="F7A23B"/>
+                </a:solidFill>
+                <a:latin typeface="Arial" pitchFamily="34" charset="0"/>
+                <a:ea typeface="Arial" pitchFamily="34" charset="-122"/>
+                <a:cs typeface="Arial" pitchFamily="34" charset="-120"/>
+              </a:rPr>
+              <a:t>C</a:t>
+            </a:r>
+            <a:endParaRPr lang="en-US" sz="1400" dirty="0"/>
+          </a:p>
+        </p:txBody>
+      </p:sp>
+      <p:sp>
+        <p:nvSpPr>
+          <p:cNvPr id="20" name="Text 17"/>
+          <p:cNvSpPr/>
+          <p:nvPr/>
+        </p:nvSpPr>
+        <p:spPr>
+          <a:xfrm>
+            <a:off x="6345936" y="2514600"/>
+            <a:ext cx="2327148" cy="914400"/>
+          </a:xfrm>
+          <a:prstGeom prst="rect">
+            <a:avLst/>
+          </a:prstGeom>
+          <a:noFill/>
+          <a:ln/>
+        </p:spPr>
+        <p:txBody>
+          <a:bodyPr wrap="square" rtlCol="0" anchor="t"/>
+          <a:lstStyle/>
+          <a:p>
+            <a:pPr indent="0" marL="0">
+              <a:buNone/>
+            </a:pPr>
+            <a:r>
+              <a:rPr lang="en-US" sz="1500" dirty="0">
+                <a:solidFill>
+                  <a:srgbClr val="1F2937"/>
+                </a:solidFill>
+                <a:latin typeface="Arial" pitchFamily="34" charset="0"/>
+                <a:ea typeface="Arial" pitchFamily="34" charset="-122"/>
+                <a:cs typeface="Arial" pitchFamily="34" charset="-120"/>
+              </a:rPr>
+              <a:t>taxa de instalação</a:t>
+            </a:r>
+            <a:endParaRPr lang="en-US" sz="1500" dirty="0"/>
+          </a:p>
+        </p:txBody>
+      </p:sp>
+      <p:sp>
+        <p:nvSpPr>
+          <p:cNvPr id="21" name="Shape 18"/>
+          <p:cNvSpPr/>
+          <p:nvPr/>
+        </p:nvSpPr>
+        <p:spPr>
+          <a:xfrm>
+            <a:off x="9038844" y="2057400"/>
+            <a:ext cx="2601468" cy="1463040"/>
+          </a:xfrm>
+          <a:prstGeom prst="roundRect">
+            <a:avLst>
+              <a:gd name="adj" fmla="val 5000"/>
+            </a:avLst>
+          </a:prstGeom>
+          <a:solidFill>
+            <a:srgbClr val="FFFFFF"/>
+          </a:solidFill>
+          <a:ln w="9525">
+            <a:solidFill>
+              <a:srgbClr val="D8E0EC"/>
+            </a:solidFill>
+            <a:prstDash val="solid"/>
+          </a:ln>
+        </p:spPr>
+      </p:sp>
+      <p:sp>
+        <p:nvSpPr>
+          <p:cNvPr id="22" name="Text 19"/>
+          <p:cNvSpPr/>
+          <p:nvPr/>
+        </p:nvSpPr>
+        <p:spPr>
+          <a:xfrm>
+            <a:off x="9176004" y="2148840"/>
+            <a:ext cx="365760" cy="365760"/>
+          </a:xfrm>
+          <a:prstGeom prst="rect">
+            <a:avLst/>
+          </a:prstGeom>
+          <a:noFill/>
+          <a:ln/>
+        </p:spPr>
+        <p:txBody>
+          <a:bodyPr wrap="square" rtlCol="0" anchor="ctr"/>
+          <a:lstStyle/>
+          <a:p>
+            <a:pPr indent="0" marL="0">
+              <a:buNone/>
+            </a:pPr>
+            <a:r>
+              <a:rPr lang="en-US" sz="1400" b="1" dirty="0">
+                <a:solidFill>
+                  <a:srgbClr val="F7A23B"/>
+                </a:solidFill>
+                <a:latin typeface="Arial" pitchFamily="34" charset="0"/>
+                <a:ea typeface="Arial" pitchFamily="34" charset="-122"/>
+                <a:cs typeface="Arial" pitchFamily="34" charset="-120"/>
+              </a:rPr>
+              <a:t>D</a:t>
+            </a:r>
+            <a:endParaRPr lang="en-US" sz="1400" dirty="0"/>
+          </a:p>
+        </p:txBody>
+      </p:sp>
+      <p:sp>
+        <p:nvSpPr>
+          <p:cNvPr id="23" name="Text 20"/>
+          <p:cNvSpPr/>
+          <p:nvPr/>
+        </p:nvSpPr>
+        <p:spPr>
+          <a:xfrm>
+            <a:off x="9176004" y="2514600"/>
+            <a:ext cx="2327148" cy="914400"/>
+          </a:xfrm>
+          <a:prstGeom prst="rect">
+            <a:avLst/>
+          </a:prstGeom>
+          <a:noFill/>
+          <a:ln/>
+        </p:spPr>
+        <p:txBody>
+          <a:bodyPr wrap="square" rtlCol="0" anchor="t"/>
+          <a:lstStyle/>
+          <a:p>
+            <a:pPr indent="0" marL="0">
+              <a:buNone/>
+            </a:pPr>
+            <a:r>
+              <a:rPr lang="en-US" sz="1500" dirty="0">
+                <a:solidFill>
+                  <a:srgbClr val="1F2937"/>
+                </a:solidFill>
+                <a:latin typeface="Arial" pitchFamily="34" charset="0"/>
+                <a:ea typeface="Arial" pitchFamily="34" charset="-122"/>
+                <a:cs typeface="Arial" pitchFamily="34" charset="-120"/>
+              </a:rPr>
+              <a:t>venda de créditos no mercado livre</a:t>
+            </a:r>
+            <a:endParaRPr lang="en-US" sz="1500" dirty="0"/>
+          </a:p>
+        </p:txBody>
+      </p:sp>
+      <p:sp>
+        <p:nvSpPr>
+          <p:cNvPr id="24" name="Shape 21"/>
+          <p:cNvSpPr/>
+          <p:nvPr/>
+        </p:nvSpPr>
+        <p:spPr>
+          <a:xfrm>
+            <a:off x="548640" y="3840480"/>
+            <a:ext cx="502920" cy="502920"/>
+          </a:xfrm>
+          <a:prstGeom prst="ellipse">
+            <a:avLst/>
+          </a:prstGeom>
+          <a:solidFill>
+            <a:srgbClr val="1B3A6B"/>
+          </a:solidFill>
+          <a:ln/>
+        </p:spPr>
+      </p:sp>
+      <p:sp>
+        <p:nvSpPr>
+          <p:cNvPr id="25" name="Text 22"/>
+          <p:cNvSpPr/>
+          <p:nvPr/>
+        </p:nvSpPr>
+        <p:spPr>
+          <a:xfrm>
+            <a:off x="548640" y="3840480"/>
+            <a:ext cx="502920" cy="502920"/>
+          </a:xfrm>
+          <a:prstGeom prst="rect">
+            <a:avLst/>
+          </a:prstGeom>
+          <a:noFill/>
+          <a:ln/>
+        </p:spPr>
+        <p:txBody>
+          <a:bodyPr wrap="square" rtlCol="0" anchor="ctr"/>
+          <a:lstStyle/>
+          <a:p>
+            <a:pPr algn="ctr" indent="0" marL="0">
+              <a:buNone/>
+            </a:pPr>
+            <a:r>
+              <a:rPr lang="en-US" sz="1600" b="1" dirty="0">
                 <a:solidFill>
                   <a:srgbClr val="FFFFFF"/>
                 </a:solidFill>
@@ -7240,9 +8358,468 @@
                 <a:ea typeface="Arial" pitchFamily="34" charset="-122"/>
                 <a:cs typeface="Arial" pitchFamily="34" charset="-120"/>
               </a:rPr>
-              <a:t>Ficha da minha empresa (modelo em 06-materiais-de-apoio.md): nome fictício da empresa, cidade/estado de atuação, distribuidora da região, perfil (começando do zero ou empresa solar), meta para 12 meses (ex.: 1 usina, 150 clientes). Postar na comunidade.</a:t>
-            </a:r>
-            <a:endParaRPr lang="en-US" sz="1300" dirty="0"/>
+              <a:t>2</a:t>
+            </a:r>
+            <a:endParaRPr lang="en-US" sz="1600" dirty="0"/>
+          </a:p>
+        </p:txBody>
+      </p:sp>
+      <p:sp>
+        <p:nvSpPr>
+          <p:cNvPr id="26" name="Text 23"/>
+          <p:cNvSpPr/>
+          <p:nvPr/>
+        </p:nvSpPr>
+        <p:spPr>
+          <a:xfrm>
+            <a:off x="1234440" y="3794760"/>
+            <a:ext cx="10424160" cy="640080"/>
+          </a:xfrm>
+          <a:prstGeom prst="rect">
+            <a:avLst/>
+          </a:prstGeom>
+          <a:noFill/>
+          <a:ln/>
+        </p:spPr>
+        <p:txBody>
+          <a:bodyPr wrap="square" rtlCol="0" anchor="ctr"/>
+          <a:lstStyle/>
+          <a:p>
+            <a:pPr indent="0" marL="0">
+              <a:buNone/>
+            </a:pPr>
+            <a:r>
+              <a:rPr lang="en-US" sz="1800" b="1" dirty="0">
+                <a:solidFill>
+                  <a:srgbClr val="1B3A6B"/>
+                </a:solidFill>
+                <a:latin typeface="Arial" pitchFamily="34" charset="0"/>
+                <a:ea typeface="Arial" pitchFamily="34" charset="-122"/>
+                <a:cs typeface="Arial" pitchFamily="34" charset="-120"/>
+              </a:rPr>
+              <a:t>Quantos perfis de acesso a plataforma tem?</a:t>
+            </a:r>
+            <a:endParaRPr lang="en-US" sz="1800" dirty="0"/>
+          </a:p>
+        </p:txBody>
+      </p:sp>
+      <p:sp>
+        <p:nvSpPr>
+          <p:cNvPr id="27" name="Shape 24"/>
+          <p:cNvSpPr/>
+          <p:nvPr/>
+        </p:nvSpPr>
+        <p:spPr>
+          <a:xfrm>
+            <a:off x="548640" y="4572000"/>
+            <a:ext cx="2601468" cy="1463040"/>
+          </a:xfrm>
+          <a:prstGeom prst="roundRect">
+            <a:avLst>
+              <a:gd name="adj" fmla="val 5000"/>
+            </a:avLst>
+          </a:prstGeom>
+          <a:solidFill>
+            <a:srgbClr val="FFFFFF"/>
+          </a:solidFill>
+          <a:ln w="9525">
+            <a:solidFill>
+              <a:srgbClr val="D8E0EC"/>
+            </a:solidFill>
+            <a:prstDash val="solid"/>
+          </a:ln>
+        </p:spPr>
+      </p:sp>
+      <p:sp>
+        <p:nvSpPr>
+          <p:cNvPr id="28" name="Text 25"/>
+          <p:cNvSpPr/>
+          <p:nvPr/>
+        </p:nvSpPr>
+        <p:spPr>
+          <a:xfrm>
+            <a:off x="685800" y="4663440"/>
+            <a:ext cx="365760" cy="365760"/>
+          </a:xfrm>
+          <a:prstGeom prst="rect">
+            <a:avLst/>
+          </a:prstGeom>
+          <a:noFill/>
+          <a:ln/>
+        </p:spPr>
+        <p:txBody>
+          <a:bodyPr wrap="square" rtlCol="0" anchor="ctr"/>
+          <a:lstStyle/>
+          <a:p>
+            <a:pPr indent="0" marL="0">
+              <a:buNone/>
+            </a:pPr>
+            <a:r>
+              <a:rPr lang="en-US" sz="1400" b="1" dirty="0">
+                <a:solidFill>
+                  <a:srgbClr val="F7A23B"/>
+                </a:solidFill>
+                <a:latin typeface="Arial" pitchFamily="34" charset="0"/>
+                <a:ea typeface="Arial" pitchFamily="34" charset="-122"/>
+                <a:cs typeface="Arial" pitchFamily="34" charset="-120"/>
+              </a:rPr>
+              <a:t>A</a:t>
+            </a:r>
+            <a:endParaRPr lang="en-US" sz="1400" dirty="0"/>
+          </a:p>
+        </p:txBody>
+      </p:sp>
+      <p:sp>
+        <p:nvSpPr>
+          <p:cNvPr id="29" name="Text 26"/>
+          <p:cNvSpPr/>
+          <p:nvPr/>
+        </p:nvSpPr>
+        <p:spPr>
+          <a:xfrm>
+            <a:off x="685800" y="5029200"/>
+            <a:ext cx="2327148" cy="914400"/>
+          </a:xfrm>
+          <a:prstGeom prst="rect">
+            <a:avLst/>
+          </a:prstGeom>
+          <a:noFill/>
+          <a:ln/>
+        </p:spPr>
+        <p:txBody>
+          <a:bodyPr wrap="square" rtlCol="0" anchor="t"/>
+          <a:lstStyle/>
+          <a:p>
+            <a:pPr indent="0" marL="0">
+              <a:buNone/>
+            </a:pPr>
+            <a:r>
+              <a:rPr lang="en-US" sz="1500" dirty="0">
+                <a:solidFill>
+                  <a:srgbClr val="1F2937"/>
+                </a:solidFill>
+                <a:latin typeface="Arial" pitchFamily="34" charset="0"/>
+                <a:ea typeface="Arial" pitchFamily="34" charset="-122"/>
+                <a:cs typeface="Arial" pitchFamily="34" charset="-120"/>
+              </a:rPr>
+              <a:t>2</a:t>
+            </a:r>
+            <a:endParaRPr lang="en-US" sz="1500" dirty="0"/>
+          </a:p>
+        </p:txBody>
+      </p:sp>
+      <p:sp>
+        <p:nvSpPr>
+          <p:cNvPr id="30" name="Shape 27"/>
+          <p:cNvSpPr/>
+          <p:nvPr/>
+        </p:nvSpPr>
+        <p:spPr>
+          <a:xfrm>
+            <a:off x="3378708" y="4572000"/>
+            <a:ext cx="2601468" cy="1463040"/>
+          </a:xfrm>
+          <a:prstGeom prst="roundRect">
+            <a:avLst>
+              <a:gd name="adj" fmla="val 5000"/>
+            </a:avLst>
+          </a:prstGeom>
+          <a:solidFill>
+            <a:srgbClr val="FFFFFF"/>
+          </a:solidFill>
+          <a:ln w="9525">
+            <a:solidFill>
+              <a:srgbClr val="D8E0EC"/>
+            </a:solidFill>
+            <a:prstDash val="solid"/>
+          </a:ln>
+        </p:spPr>
+      </p:sp>
+      <p:sp>
+        <p:nvSpPr>
+          <p:cNvPr id="31" name="Text 28"/>
+          <p:cNvSpPr/>
+          <p:nvPr/>
+        </p:nvSpPr>
+        <p:spPr>
+          <a:xfrm>
+            <a:off x="3515868" y="4663440"/>
+            <a:ext cx="365760" cy="365760"/>
+          </a:xfrm>
+          <a:prstGeom prst="rect">
+            <a:avLst/>
+          </a:prstGeom>
+          <a:noFill/>
+          <a:ln/>
+        </p:spPr>
+        <p:txBody>
+          <a:bodyPr wrap="square" rtlCol="0" anchor="ctr"/>
+          <a:lstStyle/>
+          <a:p>
+            <a:pPr indent="0" marL="0">
+              <a:buNone/>
+            </a:pPr>
+            <a:r>
+              <a:rPr lang="en-US" sz="1400" b="1" dirty="0">
+                <a:solidFill>
+                  <a:srgbClr val="F7A23B"/>
+                </a:solidFill>
+                <a:latin typeface="Arial" pitchFamily="34" charset="0"/>
+                <a:ea typeface="Arial" pitchFamily="34" charset="-122"/>
+                <a:cs typeface="Arial" pitchFamily="34" charset="-120"/>
+              </a:rPr>
+              <a:t>B</a:t>
+            </a:r>
+            <a:endParaRPr lang="en-US" sz="1400" dirty="0"/>
+          </a:p>
+        </p:txBody>
+      </p:sp>
+      <p:sp>
+        <p:nvSpPr>
+          <p:cNvPr id="32" name="Text 29"/>
+          <p:cNvSpPr/>
+          <p:nvPr/>
+        </p:nvSpPr>
+        <p:spPr>
+          <a:xfrm>
+            <a:off x="3515868" y="5029200"/>
+            <a:ext cx="2327148" cy="914400"/>
+          </a:xfrm>
+          <a:prstGeom prst="rect">
+            <a:avLst/>
+          </a:prstGeom>
+          <a:noFill/>
+          <a:ln/>
+        </p:spPr>
+        <p:txBody>
+          <a:bodyPr wrap="square" rtlCol="0" anchor="t"/>
+          <a:lstStyle/>
+          <a:p>
+            <a:pPr indent="0" marL="0">
+              <a:buNone/>
+            </a:pPr>
+            <a:r>
+              <a:rPr lang="en-US" sz="1500" dirty="0">
+                <a:solidFill>
+                  <a:srgbClr val="1F2937"/>
+                </a:solidFill>
+                <a:latin typeface="Arial" pitchFamily="34" charset="0"/>
+                <a:ea typeface="Arial" pitchFamily="34" charset="-122"/>
+                <a:cs typeface="Arial" pitchFamily="34" charset="-120"/>
+              </a:rPr>
+              <a:t>3</a:t>
+            </a:r>
+            <a:endParaRPr lang="en-US" sz="1500" dirty="0"/>
+          </a:p>
+        </p:txBody>
+      </p:sp>
+      <p:sp>
+        <p:nvSpPr>
+          <p:cNvPr id="33" name="Shape 30"/>
+          <p:cNvSpPr/>
+          <p:nvPr/>
+        </p:nvSpPr>
+        <p:spPr>
+          <a:xfrm>
+            <a:off x="6208776" y="4572000"/>
+            <a:ext cx="2601468" cy="1463040"/>
+          </a:xfrm>
+          <a:prstGeom prst="roundRect">
+            <a:avLst>
+              <a:gd name="adj" fmla="val 5000"/>
+            </a:avLst>
+          </a:prstGeom>
+          <a:solidFill>
+            <a:srgbClr val="FFFFFF"/>
+          </a:solidFill>
+          <a:ln w="9525">
+            <a:solidFill>
+              <a:srgbClr val="D8E0EC"/>
+            </a:solidFill>
+            <a:prstDash val="solid"/>
+          </a:ln>
+        </p:spPr>
+      </p:sp>
+      <p:sp>
+        <p:nvSpPr>
+          <p:cNvPr id="34" name="Text 31"/>
+          <p:cNvSpPr/>
+          <p:nvPr/>
+        </p:nvSpPr>
+        <p:spPr>
+          <a:xfrm>
+            <a:off x="6345936" y="4663440"/>
+            <a:ext cx="365760" cy="365760"/>
+          </a:xfrm>
+          <a:prstGeom prst="rect">
+            <a:avLst/>
+          </a:prstGeom>
+          <a:noFill/>
+          <a:ln/>
+        </p:spPr>
+        <p:txBody>
+          <a:bodyPr wrap="square" rtlCol="0" anchor="ctr"/>
+          <a:lstStyle/>
+          <a:p>
+            <a:pPr indent="0" marL="0">
+              <a:buNone/>
+            </a:pPr>
+            <a:r>
+              <a:rPr lang="en-US" sz="1400" b="1" dirty="0">
+                <a:solidFill>
+                  <a:srgbClr val="F7A23B"/>
+                </a:solidFill>
+                <a:latin typeface="Arial" pitchFamily="34" charset="0"/>
+                <a:ea typeface="Arial" pitchFamily="34" charset="-122"/>
+                <a:cs typeface="Arial" pitchFamily="34" charset="-120"/>
+              </a:rPr>
+              <a:t>C</a:t>
+            </a:r>
+            <a:endParaRPr lang="en-US" sz="1400" dirty="0"/>
+          </a:p>
+        </p:txBody>
+      </p:sp>
+      <p:sp>
+        <p:nvSpPr>
+          <p:cNvPr id="35" name="Text 32"/>
+          <p:cNvSpPr/>
+          <p:nvPr/>
+        </p:nvSpPr>
+        <p:spPr>
+          <a:xfrm>
+            <a:off x="6345936" y="5029200"/>
+            <a:ext cx="2327148" cy="914400"/>
+          </a:xfrm>
+          <a:prstGeom prst="rect">
+            <a:avLst/>
+          </a:prstGeom>
+          <a:noFill/>
+          <a:ln/>
+        </p:spPr>
+        <p:txBody>
+          <a:bodyPr wrap="square" rtlCol="0" anchor="t"/>
+          <a:lstStyle/>
+          <a:p>
+            <a:pPr indent="0" marL="0">
+              <a:buNone/>
+            </a:pPr>
+            <a:r>
+              <a:rPr lang="en-US" sz="1500" dirty="0">
+                <a:solidFill>
+                  <a:srgbClr val="1F2937"/>
+                </a:solidFill>
+                <a:latin typeface="Arial" pitchFamily="34" charset="0"/>
+                <a:ea typeface="Arial" pitchFamily="34" charset="-122"/>
+                <a:cs typeface="Arial" pitchFamily="34" charset="-120"/>
+              </a:rPr>
+              <a:t>4</a:t>
+            </a:r>
+            <a:endParaRPr lang="en-US" sz="1500" dirty="0"/>
+          </a:p>
+        </p:txBody>
+      </p:sp>
+      <p:sp>
+        <p:nvSpPr>
+          <p:cNvPr id="36" name="Shape 33"/>
+          <p:cNvSpPr/>
+          <p:nvPr/>
+        </p:nvSpPr>
+        <p:spPr>
+          <a:xfrm>
+            <a:off x="9038844" y="4572000"/>
+            <a:ext cx="2601468" cy="1463040"/>
+          </a:xfrm>
+          <a:prstGeom prst="roundRect">
+            <a:avLst>
+              <a:gd name="adj" fmla="val 5000"/>
+            </a:avLst>
+          </a:prstGeom>
+          <a:solidFill>
+            <a:srgbClr val="FFFFFF"/>
+          </a:solidFill>
+          <a:ln w="9525">
+            <a:solidFill>
+              <a:srgbClr val="D8E0EC"/>
+            </a:solidFill>
+            <a:prstDash val="solid"/>
+          </a:ln>
+        </p:spPr>
+      </p:sp>
+      <p:sp>
+        <p:nvSpPr>
+          <p:cNvPr id="37" name="Text 34"/>
+          <p:cNvSpPr/>
+          <p:nvPr/>
+        </p:nvSpPr>
+        <p:spPr>
+          <a:xfrm>
+            <a:off x="9176004" y="4663440"/>
+            <a:ext cx="365760" cy="365760"/>
+          </a:xfrm>
+          <a:prstGeom prst="rect">
+            <a:avLst/>
+          </a:prstGeom>
+          <a:noFill/>
+          <a:ln/>
+        </p:spPr>
+        <p:txBody>
+          <a:bodyPr wrap="square" rtlCol="0" anchor="ctr"/>
+          <a:lstStyle/>
+          <a:p>
+            <a:pPr indent="0" marL="0">
+              <a:buNone/>
+            </a:pPr>
+            <a:r>
+              <a:rPr lang="en-US" sz="1400" b="1" dirty="0">
+                <a:solidFill>
+                  <a:srgbClr val="F7A23B"/>
+                </a:solidFill>
+                <a:latin typeface="Arial" pitchFamily="34" charset="0"/>
+                <a:ea typeface="Arial" pitchFamily="34" charset="-122"/>
+                <a:cs typeface="Arial" pitchFamily="34" charset="-120"/>
+              </a:rPr>
+              <a:t>D</a:t>
+            </a:r>
+            <a:endParaRPr lang="en-US" sz="1400" dirty="0"/>
+          </a:p>
+        </p:txBody>
+      </p:sp>
+      <p:sp>
+        <p:nvSpPr>
+          <p:cNvPr id="38" name="Text 35"/>
+          <p:cNvSpPr/>
+          <p:nvPr/>
+        </p:nvSpPr>
+        <p:spPr>
+          <a:xfrm>
+            <a:off x="9176004" y="5029200"/>
+            <a:ext cx="2327148" cy="914400"/>
+          </a:xfrm>
+          <a:prstGeom prst="rect">
+            <a:avLst/>
+          </a:prstGeom>
+          <a:noFill/>
+          <a:ln/>
+        </p:spPr>
+        <p:txBody>
+          <a:bodyPr wrap="square" rtlCol="0" anchor="t"/>
+          <a:lstStyle/>
+          <a:p>
+            <a:pPr indent="0" marL="0">
+              <a:buNone/>
+            </a:pPr>
+            <a:r>
+              <a:rPr lang="en-US" sz="1500" dirty="0">
+                <a:solidFill>
+                  <a:srgbClr val="1F2937"/>
+                </a:solidFill>
+                <a:latin typeface="Arial" pitchFamily="34" charset="0"/>
+                <a:ea typeface="Arial" pitchFamily="34" charset="-122"/>
+                <a:cs typeface="Arial" pitchFamily="34" charset="-120"/>
+              </a:rPr>
+              <a:t>5</a:t>
+            </a:r>
+            <a:endParaRPr lang="en-US" sz="1500" dirty="0"/>
           </a:p>
         </p:txBody>
       </p:sp>
@@ -7289,6 +8866,1349 @@
             <a:fld id="{F7021451-1387-4CA6-816F-3879F97B5CBC}" type="slidenum">
               <a:rPr b="1" lang="en-US"/>
               <a:t>18</a:t>
+            </a:fld>
+            <a:endParaRPr lang="en-US"/>
+          </a:p>
+        </p:txBody>
+      </p:sp>
+    </p:spTree>
+  </p:cSld>
+  <p:clrMapOvr>
+    <a:masterClrMapping/>
+  </p:clrMapOvr>
+</p:sld>
+</file>
+
+<file path=ppt/slides/slide19.xml><?xml version="1.0" encoding="utf-8"?>
+<p:sld xmlns:a="http://schemas.openxmlformats.org/drawingml/2006/main" xmlns:r="http://schemas.openxmlformats.org/officeDocument/2006/relationships" xmlns:p="http://schemas.openxmlformats.org/presentationml/2006/main">
+  <p:cSld name="Slide 19">
+    <p:bg>
+      <p:bgPr>
+        <a:solidFill>
+          <a:srgbClr val="F6F8FB"/>
+        </a:solidFill>
+      </p:bgPr>
+    </p:bg>
+    <p:spTree>
+      <p:nvGrpSpPr>
+        <p:cNvPr id="1" name=""/>
+        <p:cNvGrpSpPr/>
+        <p:nvPr/>
+      </p:nvGrpSpPr>
+      <p:grpSpPr>
+        <a:xfrm>
+          <a:off x="0" y="0"/>
+          <a:ext cx="0" cy="0"/>
+          <a:chOff x="0" y="0"/>
+          <a:chExt cx="0" cy="0"/>
+        </a:xfrm>
+      </p:grpSpPr>
+      <p:sp>
+        <p:nvSpPr>
+          <p:cNvPr id="2" name="Shape 0"/>
+          <p:cNvSpPr/>
+          <p:nvPr/>
+        </p:nvSpPr>
+        <p:spPr>
+          <a:xfrm>
+            <a:off x="0" y="6510528"/>
+            <a:ext cx="12191695" cy="347472"/>
+          </a:xfrm>
+          <a:prstGeom prst="rect">
+            <a:avLst/>
+          </a:prstGeom>
+          <a:solidFill>
+            <a:srgbClr val="FFFFFF"/>
+          </a:solidFill>
+          <a:ln w="6350">
+            <a:solidFill>
+              <a:srgbClr val="D8E0EC"/>
+            </a:solidFill>
+            <a:prstDash val="solid"/>
+          </a:ln>
+        </p:spPr>
+      </p:sp>
+      <p:pic>
+        <p:nvPicPr>
+          <p:cNvPr id="3" name="Image 0" descr="/www/wwwroot/rexar/gdsolar/docs/curso/slides/assets/logo-gdsolar.png">    </p:cNvPr>
+          <p:cNvPicPr>
+            <a:picLocks noChangeAspect="1"/>
+          </p:cNvPicPr>
+          <p:nvPr/>
+        </p:nvPicPr>
+        <p:blipFill>
+          <a:blip r:embed="rId1"/>
+          <a:stretch>
+            <a:fillRect/>
+          </a:stretch>
+        </p:blipFill>
+        <p:spPr>
+          <a:xfrm>
+            <a:off x="548640" y="6547104"/>
+            <a:ext cx="274320" cy="274320"/>
+          </a:xfrm>
+          <a:prstGeom prst="rect">
+            <a:avLst/>
+          </a:prstGeom>
+        </p:spPr>
+      </p:pic>
+      <p:sp>
+        <p:nvSpPr>
+          <p:cNvPr id="4" name="Text 1"/>
+          <p:cNvSpPr/>
+          <p:nvPr/>
+        </p:nvSpPr>
+        <p:spPr>
+          <a:xfrm>
+            <a:off x="886968" y="6528816"/>
+            <a:ext cx="6400800" cy="310896"/>
+          </a:xfrm>
+          <a:prstGeom prst="rect">
+            <a:avLst/>
+          </a:prstGeom>
+          <a:noFill/>
+          <a:ln/>
+        </p:spPr>
+        <p:txBody>
+          <a:bodyPr wrap="square" rtlCol="0" anchor="ctr"/>
+          <a:lstStyle/>
+          <a:p>
+            <a:pPr indent="0" marL="0">
+              <a:buNone/>
+            </a:pPr>
+            <a:r>
+              <a:rPr lang="en-US" sz="900" b="1" dirty="0">
+                <a:solidFill>
+                  <a:srgbClr val="64748B"/>
+                </a:solidFill>
+                <a:latin typeface="Arial" pitchFamily="34" charset="0"/>
+                <a:ea typeface="Arial" pitchFamily="34" charset="-122"/>
+                <a:cs typeface="Arial" pitchFamily="34" charset="-120"/>
+              </a:rPr>
+              <a:t>GD Solar  ·  Formação em Energia por Assinatura</a:t>
+            </a:r>
+            <a:endParaRPr lang="en-US" sz="900" dirty="0"/>
+          </a:p>
+        </p:txBody>
+      </p:sp>
+      <p:sp>
+        <p:nvSpPr>
+          <p:cNvPr id="5" name="Text 2"/>
+          <p:cNvSpPr/>
+          <p:nvPr/>
+        </p:nvSpPr>
+        <p:spPr>
+          <a:xfrm>
+            <a:off x="7132320" y="6528816"/>
+            <a:ext cx="4023360" cy="310896"/>
+          </a:xfrm>
+          <a:prstGeom prst="rect">
+            <a:avLst/>
+          </a:prstGeom>
+          <a:noFill/>
+          <a:ln/>
+        </p:spPr>
+        <p:txBody>
+          <a:bodyPr wrap="square" rtlCol="0" anchor="ctr"/>
+          <a:lstStyle/>
+          <a:p>
+            <a:pPr algn="r" indent="0" marL="0">
+              <a:buNone/>
+            </a:pPr>
+            <a:r>
+              <a:rPr lang="en-US" sz="900" dirty="0">
+                <a:solidFill>
+                  <a:srgbClr val="64748B"/>
+                </a:solidFill>
+                <a:latin typeface="Arial" pitchFamily="34" charset="0"/>
+                <a:ea typeface="Arial" pitchFamily="34" charset="-122"/>
+                <a:cs typeface="Arial" pitchFamily="34" charset="-120"/>
+              </a:rPr>
+              <a:t>M0 · Teste rápido</a:t>
+            </a:r>
+            <a:endParaRPr lang="en-US" sz="900" dirty="0"/>
+          </a:p>
+        </p:txBody>
+      </p:sp>
+      <p:sp>
+        <p:nvSpPr>
+          <p:cNvPr id="6" name="Shape 3"/>
+          <p:cNvSpPr/>
+          <p:nvPr/>
+        </p:nvSpPr>
+        <p:spPr>
+          <a:xfrm>
+            <a:off x="548640" y="384048"/>
+            <a:ext cx="82296" cy="658368"/>
+          </a:xfrm>
+          <a:prstGeom prst="rect">
+            <a:avLst/>
+          </a:prstGeom>
+          <a:solidFill>
+            <a:srgbClr val="F7A23B"/>
+          </a:solidFill>
+          <a:ln/>
+        </p:spPr>
+      </p:sp>
+      <p:sp>
+        <p:nvSpPr>
+          <p:cNvPr id="7" name="Text 4"/>
+          <p:cNvSpPr/>
+          <p:nvPr/>
+        </p:nvSpPr>
+        <p:spPr>
+          <a:xfrm>
+            <a:off x="777240" y="292608"/>
+            <a:ext cx="10972800" cy="274320"/>
+          </a:xfrm>
+          <a:prstGeom prst="rect">
+            <a:avLst/>
+          </a:prstGeom>
+          <a:noFill/>
+          <a:ln/>
+        </p:spPr>
+        <p:txBody>
+          <a:bodyPr wrap="square" rtlCol="0" anchor="ctr"/>
+          <a:lstStyle/>
+          <a:p>
+            <a:pPr indent="0" marL="0">
+              <a:buNone/>
+            </a:pPr>
+            <a:r>
+              <a:rPr lang="en-US" sz="1000" b="1" spc="100" kern="0" dirty="0">
+                <a:solidFill>
+                  <a:srgbClr val="F7A23B"/>
+                </a:solidFill>
+                <a:latin typeface="Arial" pitchFamily="34" charset="0"/>
+                <a:ea typeface="Arial" pitchFamily="34" charset="-122"/>
+                <a:cs typeface="Arial" pitchFamily="34" charset="-120"/>
+              </a:rPr>
+              <a:t>QUESTÕES 3–4 DE 5</a:t>
+            </a:r>
+            <a:endParaRPr lang="en-US" sz="1000" dirty="0"/>
+          </a:p>
+        </p:txBody>
+      </p:sp>
+      <p:sp>
+        <p:nvSpPr>
+          <p:cNvPr id="8" name="Text 5"/>
+          <p:cNvSpPr/>
+          <p:nvPr/>
+        </p:nvSpPr>
+        <p:spPr>
+          <a:xfrm>
+            <a:off x="777240" y="530352"/>
+            <a:ext cx="10881360" cy="566928"/>
+          </a:xfrm>
+          <a:prstGeom prst="rect">
+            <a:avLst/>
+          </a:prstGeom>
+          <a:noFill/>
+          <a:ln/>
+        </p:spPr>
+        <p:txBody>
+          <a:bodyPr wrap="square" rtlCol="0" anchor="ctr">
+            <a:normAutofit/>
+          </a:bodyPr>
+          <a:lstStyle/>
+          <a:p>
+            <a:pPr indent="0" marL="0">
+              <a:buNone/>
+            </a:pPr>
+            <a:r>
+              <a:rPr lang="en-US" sz="2600" b="1" dirty="0">
+                <a:solidFill>
+                  <a:srgbClr val="1B3A6B"/>
+                </a:solidFill>
+                <a:latin typeface="Arial" pitchFamily="34" charset="0"/>
+                <a:ea typeface="Arial" pitchFamily="34" charset="-122"/>
+                <a:cs typeface="Arial" pitchFamily="34" charset="-120"/>
+              </a:rPr>
+              <a:t>Teste rápido</a:t>
+            </a:r>
+            <a:endParaRPr lang="en-US" sz="2600" dirty="0"/>
+          </a:p>
+        </p:txBody>
+      </p:sp>
+      <p:sp>
+        <p:nvSpPr>
+          <p:cNvPr id="9" name="Shape 6"/>
+          <p:cNvSpPr/>
+          <p:nvPr/>
+        </p:nvSpPr>
+        <p:spPr>
+          <a:xfrm>
+            <a:off x="548640" y="1325880"/>
+            <a:ext cx="502920" cy="502920"/>
+          </a:xfrm>
+          <a:prstGeom prst="ellipse">
+            <a:avLst/>
+          </a:prstGeom>
+          <a:solidFill>
+            <a:srgbClr val="1B3A6B"/>
+          </a:solidFill>
+          <a:ln/>
+        </p:spPr>
+      </p:sp>
+      <p:sp>
+        <p:nvSpPr>
+          <p:cNvPr id="10" name="Text 7"/>
+          <p:cNvSpPr/>
+          <p:nvPr/>
+        </p:nvSpPr>
+        <p:spPr>
+          <a:xfrm>
+            <a:off x="548640" y="1325880"/>
+            <a:ext cx="502920" cy="502920"/>
+          </a:xfrm>
+          <a:prstGeom prst="rect">
+            <a:avLst/>
+          </a:prstGeom>
+          <a:noFill/>
+          <a:ln/>
+        </p:spPr>
+        <p:txBody>
+          <a:bodyPr wrap="square" rtlCol="0" anchor="ctr"/>
+          <a:lstStyle/>
+          <a:p>
+            <a:pPr algn="ctr" indent="0" marL="0">
+              <a:buNone/>
+            </a:pPr>
+            <a:r>
+              <a:rPr lang="en-US" sz="1600" b="1" dirty="0">
+                <a:solidFill>
+                  <a:srgbClr val="FFFFFF"/>
+                </a:solidFill>
+                <a:latin typeface="Arial" pitchFamily="34" charset="0"/>
+                <a:ea typeface="Arial" pitchFamily="34" charset="-122"/>
+                <a:cs typeface="Arial" pitchFamily="34" charset="-120"/>
+              </a:rPr>
+              <a:t>3</a:t>
+            </a:r>
+            <a:endParaRPr lang="en-US" sz="1600" dirty="0"/>
+          </a:p>
+        </p:txBody>
+      </p:sp>
+      <p:sp>
+        <p:nvSpPr>
+          <p:cNvPr id="11" name="Text 8"/>
+          <p:cNvSpPr/>
+          <p:nvPr/>
+        </p:nvSpPr>
+        <p:spPr>
+          <a:xfrm>
+            <a:off x="1234440" y="1280160"/>
+            <a:ext cx="10424160" cy="640080"/>
+          </a:xfrm>
+          <a:prstGeom prst="rect">
+            <a:avLst/>
+          </a:prstGeom>
+          <a:noFill/>
+          <a:ln/>
+        </p:spPr>
+        <p:txBody>
+          <a:bodyPr wrap="square" rtlCol="0" anchor="ctr"/>
+          <a:lstStyle/>
+          <a:p>
+            <a:pPr indent="0" marL="0">
+              <a:buNone/>
+            </a:pPr>
+            <a:r>
+              <a:rPr lang="en-US" sz="1800" b="1" dirty="0">
+                <a:solidFill>
+                  <a:srgbClr val="1B3A6B"/>
+                </a:solidFill>
+                <a:latin typeface="Arial" pitchFamily="34" charset="0"/>
+                <a:ea typeface="Arial" pitchFamily="34" charset="-122"/>
+                <a:cs typeface="Arial" pitchFamily="34" charset="-120"/>
+              </a:rPr>
+              <a:t>Quem é o "produtor" na plataforma?</a:t>
+            </a:r>
+            <a:endParaRPr lang="en-US" sz="1800" dirty="0"/>
+          </a:p>
+        </p:txBody>
+      </p:sp>
+      <p:sp>
+        <p:nvSpPr>
+          <p:cNvPr id="12" name="Shape 9"/>
+          <p:cNvSpPr/>
+          <p:nvPr/>
+        </p:nvSpPr>
+        <p:spPr>
+          <a:xfrm>
+            <a:off x="548640" y="2057400"/>
+            <a:ext cx="2601468" cy="1463040"/>
+          </a:xfrm>
+          <a:prstGeom prst="roundRect">
+            <a:avLst>
+              <a:gd name="adj" fmla="val 5000"/>
+            </a:avLst>
+          </a:prstGeom>
+          <a:solidFill>
+            <a:srgbClr val="FFFFFF"/>
+          </a:solidFill>
+          <a:ln w="9525">
+            <a:solidFill>
+              <a:srgbClr val="D8E0EC"/>
+            </a:solidFill>
+            <a:prstDash val="solid"/>
+          </a:ln>
+        </p:spPr>
+      </p:sp>
+      <p:sp>
+        <p:nvSpPr>
+          <p:cNvPr id="13" name="Text 10"/>
+          <p:cNvSpPr/>
+          <p:nvPr/>
+        </p:nvSpPr>
+        <p:spPr>
+          <a:xfrm>
+            <a:off x="685800" y="2148840"/>
+            <a:ext cx="365760" cy="365760"/>
+          </a:xfrm>
+          <a:prstGeom prst="rect">
+            <a:avLst/>
+          </a:prstGeom>
+          <a:noFill/>
+          <a:ln/>
+        </p:spPr>
+        <p:txBody>
+          <a:bodyPr wrap="square" rtlCol="0" anchor="ctr"/>
+          <a:lstStyle/>
+          <a:p>
+            <a:pPr indent="0" marL="0">
+              <a:buNone/>
+            </a:pPr>
+            <a:r>
+              <a:rPr lang="en-US" sz="1400" b="1" dirty="0">
+                <a:solidFill>
+                  <a:srgbClr val="F7A23B"/>
+                </a:solidFill>
+                <a:latin typeface="Arial" pitchFamily="34" charset="0"/>
+                <a:ea typeface="Arial" pitchFamily="34" charset="-122"/>
+                <a:cs typeface="Arial" pitchFamily="34" charset="-120"/>
+              </a:rPr>
+              <a:t>A</a:t>
+            </a:r>
+            <a:endParaRPr lang="en-US" sz="1400" dirty="0"/>
+          </a:p>
+        </p:txBody>
+      </p:sp>
+      <p:sp>
+        <p:nvSpPr>
+          <p:cNvPr id="14" name="Text 11"/>
+          <p:cNvSpPr/>
+          <p:nvPr/>
+        </p:nvSpPr>
+        <p:spPr>
+          <a:xfrm>
+            <a:off x="685800" y="2514600"/>
+            <a:ext cx="2327148" cy="914400"/>
+          </a:xfrm>
+          <a:prstGeom prst="rect">
+            <a:avLst/>
+          </a:prstGeom>
+          <a:noFill/>
+          <a:ln/>
+        </p:spPr>
+        <p:txBody>
+          <a:bodyPr wrap="square" rtlCol="0" anchor="t"/>
+          <a:lstStyle/>
+          <a:p>
+            <a:pPr indent="0" marL="0">
+              <a:buNone/>
+            </a:pPr>
+            <a:r>
+              <a:rPr lang="en-US" sz="1500" dirty="0">
+                <a:solidFill>
+                  <a:srgbClr val="1F2937"/>
+                </a:solidFill>
+                <a:latin typeface="Arial" pitchFamily="34" charset="0"/>
+                <a:ea typeface="Arial" pitchFamily="34" charset="-122"/>
+                <a:cs typeface="Arial" pitchFamily="34" charset="-120"/>
+              </a:rPr>
+              <a:t>O dono da usina</a:t>
+            </a:r>
+            <a:endParaRPr lang="en-US" sz="1500" dirty="0"/>
+          </a:p>
+        </p:txBody>
+      </p:sp>
+      <p:sp>
+        <p:nvSpPr>
+          <p:cNvPr id="15" name="Shape 12"/>
+          <p:cNvSpPr/>
+          <p:nvPr/>
+        </p:nvSpPr>
+        <p:spPr>
+          <a:xfrm>
+            <a:off x="3378708" y="2057400"/>
+            <a:ext cx="2601468" cy="1463040"/>
+          </a:xfrm>
+          <a:prstGeom prst="roundRect">
+            <a:avLst>
+              <a:gd name="adj" fmla="val 5000"/>
+            </a:avLst>
+          </a:prstGeom>
+          <a:solidFill>
+            <a:srgbClr val="FFFFFF"/>
+          </a:solidFill>
+          <a:ln w="9525">
+            <a:solidFill>
+              <a:srgbClr val="D8E0EC"/>
+            </a:solidFill>
+            <a:prstDash val="solid"/>
+          </a:ln>
+        </p:spPr>
+      </p:sp>
+      <p:sp>
+        <p:nvSpPr>
+          <p:cNvPr id="16" name="Text 13"/>
+          <p:cNvSpPr/>
+          <p:nvPr/>
+        </p:nvSpPr>
+        <p:spPr>
+          <a:xfrm>
+            <a:off x="3515868" y="2148840"/>
+            <a:ext cx="365760" cy="365760"/>
+          </a:xfrm>
+          <a:prstGeom prst="rect">
+            <a:avLst/>
+          </a:prstGeom>
+          <a:noFill/>
+          <a:ln/>
+        </p:spPr>
+        <p:txBody>
+          <a:bodyPr wrap="square" rtlCol="0" anchor="ctr"/>
+          <a:lstStyle/>
+          <a:p>
+            <a:pPr indent="0" marL="0">
+              <a:buNone/>
+            </a:pPr>
+            <a:r>
+              <a:rPr lang="en-US" sz="1400" b="1" dirty="0">
+                <a:solidFill>
+                  <a:srgbClr val="F7A23B"/>
+                </a:solidFill>
+                <a:latin typeface="Arial" pitchFamily="34" charset="0"/>
+                <a:ea typeface="Arial" pitchFamily="34" charset="-122"/>
+                <a:cs typeface="Arial" pitchFamily="34" charset="-120"/>
+              </a:rPr>
+              <a:t>B</a:t>
+            </a:r>
+            <a:endParaRPr lang="en-US" sz="1400" dirty="0"/>
+          </a:p>
+        </p:txBody>
+      </p:sp>
+      <p:sp>
+        <p:nvSpPr>
+          <p:cNvPr id="17" name="Text 14"/>
+          <p:cNvSpPr/>
+          <p:nvPr/>
+        </p:nvSpPr>
+        <p:spPr>
+          <a:xfrm>
+            <a:off x="3515868" y="2514600"/>
+            <a:ext cx="2327148" cy="914400"/>
+          </a:xfrm>
+          <a:prstGeom prst="rect">
+            <a:avLst/>
+          </a:prstGeom>
+          <a:noFill/>
+          <a:ln/>
+        </p:spPr>
+        <p:txBody>
+          <a:bodyPr wrap="square" rtlCol="0" anchor="t"/>
+          <a:lstStyle/>
+          <a:p>
+            <a:pPr indent="0" marL="0">
+              <a:buNone/>
+            </a:pPr>
+            <a:r>
+              <a:rPr lang="en-US" sz="1500" dirty="0">
+                <a:solidFill>
+                  <a:srgbClr val="1F2937"/>
+                </a:solidFill>
+                <a:latin typeface="Arial" pitchFamily="34" charset="0"/>
+                <a:ea typeface="Arial" pitchFamily="34" charset="-122"/>
+                <a:cs typeface="Arial" pitchFamily="34" charset="-120"/>
+              </a:rPr>
+              <a:t>o cliente que consome</a:t>
+            </a:r>
+            <a:endParaRPr lang="en-US" sz="1500" dirty="0"/>
+          </a:p>
+        </p:txBody>
+      </p:sp>
+      <p:sp>
+        <p:nvSpPr>
+          <p:cNvPr id="18" name="Shape 15"/>
+          <p:cNvSpPr/>
+          <p:nvPr/>
+        </p:nvSpPr>
+        <p:spPr>
+          <a:xfrm>
+            <a:off x="6208776" y="2057400"/>
+            <a:ext cx="2601468" cy="1463040"/>
+          </a:xfrm>
+          <a:prstGeom prst="roundRect">
+            <a:avLst>
+              <a:gd name="adj" fmla="val 5000"/>
+            </a:avLst>
+          </a:prstGeom>
+          <a:solidFill>
+            <a:srgbClr val="FFFFFF"/>
+          </a:solidFill>
+          <a:ln w="9525">
+            <a:solidFill>
+              <a:srgbClr val="D8E0EC"/>
+            </a:solidFill>
+            <a:prstDash val="solid"/>
+          </a:ln>
+        </p:spPr>
+      </p:sp>
+      <p:sp>
+        <p:nvSpPr>
+          <p:cNvPr id="19" name="Text 16"/>
+          <p:cNvSpPr/>
+          <p:nvPr/>
+        </p:nvSpPr>
+        <p:spPr>
+          <a:xfrm>
+            <a:off x="6345936" y="2148840"/>
+            <a:ext cx="365760" cy="365760"/>
+          </a:xfrm>
+          <a:prstGeom prst="rect">
+            <a:avLst/>
+          </a:prstGeom>
+          <a:noFill/>
+          <a:ln/>
+        </p:spPr>
+        <p:txBody>
+          <a:bodyPr wrap="square" rtlCol="0" anchor="ctr"/>
+          <a:lstStyle/>
+          <a:p>
+            <a:pPr indent="0" marL="0">
+              <a:buNone/>
+            </a:pPr>
+            <a:r>
+              <a:rPr lang="en-US" sz="1400" b="1" dirty="0">
+                <a:solidFill>
+                  <a:srgbClr val="F7A23B"/>
+                </a:solidFill>
+                <a:latin typeface="Arial" pitchFamily="34" charset="0"/>
+                <a:ea typeface="Arial" pitchFamily="34" charset="-122"/>
+                <a:cs typeface="Arial" pitchFamily="34" charset="-120"/>
+              </a:rPr>
+              <a:t>C</a:t>
+            </a:r>
+            <a:endParaRPr lang="en-US" sz="1400" dirty="0"/>
+          </a:p>
+        </p:txBody>
+      </p:sp>
+      <p:sp>
+        <p:nvSpPr>
+          <p:cNvPr id="20" name="Text 17"/>
+          <p:cNvSpPr/>
+          <p:nvPr/>
+        </p:nvSpPr>
+        <p:spPr>
+          <a:xfrm>
+            <a:off x="6345936" y="2514600"/>
+            <a:ext cx="2327148" cy="914400"/>
+          </a:xfrm>
+          <a:prstGeom prst="rect">
+            <a:avLst/>
+          </a:prstGeom>
+          <a:noFill/>
+          <a:ln/>
+        </p:spPr>
+        <p:txBody>
+          <a:bodyPr wrap="square" rtlCol="0" anchor="t"/>
+          <a:lstStyle/>
+          <a:p>
+            <a:pPr indent="0" marL="0">
+              <a:buNone/>
+            </a:pPr>
+            <a:r>
+              <a:rPr lang="en-US" sz="1500" dirty="0">
+                <a:solidFill>
+                  <a:srgbClr val="1F2937"/>
+                </a:solidFill>
+                <a:latin typeface="Arial" pitchFamily="34" charset="0"/>
+                <a:ea typeface="Arial" pitchFamily="34" charset="-122"/>
+                <a:cs typeface="Arial" pitchFamily="34" charset="-120"/>
+              </a:rPr>
+              <a:t>o vendedor</a:t>
+            </a:r>
+            <a:endParaRPr lang="en-US" sz="1500" dirty="0"/>
+          </a:p>
+        </p:txBody>
+      </p:sp>
+      <p:sp>
+        <p:nvSpPr>
+          <p:cNvPr id="21" name="Shape 18"/>
+          <p:cNvSpPr/>
+          <p:nvPr/>
+        </p:nvSpPr>
+        <p:spPr>
+          <a:xfrm>
+            <a:off x="9038844" y="2057400"/>
+            <a:ext cx="2601468" cy="1463040"/>
+          </a:xfrm>
+          <a:prstGeom prst="roundRect">
+            <a:avLst>
+              <a:gd name="adj" fmla="val 5000"/>
+            </a:avLst>
+          </a:prstGeom>
+          <a:solidFill>
+            <a:srgbClr val="FFFFFF"/>
+          </a:solidFill>
+          <a:ln w="9525">
+            <a:solidFill>
+              <a:srgbClr val="D8E0EC"/>
+            </a:solidFill>
+            <a:prstDash val="solid"/>
+          </a:ln>
+        </p:spPr>
+      </p:sp>
+      <p:sp>
+        <p:nvSpPr>
+          <p:cNvPr id="22" name="Text 19"/>
+          <p:cNvSpPr/>
+          <p:nvPr/>
+        </p:nvSpPr>
+        <p:spPr>
+          <a:xfrm>
+            <a:off x="9176004" y="2148840"/>
+            <a:ext cx="365760" cy="365760"/>
+          </a:xfrm>
+          <a:prstGeom prst="rect">
+            <a:avLst/>
+          </a:prstGeom>
+          <a:noFill/>
+          <a:ln/>
+        </p:spPr>
+        <p:txBody>
+          <a:bodyPr wrap="square" rtlCol="0" anchor="ctr"/>
+          <a:lstStyle/>
+          <a:p>
+            <a:pPr indent="0" marL="0">
+              <a:buNone/>
+            </a:pPr>
+            <a:r>
+              <a:rPr lang="en-US" sz="1400" b="1" dirty="0">
+                <a:solidFill>
+                  <a:srgbClr val="F7A23B"/>
+                </a:solidFill>
+                <a:latin typeface="Arial" pitchFamily="34" charset="0"/>
+                <a:ea typeface="Arial" pitchFamily="34" charset="-122"/>
+                <a:cs typeface="Arial" pitchFamily="34" charset="-120"/>
+              </a:rPr>
+              <a:t>D</a:t>
+            </a:r>
+            <a:endParaRPr lang="en-US" sz="1400" dirty="0"/>
+          </a:p>
+        </p:txBody>
+      </p:sp>
+      <p:sp>
+        <p:nvSpPr>
+          <p:cNvPr id="23" name="Text 20"/>
+          <p:cNvSpPr/>
+          <p:nvPr/>
+        </p:nvSpPr>
+        <p:spPr>
+          <a:xfrm>
+            <a:off x="9176004" y="2514600"/>
+            <a:ext cx="2327148" cy="914400"/>
+          </a:xfrm>
+          <a:prstGeom prst="rect">
+            <a:avLst/>
+          </a:prstGeom>
+          <a:noFill/>
+          <a:ln/>
+        </p:spPr>
+        <p:txBody>
+          <a:bodyPr wrap="square" rtlCol="0" anchor="t"/>
+          <a:lstStyle/>
+          <a:p>
+            <a:pPr indent="0" marL="0">
+              <a:buNone/>
+            </a:pPr>
+            <a:r>
+              <a:rPr lang="en-US" sz="1500" dirty="0">
+                <a:solidFill>
+                  <a:srgbClr val="1F2937"/>
+                </a:solidFill>
+                <a:latin typeface="Arial" pitchFamily="34" charset="0"/>
+                <a:ea typeface="Arial" pitchFamily="34" charset="-122"/>
+                <a:cs typeface="Arial" pitchFamily="34" charset="-120"/>
+              </a:rPr>
+              <a:t>a distribuidora</a:t>
+            </a:r>
+            <a:endParaRPr lang="en-US" sz="1500" dirty="0"/>
+          </a:p>
+        </p:txBody>
+      </p:sp>
+      <p:sp>
+        <p:nvSpPr>
+          <p:cNvPr id="24" name="Shape 21"/>
+          <p:cNvSpPr/>
+          <p:nvPr/>
+        </p:nvSpPr>
+        <p:spPr>
+          <a:xfrm>
+            <a:off x="548640" y="3840480"/>
+            <a:ext cx="502920" cy="502920"/>
+          </a:xfrm>
+          <a:prstGeom prst="ellipse">
+            <a:avLst/>
+          </a:prstGeom>
+          <a:solidFill>
+            <a:srgbClr val="1B3A6B"/>
+          </a:solidFill>
+          <a:ln/>
+        </p:spPr>
+      </p:sp>
+      <p:sp>
+        <p:nvSpPr>
+          <p:cNvPr id="25" name="Text 22"/>
+          <p:cNvSpPr/>
+          <p:nvPr/>
+        </p:nvSpPr>
+        <p:spPr>
+          <a:xfrm>
+            <a:off x="548640" y="3840480"/>
+            <a:ext cx="502920" cy="502920"/>
+          </a:xfrm>
+          <a:prstGeom prst="rect">
+            <a:avLst/>
+          </a:prstGeom>
+          <a:noFill/>
+          <a:ln/>
+        </p:spPr>
+        <p:txBody>
+          <a:bodyPr wrap="square" rtlCol="0" anchor="ctr"/>
+          <a:lstStyle/>
+          <a:p>
+            <a:pPr algn="ctr" indent="0" marL="0">
+              <a:buNone/>
+            </a:pPr>
+            <a:r>
+              <a:rPr lang="en-US" sz="1600" b="1" dirty="0">
+                <a:solidFill>
+                  <a:srgbClr val="FFFFFF"/>
+                </a:solidFill>
+                <a:latin typeface="Arial" pitchFamily="34" charset="0"/>
+                <a:ea typeface="Arial" pitchFamily="34" charset="-122"/>
+                <a:cs typeface="Arial" pitchFamily="34" charset="-120"/>
+              </a:rPr>
+              <a:t>4</a:t>
+            </a:r>
+            <a:endParaRPr lang="en-US" sz="1600" dirty="0"/>
+          </a:p>
+        </p:txBody>
+      </p:sp>
+      <p:sp>
+        <p:nvSpPr>
+          <p:cNvPr id="26" name="Text 23"/>
+          <p:cNvSpPr/>
+          <p:nvPr/>
+        </p:nvSpPr>
+        <p:spPr>
+          <a:xfrm>
+            <a:off x="1234440" y="3794760"/>
+            <a:ext cx="10424160" cy="640080"/>
+          </a:xfrm>
+          <a:prstGeom prst="rect">
+            <a:avLst/>
+          </a:prstGeom>
+          <a:noFill/>
+          <a:ln/>
+        </p:spPr>
+        <p:txBody>
+          <a:bodyPr wrap="square" rtlCol="0" anchor="ctr"/>
+          <a:lstStyle/>
+          <a:p>
+            <a:pPr indent="0" marL="0">
+              <a:buNone/>
+            </a:pPr>
+            <a:r>
+              <a:rPr lang="en-US" sz="1800" b="1" dirty="0">
+                <a:solidFill>
+                  <a:srgbClr val="1B3A6B"/>
+                </a:solidFill>
+                <a:latin typeface="Arial" pitchFamily="34" charset="0"/>
+                <a:ea typeface="Arial" pitchFamily="34" charset="-122"/>
+                <a:cs typeface="Arial" pitchFamily="34" charset="-120"/>
+              </a:rPr>
+              <a:t>O que o consultor vê na plataforma?</a:t>
+            </a:r>
+            <a:endParaRPr lang="en-US" sz="1800" dirty="0"/>
+          </a:p>
+        </p:txBody>
+      </p:sp>
+      <p:sp>
+        <p:nvSpPr>
+          <p:cNvPr id="27" name="Shape 24"/>
+          <p:cNvSpPr/>
+          <p:nvPr/>
+        </p:nvSpPr>
+        <p:spPr>
+          <a:xfrm>
+            <a:off x="548640" y="4572000"/>
+            <a:ext cx="2601468" cy="1463040"/>
+          </a:xfrm>
+          <a:prstGeom prst="roundRect">
+            <a:avLst>
+              <a:gd name="adj" fmla="val 5000"/>
+            </a:avLst>
+          </a:prstGeom>
+          <a:solidFill>
+            <a:srgbClr val="FFFFFF"/>
+          </a:solidFill>
+          <a:ln w="9525">
+            <a:solidFill>
+              <a:srgbClr val="D8E0EC"/>
+            </a:solidFill>
+            <a:prstDash val="solid"/>
+          </a:ln>
+        </p:spPr>
+      </p:sp>
+      <p:sp>
+        <p:nvSpPr>
+          <p:cNvPr id="28" name="Text 25"/>
+          <p:cNvSpPr/>
+          <p:nvPr/>
+        </p:nvSpPr>
+        <p:spPr>
+          <a:xfrm>
+            <a:off x="685800" y="4663440"/>
+            <a:ext cx="365760" cy="365760"/>
+          </a:xfrm>
+          <a:prstGeom prst="rect">
+            <a:avLst/>
+          </a:prstGeom>
+          <a:noFill/>
+          <a:ln/>
+        </p:spPr>
+        <p:txBody>
+          <a:bodyPr wrap="square" rtlCol="0" anchor="ctr"/>
+          <a:lstStyle/>
+          <a:p>
+            <a:pPr indent="0" marL="0">
+              <a:buNone/>
+            </a:pPr>
+            <a:r>
+              <a:rPr lang="en-US" sz="1400" b="1" dirty="0">
+                <a:solidFill>
+                  <a:srgbClr val="F7A23B"/>
+                </a:solidFill>
+                <a:latin typeface="Arial" pitchFamily="34" charset="0"/>
+                <a:ea typeface="Arial" pitchFamily="34" charset="-122"/>
+                <a:cs typeface="Arial" pitchFamily="34" charset="-120"/>
+              </a:rPr>
+              <a:t>A</a:t>
+            </a:r>
+            <a:endParaRPr lang="en-US" sz="1400" dirty="0"/>
+          </a:p>
+        </p:txBody>
+      </p:sp>
+      <p:sp>
+        <p:nvSpPr>
+          <p:cNvPr id="29" name="Text 26"/>
+          <p:cNvSpPr/>
+          <p:nvPr/>
+        </p:nvSpPr>
+        <p:spPr>
+          <a:xfrm>
+            <a:off x="685800" y="5029200"/>
+            <a:ext cx="2327148" cy="914400"/>
+          </a:xfrm>
+          <a:prstGeom prst="rect">
+            <a:avLst/>
+          </a:prstGeom>
+          <a:noFill/>
+          <a:ln/>
+        </p:spPr>
+        <p:txBody>
+          <a:bodyPr wrap="square" rtlCol="0" anchor="t"/>
+          <a:lstStyle/>
+          <a:p>
+            <a:pPr indent="0" marL="0">
+              <a:buNone/>
+            </a:pPr>
+            <a:r>
+              <a:rPr lang="en-US" sz="1500" dirty="0">
+                <a:solidFill>
+                  <a:srgbClr val="1F2937"/>
+                </a:solidFill>
+                <a:latin typeface="Arial" pitchFamily="34" charset="0"/>
+                <a:ea typeface="Arial" pitchFamily="34" charset="-122"/>
+                <a:cs typeface="Arial" pitchFamily="34" charset="-120"/>
+              </a:rPr>
+              <a:t>Todos os clientes da empresa</a:t>
+            </a:r>
+            <a:endParaRPr lang="en-US" sz="1500" dirty="0"/>
+          </a:p>
+        </p:txBody>
+      </p:sp>
+      <p:sp>
+        <p:nvSpPr>
+          <p:cNvPr id="30" name="Shape 27"/>
+          <p:cNvSpPr/>
+          <p:nvPr/>
+        </p:nvSpPr>
+        <p:spPr>
+          <a:xfrm>
+            <a:off x="3378708" y="4572000"/>
+            <a:ext cx="2601468" cy="1463040"/>
+          </a:xfrm>
+          <a:prstGeom prst="roundRect">
+            <a:avLst>
+              <a:gd name="adj" fmla="val 5000"/>
+            </a:avLst>
+          </a:prstGeom>
+          <a:solidFill>
+            <a:srgbClr val="FFFFFF"/>
+          </a:solidFill>
+          <a:ln w="9525">
+            <a:solidFill>
+              <a:srgbClr val="D8E0EC"/>
+            </a:solidFill>
+            <a:prstDash val="solid"/>
+          </a:ln>
+        </p:spPr>
+      </p:sp>
+      <p:sp>
+        <p:nvSpPr>
+          <p:cNvPr id="31" name="Text 28"/>
+          <p:cNvSpPr/>
+          <p:nvPr/>
+        </p:nvSpPr>
+        <p:spPr>
+          <a:xfrm>
+            <a:off x="3515868" y="4663440"/>
+            <a:ext cx="365760" cy="365760"/>
+          </a:xfrm>
+          <a:prstGeom prst="rect">
+            <a:avLst/>
+          </a:prstGeom>
+          <a:noFill/>
+          <a:ln/>
+        </p:spPr>
+        <p:txBody>
+          <a:bodyPr wrap="square" rtlCol="0" anchor="ctr"/>
+          <a:lstStyle/>
+          <a:p>
+            <a:pPr indent="0" marL="0">
+              <a:buNone/>
+            </a:pPr>
+            <a:r>
+              <a:rPr lang="en-US" sz="1400" b="1" dirty="0">
+                <a:solidFill>
+                  <a:srgbClr val="F7A23B"/>
+                </a:solidFill>
+                <a:latin typeface="Arial" pitchFamily="34" charset="0"/>
+                <a:ea typeface="Arial" pitchFamily="34" charset="-122"/>
+                <a:cs typeface="Arial" pitchFamily="34" charset="-120"/>
+              </a:rPr>
+              <a:t>B</a:t>
+            </a:r>
+            <a:endParaRPr lang="en-US" sz="1400" dirty="0"/>
+          </a:p>
+        </p:txBody>
+      </p:sp>
+      <p:sp>
+        <p:nvSpPr>
+          <p:cNvPr id="32" name="Text 29"/>
+          <p:cNvSpPr/>
+          <p:nvPr/>
+        </p:nvSpPr>
+        <p:spPr>
+          <a:xfrm>
+            <a:off x="3515868" y="5029200"/>
+            <a:ext cx="2327148" cy="914400"/>
+          </a:xfrm>
+          <a:prstGeom prst="rect">
+            <a:avLst/>
+          </a:prstGeom>
+          <a:noFill/>
+          <a:ln/>
+        </p:spPr>
+        <p:txBody>
+          <a:bodyPr wrap="square" rtlCol="0" anchor="t"/>
+          <a:lstStyle/>
+          <a:p>
+            <a:pPr indent="0" marL="0">
+              <a:buNone/>
+            </a:pPr>
+            <a:r>
+              <a:rPr lang="en-US" sz="1500" dirty="0">
+                <a:solidFill>
+                  <a:srgbClr val="1F2937"/>
+                </a:solidFill>
+                <a:latin typeface="Arial" pitchFamily="34" charset="0"/>
+                <a:ea typeface="Arial" pitchFamily="34" charset="-122"/>
+                <a:cs typeface="Arial" pitchFamily="34" charset="-120"/>
+              </a:rPr>
+              <a:t>Apenas os clientes da própria carteira</a:t>
+            </a:r>
+            <a:endParaRPr lang="en-US" sz="1500" dirty="0"/>
+          </a:p>
+        </p:txBody>
+      </p:sp>
+      <p:sp>
+        <p:nvSpPr>
+          <p:cNvPr id="33" name="Shape 30"/>
+          <p:cNvSpPr/>
+          <p:nvPr/>
+        </p:nvSpPr>
+        <p:spPr>
+          <a:xfrm>
+            <a:off x="6208776" y="4572000"/>
+            <a:ext cx="2601468" cy="1463040"/>
+          </a:xfrm>
+          <a:prstGeom prst="roundRect">
+            <a:avLst>
+              <a:gd name="adj" fmla="val 5000"/>
+            </a:avLst>
+          </a:prstGeom>
+          <a:solidFill>
+            <a:srgbClr val="FFFFFF"/>
+          </a:solidFill>
+          <a:ln w="9525">
+            <a:solidFill>
+              <a:srgbClr val="D8E0EC"/>
+            </a:solidFill>
+            <a:prstDash val="solid"/>
+          </a:ln>
+        </p:spPr>
+      </p:sp>
+      <p:sp>
+        <p:nvSpPr>
+          <p:cNvPr id="34" name="Text 31"/>
+          <p:cNvSpPr/>
+          <p:nvPr/>
+        </p:nvSpPr>
+        <p:spPr>
+          <a:xfrm>
+            <a:off x="6345936" y="4663440"/>
+            <a:ext cx="365760" cy="365760"/>
+          </a:xfrm>
+          <a:prstGeom prst="rect">
+            <a:avLst/>
+          </a:prstGeom>
+          <a:noFill/>
+          <a:ln/>
+        </p:spPr>
+        <p:txBody>
+          <a:bodyPr wrap="square" rtlCol="0" anchor="ctr"/>
+          <a:lstStyle/>
+          <a:p>
+            <a:pPr indent="0" marL="0">
+              <a:buNone/>
+            </a:pPr>
+            <a:r>
+              <a:rPr lang="en-US" sz="1400" b="1" dirty="0">
+                <a:solidFill>
+                  <a:srgbClr val="F7A23B"/>
+                </a:solidFill>
+                <a:latin typeface="Arial" pitchFamily="34" charset="0"/>
+                <a:ea typeface="Arial" pitchFamily="34" charset="-122"/>
+                <a:cs typeface="Arial" pitchFamily="34" charset="-120"/>
+              </a:rPr>
+              <a:t>C</a:t>
+            </a:r>
+            <a:endParaRPr lang="en-US" sz="1400" dirty="0"/>
+          </a:p>
+        </p:txBody>
+      </p:sp>
+      <p:sp>
+        <p:nvSpPr>
+          <p:cNvPr id="35" name="Text 32"/>
+          <p:cNvSpPr/>
+          <p:nvPr/>
+        </p:nvSpPr>
+        <p:spPr>
+          <a:xfrm>
+            <a:off x="6345936" y="5029200"/>
+            <a:ext cx="2327148" cy="914400"/>
+          </a:xfrm>
+          <a:prstGeom prst="rect">
+            <a:avLst/>
+          </a:prstGeom>
+          <a:noFill/>
+          <a:ln/>
+        </p:spPr>
+        <p:txBody>
+          <a:bodyPr wrap="square" rtlCol="0" anchor="t"/>
+          <a:lstStyle/>
+          <a:p>
+            <a:pPr indent="0" marL="0">
+              <a:buNone/>
+            </a:pPr>
+            <a:r>
+              <a:rPr lang="en-US" sz="1500" dirty="0">
+                <a:solidFill>
+                  <a:srgbClr val="1F2937"/>
+                </a:solidFill>
+                <a:latin typeface="Arial" pitchFamily="34" charset="0"/>
+                <a:ea typeface="Arial" pitchFamily="34" charset="-122"/>
+                <a:cs typeface="Arial" pitchFamily="34" charset="-120"/>
+              </a:rPr>
+              <a:t>apenas usinas</a:t>
+            </a:r>
+            <a:endParaRPr lang="en-US" sz="1500" dirty="0"/>
+          </a:p>
+        </p:txBody>
+      </p:sp>
+      <p:sp>
+        <p:nvSpPr>
+          <p:cNvPr id="36" name="Shape 33"/>
+          <p:cNvSpPr/>
+          <p:nvPr/>
+        </p:nvSpPr>
+        <p:spPr>
+          <a:xfrm>
+            <a:off x="9038844" y="4572000"/>
+            <a:ext cx="2601468" cy="1463040"/>
+          </a:xfrm>
+          <a:prstGeom prst="roundRect">
+            <a:avLst>
+              <a:gd name="adj" fmla="val 5000"/>
+            </a:avLst>
+          </a:prstGeom>
+          <a:solidFill>
+            <a:srgbClr val="FFFFFF"/>
+          </a:solidFill>
+          <a:ln w="9525">
+            <a:solidFill>
+              <a:srgbClr val="D8E0EC"/>
+            </a:solidFill>
+            <a:prstDash val="solid"/>
+          </a:ln>
+        </p:spPr>
+      </p:sp>
+      <p:sp>
+        <p:nvSpPr>
+          <p:cNvPr id="37" name="Text 34"/>
+          <p:cNvSpPr/>
+          <p:nvPr/>
+        </p:nvSpPr>
+        <p:spPr>
+          <a:xfrm>
+            <a:off x="9176004" y="4663440"/>
+            <a:ext cx="365760" cy="365760"/>
+          </a:xfrm>
+          <a:prstGeom prst="rect">
+            <a:avLst/>
+          </a:prstGeom>
+          <a:noFill/>
+          <a:ln/>
+        </p:spPr>
+        <p:txBody>
+          <a:bodyPr wrap="square" rtlCol="0" anchor="ctr"/>
+          <a:lstStyle/>
+          <a:p>
+            <a:pPr indent="0" marL="0">
+              <a:buNone/>
+            </a:pPr>
+            <a:r>
+              <a:rPr lang="en-US" sz="1400" b="1" dirty="0">
+                <a:solidFill>
+                  <a:srgbClr val="F7A23B"/>
+                </a:solidFill>
+                <a:latin typeface="Arial" pitchFamily="34" charset="0"/>
+                <a:ea typeface="Arial" pitchFamily="34" charset="-122"/>
+                <a:cs typeface="Arial" pitchFamily="34" charset="-120"/>
+              </a:rPr>
+              <a:t>D</a:t>
+            </a:r>
+            <a:endParaRPr lang="en-US" sz="1400" dirty="0"/>
+          </a:p>
+        </p:txBody>
+      </p:sp>
+      <p:sp>
+        <p:nvSpPr>
+          <p:cNvPr id="38" name="Text 35"/>
+          <p:cNvSpPr/>
+          <p:nvPr/>
+        </p:nvSpPr>
+        <p:spPr>
+          <a:xfrm>
+            <a:off x="9176004" y="5029200"/>
+            <a:ext cx="2327148" cy="914400"/>
+          </a:xfrm>
+          <a:prstGeom prst="rect">
+            <a:avLst/>
+          </a:prstGeom>
+          <a:noFill/>
+          <a:ln/>
+        </p:spPr>
+        <p:txBody>
+          <a:bodyPr wrap="square" rtlCol="0" anchor="t"/>
+          <a:lstStyle/>
+          <a:p>
+            <a:pPr indent="0" marL="0">
+              <a:buNone/>
+            </a:pPr>
+            <a:r>
+              <a:rPr lang="en-US" sz="1500" dirty="0">
+                <a:solidFill>
+                  <a:srgbClr val="1F2937"/>
+                </a:solidFill>
+                <a:latin typeface="Arial" pitchFamily="34" charset="0"/>
+                <a:ea typeface="Arial" pitchFamily="34" charset="-122"/>
+                <a:cs typeface="Arial" pitchFamily="34" charset="-120"/>
+              </a:rPr>
+              <a:t>só relatórios</a:t>
+            </a:r>
+            <a:endParaRPr lang="en-US" sz="1500" dirty="0"/>
+          </a:p>
+        </p:txBody>
+      </p:sp>
+      <p:sp>
+        <p:nvSpPr>
+          <p:cNvPr id="25" name="Slide Number Placeholder 0"/>
+          <p:cNvSpPr>
+            <a:spLocks noGrp="1"/>
+          </p:cNvSpPr>
+          <p:nvPr>
+            <p:ph type="sldNum" sz="quarter" idx="4294967295"/>
+          </p:nvPr>
+        </p:nvSpPr>
+        <p:spPr>
+          <a:xfrm>
+            <a:off x="11292840" y="6556248"/>
+            <a:ext cx="548640" cy="256032"/>
+          </a:xfrm>
+          <a:prstGeom prst="rect">
+            <a:avLst/>
+          </a:prstGeom>
+          <a:extLst>
+            <a:ext uri="{C572A759-6A51-4108-AA02-DFA0A04FC94B}">
+              <ma14:wrappingTextBoxFlag xmlns:ma14="http://schemas.microsoft.com/office/mac/drawingml/2011/main" val="0"/>
+            </a:ext>
+          </a:extLst>
+        </p:spPr>
+        <p:txBody>
+          <a:bodyPr/>
+          <a:lstStyle>
+            <a:lvl1pPr>
+              <a:defRPr sz="900">
+                <a:solidFill>
+                  <a:srgbClr val="1B3A6B"/>
+                </a:solidFill>
+                <a:latin typeface="Arial"/>
+                <a:ea typeface="Arial"/>
+                <a:cs typeface="Arial"/>
+              </a:defRPr>
+            </a:lvl1pPr>
+          </a:lstStyle>
+          <a:p>
+            <a:pPr algn="r"/>
+            <a:fld id="{F7021451-1387-4CA6-816F-3879F97B5CBC}" type="slidenum">
+              <a:rPr b="1" lang="en-US"/>
+              <a:t>19</a:t>
             </a:fld>
             <a:endParaRPr lang="en-US"/>
           </a:p>
@@ -7724,6 +10644,2193 @@
 </p:sld>
 </file>
 
+<file path=ppt/slides/slide20.xml><?xml version="1.0" encoding="utf-8"?>
+<p:sld xmlns:a="http://schemas.openxmlformats.org/drawingml/2006/main" xmlns:r="http://schemas.openxmlformats.org/officeDocument/2006/relationships" xmlns:p="http://schemas.openxmlformats.org/presentationml/2006/main">
+  <p:cSld name="Slide 20">
+    <p:bg>
+      <p:bgPr>
+        <a:solidFill>
+          <a:srgbClr val="F6F8FB"/>
+        </a:solidFill>
+      </p:bgPr>
+    </p:bg>
+    <p:spTree>
+      <p:nvGrpSpPr>
+        <p:cNvPr id="1" name=""/>
+        <p:cNvGrpSpPr/>
+        <p:nvPr/>
+      </p:nvGrpSpPr>
+      <p:grpSpPr>
+        <a:xfrm>
+          <a:off x="0" y="0"/>
+          <a:ext cx="0" cy="0"/>
+          <a:chOff x="0" y="0"/>
+          <a:chExt cx="0" cy="0"/>
+        </a:xfrm>
+      </p:grpSpPr>
+      <p:sp>
+        <p:nvSpPr>
+          <p:cNvPr id="2" name="Shape 0"/>
+          <p:cNvSpPr/>
+          <p:nvPr/>
+        </p:nvSpPr>
+        <p:spPr>
+          <a:xfrm>
+            <a:off x="0" y="6510528"/>
+            <a:ext cx="12191695" cy="347472"/>
+          </a:xfrm>
+          <a:prstGeom prst="rect">
+            <a:avLst/>
+          </a:prstGeom>
+          <a:solidFill>
+            <a:srgbClr val="FFFFFF"/>
+          </a:solidFill>
+          <a:ln w="6350">
+            <a:solidFill>
+              <a:srgbClr val="D8E0EC"/>
+            </a:solidFill>
+            <a:prstDash val="solid"/>
+          </a:ln>
+        </p:spPr>
+      </p:sp>
+      <p:pic>
+        <p:nvPicPr>
+          <p:cNvPr id="3" name="Image 0" descr="/www/wwwroot/rexar/gdsolar/docs/curso/slides/assets/logo-gdsolar.png">    </p:cNvPr>
+          <p:cNvPicPr>
+            <a:picLocks noChangeAspect="1"/>
+          </p:cNvPicPr>
+          <p:nvPr/>
+        </p:nvPicPr>
+        <p:blipFill>
+          <a:blip r:embed="rId1"/>
+          <a:stretch>
+            <a:fillRect/>
+          </a:stretch>
+        </p:blipFill>
+        <p:spPr>
+          <a:xfrm>
+            <a:off x="548640" y="6547104"/>
+            <a:ext cx="274320" cy="274320"/>
+          </a:xfrm>
+          <a:prstGeom prst="rect">
+            <a:avLst/>
+          </a:prstGeom>
+        </p:spPr>
+      </p:pic>
+      <p:sp>
+        <p:nvSpPr>
+          <p:cNvPr id="4" name="Text 1"/>
+          <p:cNvSpPr/>
+          <p:nvPr/>
+        </p:nvSpPr>
+        <p:spPr>
+          <a:xfrm>
+            <a:off x="886968" y="6528816"/>
+            <a:ext cx="6400800" cy="310896"/>
+          </a:xfrm>
+          <a:prstGeom prst="rect">
+            <a:avLst/>
+          </a:prstGeom>
+          <a:noFill/>
+          <a:ln/>
+        </p:spPr>
+        <p:txBody>
+          <a:bodyPr wrap="square" rtlCol="0" anchor="ctr"/>
+          <a:lstStyle/>
+          <a:p>
+            <a:pPr indent="0" marL="0">
+              <a:buNone/>
+            </a:pPr>
+            <a:r>
+              <a:rPr lang="en-US" sz="900" b="1" dirty="0">
+                <a:solidFill>
+                  <a:srgbClr val="64748B"/>
+                </a:solidFill>
+                <a:latin typeface="Arial" pitchFamily="34" charset="0"/>
+                <a:ea typeface="Arial" pitchFamily="34" charset="-122"/>
+                <a:cs typeface="Arial" pitchFamily="34" charset="-120"/>
+              </a:rPr>
+              <a:t>GD Solar  ·  Formação em Energia por Assinatura</a:t>
+            </a:r>
+            <a:endParaRPr lang="en-US" sz="900" dirty="0"/>
+          </a:p>
+        </p:txBody>
+      </p:sp>
+      <p:sp>
+        <p:nvSpPr>
+          <p:cNvPr id="5" name="Text 2"/>
+          <p:cNvSpPr/>
+          <p:nvPr/>
+        </p:nvSpPr>
+        <p:spPr>
+          <a:xfrm>
+            <a:off x="7132320" y="6528816"/>
+            <a:ext cx="4023360" cy="310896"/>
+          </a:xfrm>
+          <a:prstGeom prst="rect">
+            <a:avLst/>
+          </a:prstGeom>
+          <a:noFill/>
+          <a:ln/>
+        </p:spPr>
+        <p:txBody>
+          <a:bodyPr wrap="square" rtlCol="0" anchor="ctr"/>
+          <a:lstStyle/>
+          <a:p>
+            <a:pPr algn="r" indent="0" marL="0">
+              <a:buNone/>
+            </a:pPr>
+            <a:r>
+              <a:rPr lang="en-US" sz="900" dirty="0">
+                <a:solidFill>
+                  <a:srgbClr val="64748B"/>
+                </a:solidFill>
+                <a:latin typeface="Arial" pitchFamily="34" charset="0"/>
+                <a:ea typeface="Arial" pitchFamily="34" charset="-122"/>
+                <a:cs typeface="Arial" pitchFamily="34" charset="-120"/>
+              </a:rPr>
+              <a:t>M0 · Teste rápido</a:t>
+            </a:r>
+            <a:endParaRPr lang="en-US" sz="900" dirty="0"/>
+          </a:p>
+        </p:txBody>
+      </p:sp>
+      <p:sp>
+        <p:nvSpPr>
+          <p:cNvPr id="6" name="Shape 3"/>
+          <p:cNvSpPr/>
+          <p:nvPr/>
+        </p:nvSpPr>
+        <p:spPr>
+          <a:xfrm>
+            <a:off x="548640" y="384048"/>
+            <a:ext cx="82296" cy="658368"/>
+          </a:xfrm>
+          <a:prstGeom prst="rect">
+            <a:avLst/>
+          </a:prstGeom>
+          <a:solidFill>
+            <a:srgbClr val="F7A23B"/>
+          </a:solidFill>
+          <a:ln/>
+        </p:spPr>
+      </p:sp>
+      <p:sp>
+        <p:nvSpPr>
+          <p:cNvPr id="7" name="Text 4"/>
+          <p:cNvSpPr/>
+          <p:nvPr/>
+        </p:nvSpPr>
+        <p:spPr>
+          <a:xfrm>
+            <a:off x="777240" y="292608"/>
+            <a:ext cx="10972800" cy="274320"/>
+          </a:xfrm>
+          <a:prstGeom prst="rect">
+            <a:avLst/>
+          </a:prstGeom>
+          <a:noFill/>
+          <a:ln/>
+        </p:spPr>
+        <p:txBody>
+          <a:bodyPr wrap="square" rtlCol="0" anchor="ctr"/>
+          <a:lstStyle/>
+          <a:p>
+            <a:pPr indent="0" marL="0">
+              <a:buNone/>
+            </a:pPr>
+            <a:r>
+              <a:rPr lang="en-US" sz="1000" b="1" spc="100" kern="0" dirty="0">
+                <a:solidFill>
+                  <a:srgbClr val="F7A23B"/>
+                </a:solidFill>
+                <a:latin typeface="Arial" pitchFamily="34" charset="0"/>
+                <a:ea typeface="Arial" pitchFamily="34" charset="-122"/>
+                <a:cs typeface="Arial" pitchFamily="34" charset="-120"/>
+              </a:rPr>
+              <a:t>QUESTÕES 5–5 DE 5</a:t>
+            </a:r>
+            <a:endParaRPr lang="en-US" sz="1000" dirty="0"/>
+          </a:p>
+        </p:txBody>
+      </p:sp>
+      <p:sp>
+        <p:nvSpPr>
+          <p:cNvPr id="8" name="Text 5"/>
+          <p:cNvSpPr/>
+          <p:nvPr/>
+        </p:nvSpPr>
+        <p:spPr>
+          <a:xfrm>
+            <a:off x="777240" y="530352"/>
+            <a:ext cx="10881360" cy="566928"/>
+          </a:xfrm>
+          <a:prstGeom prst="rect">
+            <a:avLst/>
+          </a:prstGeom>
+          <a:noFill/>
+          <a:ln/>
+        </p:spPr>
+        <p:txBody>
+          <a:bodyPr wrap="square" rtlCol="0" anchor="ctr">
+            <a:normAutofit/>
+          </a:bodyPr>
+          <a:lstStyle/>
+          <a:p>
+            <a:pPr indent="0" marL="0">
+              <a:buNone/>
+            </a:pPr>
+            <a:r>
+              <a:rPr lang="en-US" sz="2600" b="1" dirty="0">
+                <a:solidFill>
+                  <a:srgbClr val="1B3A6B"/>
+                </a:solidFill>
+                <a:latin typeface="Arial" pitchFamily="34" charset="0"/>
+                <a:ea typeface="Arial" pitchFamily="34" charset="-122"/>
+                <a:cs typeface="Arial" pitchFamily="34" charset="-120"/>
+              </a:rPr>
+              <a:t>Teste rápido</a:t>
+            </a:r>
+            <a:endParaRPr lang="en-US" sz="2600" dirty="0"/>
+          </a:p>
+        </p:txBody>
+      </p:sp>
+      <p:sp>
+        <p:nvSpPr>
+          <p:cNvPr id="9" name="Shape 6"/>
+          <p:cNvSpPr/>
+          <p:nvPr/>
+        </p:nvSpPr>
+        <p:spPr>
+          <a:xfrm>
+            <a:off x="548640" y="1325880"/>
+            <a:ext cx="502920" cy="502920"/>
+          </a:xfrm>
+          <a:prstGeom prst="ellipse">
+            <a:avLst/>
+          </a:prstGeom>
+          <a:solidFill>
+            <a:srgbClr val="1B3A6B"/>
+          </a:solidFill>
+          <a:ln/>
+        </p:spPr>
+      </p:sp>
+      <p:sp>
+        <p:nvSpPr>
+          <p:cNvPr id="10" name="Text 7"/>
+          <p:cNvSpPr/>
+          <p:nvPr/>
+        </p:nvSpPr>
+        <p:spPr>
+          <a:xfrm>
+            <a:off x="548640" y="1325880"/>
+            <a:ext cx="502920" cy="502920"/>
+          </a:xfrm>
+          <a:prstGeom prst="rect">
+            <a:avLst/>
+          </a:prstGeom>
+          <a:noFill/>
+          <a:ln/>
+        </p:spPr>
+        <p:txBody>
+          <a:bodyPr wrap="square" rtlCol="0" anchor="ctr"/>
+          <a:lstStyle/>
+          <a:p>
+            <a:pPr algn="ctr" indent="0" marL="0">
+              <a:buNone/>
+            </a:pPr>
+            <a:r>
+              <a:rPr lang="en-US" sz="1600" b="1" dirty="0">
+                <a:solidFill>
+                  <a:srgbClr val="FFFFFF"/>
+                </a:solidFill>
+                <a:latin typeface="Arial" pitchFamily="34" charset="0"/>
+                <a:ea typeface="Arial" pitchFamily="34" charset="-122"/>
+                <a:cs typeface="Arial" pitchFamily="34" charset="-120"/>
+              </a:rPr>
+              <a:t>5</a:t>
+            </a:r>
+            <a:endParaRPr lang="en-US" sz="1600" dirty="0"/>
+          </a:p>
+        </p:txBody>
+      </p:sp>
+      <p:sp>
+        <p:nvSpPr>
+          <p:cNvPr id="11" name="Text 8"/>
+          <p:cNvSpPr/>
+          <p:nvPr/>
+        </p:nvSpPr>
+        <p:spPr>
+          <a:xfrm>
+            <a:off x="1234440" y="1280160"/>
+            <a:ext cx="10424160" cy="640080"/>
+          </a:xfrm>
+          <a:prstGeom prst="rect">
+            <a:avLst/>
+          </a:prstGeom>
+          <a:noFill/>
+          <a:ln/>
+        </p:spPr>
+        <p:txBody>
+          <a:bodyPr wrap="square" rtlCol="0" anchor="ctr"/>
+          <a:lstStyle/>
+          <a:p>
+            <a:pPr indent="0" marL="0">
+              <a:buNone/>
+            </a:pPr>
+            <a:r>
+              <a:rPr lang="en-US" sz="1800" b="1" dirty="0">
+                <a:solidFill>
+                  <a:srgbClr val="1B3A6B"/>
+                </a:solidFill>
+                <a:latin typeface="Arial" pitchFamily="34" charset="0"/>
+                <a:ea typeface="Arial" pitchFamily="34" charset="-122"/>
+                <a:cs typeface="Arial" pitchFamily="34" charset="-120"/>
+              </a:rPr>
+              <a:t>Qual é o entregável do projeto final?</a:t>
+            </a:r>
+            <a:endParaRPr lang="en-US" sz="1800" dirty="0"/>
+          </a:p>
+        </p:txBody>
+      </p:sp>
+      <p:sp>
+        <p:nvSpPr>
+          <p:cNvPr id="12" name="Shape 9"/>
+          <p:cNvSpPr/>
+          <p:nvPr/>
+        </p:nvSpPr>
+        <p:spPr>
+          <a:xfrm>
+            <a:off x="548640" y="2057400"/>
+            <a:ext cx="2601468" cy="1463040"/>
+          </a:xfrm>
+          <a:prstGeom prst="roundRect">
+            <a:avLst>
+              <a:gd name="adj" fmla="val 5000"/>
+            </a:avLst>
+          </a:prstGeom>
+          <a:solidFill>
+            <a:srgbClr val="FFFFFF"/>
+          </a:solidFill>
+          <a:ln w="9525">
+            <a:solidFill>
+              <a:srgbClr val="D8E0EC"/>
+            </a:solidFill>
+            <a:prstDash val="solid"/>
+          </a:ln>
+        </p:spPr>
+      </p:sp>
+      <p:sp>
+        <p:nvSpPr>
+          <p:cNvPr id="13" name="Text 10"/>
+          <p:cNvSpPr/>
+          <p:nvPr/>
+        </p:nvSpPr>
+        <p:spPr>
+          <a:xfrm>
+            <a:off x="685800" y="2148840"/>
+            <a:ext cx="365760" cy="365760"/>
+          </a:xfrm>
+          <a:prstGeom prst="rect">
+            <a:avLst/>
+          </a:prstGeom>
+          <a:noFill/>
+          <a:ln/>
+        </p:spPr>
+        <p:txBody>
+          <a:bodyPr wrap="square" rtlCol="0" anchor="ctr"/>
+          <a:lstStyle/>
+          <a:p>
+            <a:pPr indent="0" marL="0">
+              <a:buNone/>
+            </a:pPr>
+            <a:r>
+              <a:rPr lang="en-US" sz="1400" b="1" dirty="0">
+                <a:solidFill>
+                  <a:srgbClr val="F7A23B"/>
+                </a:solidFill>
+                <a:latin typeface="Arial" pitchFamily="34" charset="0"/>
+                <a:ea typeface="Arial" pitchFamily="34" charset="-122"/>
+                <a:cs typeface="Arial" pitchFamily="34" charset="-120"/>
+              </a:rPr>
+              <a:t>A</a:t>
+            </a:r>
+            <a:endParaRPr lang="en-US" sz="1400" dirty="0"/>
+          </a:p>
+        </p:txBody>
+      </p:sp>
+      <p:sp>
+        <p:nvSpPr>
+          <p:cNvPr id="14" name="Text 11"/>
+          <p:cNvSpPr/>
+          <p:nvPr/>
+        </p:nvSpPr>
+        <p:spPr>
+          <a:xfrm>
+            <a:off x="685800" y="2514600"/>
+            <a:ext cx="2327148" cy="914400"/>
+          </a:xfrm>
+          <a:prstGeom prst="rect">
+            <a:avLst/>
+          </a:prstGeom>
+          <a:noFill/>
+          <a:ln/>
+        </p:spPr>
+        <p:txBody>
+          <a:bodyPr wrap="square" rtlCol="0" anchor="t"/>
+          <a:lstStyle/>
+          <a:p>
+            <a:pPr indent="0" marL="0">
+              <a:buNone/>
+            </a:pPr>
+            <a:r>
+              <a:rPr lang="en-US" sz="1300" dirty="0">
+                <a:solidFill>
+                  <a:srgbClr val="1F2937"/>
+                </a:solidFill>
+                <a:latin typeface="Arial" pitchFamily="34" charset="0"/>
+                <a:ea typeface="Arial" pitchFamily="34" charset="-122"/>
+                <a:cs typeface="Arial" pitchFamily="34" charset="-120"/>
+              </a:rPr>
+              <a:t>Uma operação completa simulada com usina, clientes, 3 meses de faturamento e relatório executivo</a:t>
+            </a:r>
+            <a:endParaRPr lang="en-US" sz="1300" dirty="0"/>
+          </a:p>
+        </p:txBody>
+      </p:sp>
+      <p:sp>
+        <p:nvSpPr>
+          <p:cNvPr id="15" name="Shape 12"/>
+          <p:cNvSpPr/>
+          <p:nvPr/>
+        </p:nvSpPr>
+        <p:spPr>
+          <a:xfrm>
+            <a:off x="3378708" y="2057400"/>
+            <a:ext cx="2601468" cy="1463040"/>
+          </a:xfrm>
+          <a:prstGeom prst="roundRect">
+            <a:avLst>
+              <a:gd name="adj" fmla="val 5000"/>
+            </a:avLst>
+          </a:prstGeom>
+          <a:solidFill>
+            <a:srgbClr val="FFFFFF"/>
+          </a:solidFill>
+          <a:ln w="9525">
+            <a:solidFill>
+              <a:srgbClr val="D8E0EC"/>
+            </a:solidFill>
+            <a:prstDash val="solid"/>
+          </a:ln>
+        </p:spPr>
+      </p:sp>
+      <p:sp>
+        <p:nvSpPr>
+          <p:cNvPr id="16" name="Text 13"/>
+          <p:cNvSpPr/>
+          <p:nvPr/>
+        </p:nvSpPr>
+        <p:spPr>
+          <a:xfrm>
+            <a:off x="3515868" y="2148840"/>
+            <a:ext cx="365760" cy="365760"/>
+          </a:xfrm>
+          <a:prstGeom prst="rect">
+            <a:avLst/>
+          </a:prstGeom>
+          <a:noFill/>
+          <a:ln/>
+        </p:spPr>
+        <p:txBody>
+          <a:bodyPr wrap="square" rtlCol="0" anchor="ctr"/>
+          <a:lstStyle/>
+          <a:p>
+            <a:pPr indent="0" marL="0">
+              <a:buNone/>
+            </a:pPr>
+            <a:r>
+              <a:rPr lang="en-US" sz="1400" b="1" dirty="0">
+                <a:solidFill>
+                  <a:srgbClr val="F7A23B"/>
+                </a:solidFill>
+                <a:latin typeface="Arial" pitchFamily="34" charset="0"/>
+                <a:ea typeface="Arial" pitchFamily="34" charset="-122"/>
+                <a:cs typeface="Arial" pitchFamily="34" charset="-120"/>
+              </a:rPr>
+              <a:t>B</a:t>
+            </a:r>
+            <a:endParaRPr lang="en-US" sz="1400" dirty="0"/>
+          </a:p>
+        </p:txBody>
+      </p:sp>
+      <p:sp>
+        <p:nvSpPr>
+          <p:cNvPr id="17" name="Text 14"/>
+          <p:cNvSpPr/>
+          <p:nvPr/>
+        </p:nvSpPr>
+        <p:spPr>
+          <a:xfrm>
+            <a:off x="3515868" y="2514600"/>
+            <a:ext cx="2327148" cy="914400"/>
+          </a:xfrm>
+          <a:prstGeom prst="rect">
+            <a:avLst/>
+          </a:prstGeom>
+          <a:noFill/>
+          <a:ln/>
+        </p:spPr>
+        <p:txBody>
+          <a:bodyPr wrap="square" rtlCol="0" anchor="t"/>
+          <a:lstStyle/>
+          <a:p>
+            <a:pPr indent="0" marL="0">
+              <a:buNone/>
+            </a:pPr>
+            <a:r>
+              <a:rPr lang="en-US" sz="1500" dirty="0">
+                <a:solidFill>
+                  <a:srgbClr val="1F2937"/>
+                </a:solidFill>
+                <a:latin typeface="Arial" pitchFamily="34" charset="0"/>
+                <a:ea typeface="Arial" pitchFamily="34" charset="-122"/>
+                <a:cs typeface="Arial" pitchFamily="34" charset="-120"/>
+              </a:rPr>
+              <a:t>uma prova teórica</a:t>
+            </a:r>
+            <a:endParaRPr lang="en-US" sz="1500" dirty="0"/>
+          </a:p>
+        </p:txBody>
+      </p:sp>
+      <p:sp>
+        <p:nvSpPr>
+          <p:cNvPr id="18" name="Shape 15"/>
+          <p:cNvSpPr/>
+          <p:nvPr/>
+        </p:nvSpPr>
+        <p:spPr>
+          <a:xfrm>
+            <a:off x="6208776" y="2057400"/>
+            <a:ext cx="2601468" cy="1463040"/>
+          </a:xfrm>
+          <a:prstGeom prst="roundRect">
+            <a:avLst>
+              <a:gd name="adj" fmla="val 5000"/>
+            </a:avLst>
+          </a:prstGeom>
+          <a:solidFill>
+            <a:srgbClr val="FFFFFF"/>
+          </a:solidFill>
+          <a:ln w="9525">
+            <a:solidFill>
+              <a:srgbClr val="D8E0EC"/>
+            </a:solidFill>
+            <a:prstDash val="solid"/>
+          </a:ln>
+        </p:spPr>
+      </p:sp>
+      <p:sp>
+        <p:nvSpPr>
+          <p:cNvPr id="19" name="Text 16"/>
+          <p:cNvSpPr/>
+          <p:nvPr/>
+        </p:nvSpPr>
+        <p:spPr>
+          <a:xfrm>
+            <a:off x="6345936" y="2148840"/>
+            <a:ext cx="365760" cy="365760"/>
+          </a:xfrm>
+          <a:prstGeom prst="rect">
+            <a:avLst/>
+          </a:prstGeom>
+          <a:noFill/>
+          <a:ln/>
+        </p:spPr>
+        <p:txBody>
+          <a:bodyPr wrap="square" rtlCol="0" anchor="ctr"/>
+          <a:lstStyle/>
+          <a:p>
+            <a:pPr indent="0" marL="0">
+              <a:buNone/>
+            </a:pPr>
+            <a:r>
+              <a:rPr lang="en-US" sz="1400" b="1" dirty="0">
+                <a:solidFill>
+                  <a:srgbClr val="F7A23B"/>
+                </a:solidFill>
+                <a:latin typeface="Arial" pitchFamily="34" charset="0"/>
+                <a:ea typeface="Arial" pitchFamily="34" charset="-122"/>
+                <a:cs typeface="Arial" pitchFamily="34" charset="-120"/>
+              </a:rPr>
+              <a:t>C</a:t>
+            </a:r>
+            <a:endParaRPr lang="en-US" sz="1400" dirty="0"/>
+          </a:p>
+        </p:txBody>
+      </p:sp>
+      <p:sp>
+        <p:nvSpPr>
+          <p:cNvPr id="20" name="Text 17"/>
+          <p:cNvSpPr/>
+          <p:nvPr/>
+        </p:nvSpPr>
+        <p:spPr>
+          <a:xfrm>
+            <a:off x="6345936" y="2514600"/>
+            <a:ext cx="2327148" cy="914400"/>
+          </a:xfrm>
+          <a:prstGeom prst="rect">
+            <a:avLst/>
+          </a:prstGeom>
+          <a:noFill/>
+          <a:ln/>
+        </p:spPr>
+        <p:txBody>
+          <a:bodyPr wrap="square" rtlCol="0" anchor="t"/>
+          <a:lstStyle/>
+          <a:p>
+            <a:pPr indent="0" marL="0">
+              <a:buNone/>
+            </a:pPr>
+            <a:r>
+              <a:rPr lang="en-US" sz="1500" dirty="0">
+                <a:solidFill>
+                  <a:srgbClr val="1F2937"/>
+                </a:solidFill>
+                <a:latin typeface="Arial" pitchFamily="34" charset="0"/>
+                <a:ea typeface="Arial" pitchFamily="34" charset="-122"/>
+                <a:cs typeface="Arial" pitchFamily="34" charset="-120"/>
+              </a:rPr>
+              <a:t>um vídeo de apresentação pessoal</a:t>
+            </a:r>
+            <a:endParaRPr lang="en-US" sz="1500" dirty="0"/>
+          </a:p>
+        </p:txBody>
+      </p:sp>
+      <p:sp>
+        <p:nvSpPr>
+          <p:cNvPr id="21" name="Shape 18"/>
+          <p:cNvSpPr/>
+          <p:nvPr/>
+        </p:nvSpPr>
+        <p:spPr>
+          <a:xfrm>
+            <a:off x="9038844" y="2057400"/>
+            <a:ext cx="2601468" cy="1463040"/>
+          </a:xfrm>
+          <a:prstGeom prst="roundRect">
+            <a:avLst>
+              <a:gd name="adj" fmla="val 5000"/>
+            </a:avLst>
+          </a:prstGeom>
+          <a:solidFill>
+            <a:srgbClr val="FFFFFF"/>
+          </a:solidFill>
+          <a:ln w="9525">
+            <a:solidFill>
+              <a:srgbClr val="D8E0EC"/>
+            </a:solidFill>
+            <a:prstDash val="solid"/>
+          </a:ln>
+        </p:spPr>
+      </p:sp>
+      <p:sp>
+        <p:nvSpPr>
+          <p:cNvPr id="22" name="Text 19"/>
+          <p:cNvSpPr/>
+          <p:nvPr/>
+        </p:nvSpPr>
+        <p:spPr>
+          <a:xfrm>
+            <a:off x="9176004" y="2148840"/>
+            <a:ext cx="365760" cy="365760"/>
+          </a:xfrm>
+          <a:prstGeom prst="rect">
+            <a:avLst/>
+          </a:prstGeom>
+          <a:noFill/>
+          <a:ln/>
+        </p:spPr>
+        <p:txBody>
+          <a:bodyPr wrap="square" rtlCol="0" anchor="ctr"/>
+          <a:lstStyle/>
+          <a:p>
+            <a:pPr indent="0" marL="0">
+              <a:buNone/>
+            </a:pPr>
+            <a:r>
+              <a:rPr lang="en-US" sz="1400" b="1" dirty="0">
+                <a:solidFill>
+                  <a:srgbClr val="F7A23B"/>
+                </a:solidFill>
+                <a:latin typeface="Arial" pitchFamily="34" charset="0"/>
+                <a:ea typeface="Arial" pitchFamily="34" charset="-122"/>
+                <a:cs typeface="Arial" pitchFamily="34" charset="-120"/>
+              </a:rPr>
+              <a:t>D</a:t>
+            </a:r>
+            <a:endParaRPr lang="en-US" sz="1400" dirty="0"/>
+          </a:p>
+        </p:txBody>
+      </p:sp>
+      <p:sp>
+        <p:nvSpPr>
+          <p:cNvPr id="23" name="Text 20"/>
+          <p:cNvSpPr/>
+          <p:nvPr/>
+        </p:nvSpPr>
+        <p:spPr>
+          <a:xfrm>
+            <a:off x="9176004" y="2514600"/>
+            <a:ext cx="2327148" cy="914400"/>
+          </a:xfrm>
+          <a:prstGeom prst="rect">
+            <a:avLst/>
+          </a:prstGeom>
+          <a:noFill/>
+          <a:ln/>
+        </p:spPr>
+        <p:txBody>
+          <a:bodyPr wrap="square" rtlCol="0" anchor="t"/>
+          <a:lstStyle/>
+          <a:p>
+            <a:pPr indent="0" marL="0">
+              <a:buNone/>
+            </a:pPr>
+            <a:r>
+              <a:rPr lang="en-US" sz="1500" dirty="0">
+                <a:solidFill>
+                  <a:srgbClr val="1F2937"/>
+                </a:solidFill>
+                <a:latin typeface="Arial" pitchFamily="34" charset="0"/>
+                <a:ea typeface="Arial" pitchFamily="34" charset="-122"/>
+                <a:cs typeface="Arial" pitchFamily="34" charset="-120"/>
+              </a:rPr>
+              <a:t>um projeto elétrico</a:t>
+            </a:r>
+            <a:endParaRPr lang="en-US" sz="1500" dirty="0"/>
+          </a:p>
+        </p:txBody>
+      </p:sp>
+      <p:sp>
+        <p:nvSpPr>
+          <p:cNvPr id="25" name="Slide Number Placeholder 0"/>
+          <p:cNvSpPr>
+            <a:spLocks noGrp="1"/>
+          </p:cNvSpPr>
+          <p:nvPr>
+            <p:ph type="sldNum" sz="quarter" idx="4294967295"/>
+          </p:nvPr>
+        </p:nvSpPr>
+        <p:spPr>
+          <a:xfrm>
+            <a:off x="11292840" y="6556248"/>
+            <a:ext cx="548640" cy="256032"/>
+          </a:xfrm>
+          <a:prstGeom prst="rect">
+            <a:avLst/>
+          </a:prstGeom>
+          <a:extLst>
+            <a:ext uri="{C572A759-6A51-4108-AA02-DFA0A04FC94B}">
+              <ma14:wrappingTextBoxFlag xmlns:ma14="http://schemas.microsoft.com/office/mac/drawingml/2011/main" val="0"/>
+            </a:ext>
+          </a:extLst>
+        </p:spPr>
+        <p:txBody>
+          <a:bodyPr/>
+          <a:lstStyle>
+            <a:lvl1pPr>
+              <a:defRPr sz="900">
+                <a:solidFill>
+                  <a:srgbClr val="1B3A6B"/>
+                </a:solidFill>
+                <a:latin typeface="Arial"/>
+                <a:ea typeface="Arial"/>
+                <a:cs typeface="Arial"/>
+              </a:defRPr>
+            </a:lvl1pPr>
+          </a:lstStyle>
+          <a:p>
+            <a:pPr algn="r"/>
+            <a:fld id="{F7021451-1387-4CA6-816F-3879F97B5CBC}" type="slidenum">
+              <a:rPr b="1" lang="en-US"/>
+              <a:t>20</a:t>
+            </a:fld>
+            <a:endParaRPr lang="en-US"/>
+          </a:p>
+        </p:txBody>
+      </p:sp>
+    </p:spTree>
+  </p:cSld>
+  <p:clrMapOvr>
+    <a:masterClrMapping/>
+  </p:clrMapOvr>
+</p:sld>
+</file>
+
+<file path=ppt/slides/slide21.xml><?xml version="1.0" encoding="utf-8"?>
+<p:sld xmlns:a="http://schemas.openxmlformats.org/drawingml/2006/main" xmlns:r="http://schemas.openxmlformats.org/officeDocument/2006/relationships" xmlns:p="http://schemas.openxmlformats.org/presentationml/2006/main">
+  <p:cSld name="Slide 21">
+    <p:bg>
+      <p:bgPr>
+        <a:solidFill>
+          <a:srgbClr val="EEF3FA"/>
+        </a:solidFill>
+      </p:bgPr>
+    </p:bg>
+    <p:spTree>
+      <p:nvGrpSpPr>
+        <p:cNvPr id="1" name=""/>
+        <p:cNvGrpSpPr/>
+        <p:nvPr/>
+      </p:nvGrpSpPr>
+      <p:grpSpPr>
+        <a:xfrm>
+          <a:off x="0" y="0"/>
+          <a:ext cx="0" cy="0"/>
+          <a:chOff x="0" y="0"/>
+          <a:chExt cx="0" cy="0"/>
+        </a:xfrm>
+      </p:grpSpPr>
+      <p:sp>
+        <p:nvSpPr>
+          <p:cNvPr id="2" name="Shape 0"/>
+          <p:cNvSpPr/>
+          <p:nvPr/>
+        </p:nvSpPr>
+        <p:spPr>
+          <a:xfrm>
+            <a:off x="0" y="6510528"/>
+            <a:ext cx="12191695" cy="347472"/>
+          </a:xfrm>
+          <a:prstGeom prst="rect">
+            <a:avLst/>
+          </a:prstGeom>
+          <a:solidFill>
+            <a:srgbClr val="FFFFFF"/>
+          </a:solidFill>
+          <a:ln w="6350">
+            <a:solidFill>
+              <a:srgbClr val="D8E0EC"/>
+            </a:solidFill>
+            <a:prstDash val="solid"/>
+          </a:ln>
+        </p:spPr>
+      </p:sp>
+      <p:pic>
+        <p:nvPicPr>
+          <p:cNvPr id="3" name="Image 0" descr="/www/wwwroot/rexar/gdsolar/docs/curso/slides/assets/logo-gdsolar.png">    </p:cNvPr>
+          <p:cNvPicPr>
+            <a:picLocks noChangeAspect="1"/>
+          </p:cNvPicPr>
+          <p:nvPr/>
+        </p:nvPicPr>
+        <p:blipFill>
+          <a:blip r:embed="rId1"/>
+          <a:stretch>
+            <a:fillRect/>
+          </a:stretch>
+        </p:blipFill>
+        <p:spPr>
+          <a:xfrm>
+            <a:off x="548640" y="6547104"/>
+            <a:ext cx="274320" cy="274320"/>
+          </a:xfrm>
+          <a:prstGeom prst="rect">
+            <a:avLst/>
+          </a:prstGeom>
+        </p:spPr>
+      </p:pic>
+      <p:sp>
+        <p:nvSpPr>
+          <p:cNvPr id="4" name="Text 1"/>
+          <p:cNvSpPr/>
+          <p:nvPr/>
+        </p:nvSpPr>
+        <p:spPr>
+          <a:xfrm>
+            <a:off x="886968" y="6528816"/>
+            <a:ext cx="6400800" cy="310896"/>
+          </a:xfrm>
+          <a:prstGeom prst="rect">
+            <a:avLst/>
+          </a:prstGeom>
+          <a:noFill/>
+          <a:ln/>
+        </p:spPr>
+        <p:txBody>
+          <a:bodyPr wrap="square" rtlCol="0" anchor="ctr"/>
+          <a:lstStyle/>
+          <a:p>
+            <a:pPr indent="0" marL="0">
+              <a:buNone/>
+            </a:pPr>
+            <a:r>
+              <a:rPr lang="en-US" sz="900" b="1" dirty="0">
+                <a:solidFill>
+                  <a:srgbClr val="64748B"/>
+                </a:solidFill>
+                <a:latin typeface="Arial" pitchFamily="34" charset="0"/>
+                <a:ea typeface="Arial" pitchFamily="34" charset="-122"/>
+                <a:cs typeface="Arial" pitchFamily="34" charset="-120"/>
+              </a:rPr>
+              <a:t>GD Solar  ·  Formação em Energia por Assinatura</a:t>
+            </a:r>
+            <a:endParaRPr lang="en-US" sz="900" dirty="0"/>
+          </a:p>
+        </p:txBody>
+      </p:sp>
+      <p:sp>
+        <p:nvSpPr>
+          <p:cNvPr id="5" name="Text 2"/>
+          <p:cNvSpPr/>
+          <p:nvPr/>
+        </p:nvSpPr>
+        <p:spPr>
+          <a:xfrm>
+            <a:off x="7132320" y="6528816"/>
+            <a:ext cx="4023360" cy="310896"/>
+          </a:xfrm>
+          <a:prstGeom prst="rect">
+            <a:avLst/>
+          </a:prstGeom>
+          <a:noFill/>
+          <a:ln/>
+        </p:spPr>
+        <p:txBody>
+          <a:bodyPr wrap="square" rtlCol="0" anchor="ctr"/>
+          <a:lstStyle/>
+          <a:p>
+            <a:pPr algn="r" indent="0" marL="0">
+              <a:buNone/>
+            </a:pPr>
+            <a:r>
+              <a:rPr lang="en-US" sz="900" dirty="0">
+                <a:solidFill>
+                  <a:srgbClr val="64748B"/>
+                </a:solidFill>
+                <a:latin typeface="Arial" pitchFamily="34" charset="0"/>
+                <a:ea typeface="Arial" pitchFamily="34" charset="-122"/>
+                <a:cs typeface="Arial" pitchFamily="34" charset="-120"/>
+              </a:rPr>
+              <a:t>M0 · Teste rápido</a:t>
+            </a:r>
+            <a:endParaRPr lang="en-US" sz="900" dirty="0"/>
+          </a:p>
+        </p:txBody>
+      </p:sp>
+      <p:sp>
+        <p:nvSpPr>
+          <p:cNvPr id="6" name="Shape 3"/>
+          <p:cNvSpPr/>
+          <p:nvPr/>
+        </p:nvSpPr>
+        <p:spPr>
+          <a:xfrm>
+            <a:off x="548640" y="384048"/>
+            <a:ext cx="82296" cy="658368"/>
+          </a:xfrm>
+          <a:prstGeom prst="rect">
+            <a:avLst/>
+          </a:prstGeom>
+          <a:solidFill>
+            <a:srgbClr val="F7A23B"/>
+          </a:solidFill>
+          <a:ln/>
+        </p:spPr>
+      </p:sp>
+      <p:sp>
+        <p:nvSpPr>
+          <p:cNvPr id="7" name="Text 4"/>
+          <p:cNvSpPr/>
+          <p:nvPr/>
+        </p:nvSpPr>
+        <p:spPr>
+          <a:xfrm>
+            <a:off x="777240" y="292608"/>
+            <a:ext cx="10972800" cy="274320"/>
+          </a:xfrm>
+          <a:prstGeom prst="rect">
+            <a:avLst/>
+          </a:prstGeom>
+          <a:noFill/>
+          <a:ln/>
+        </p:spPr>
+        <p:txBody>
+          <a:bodyPr wrap="square" rtlCol="0" anchor="ctr"/>
+          <a:lstStyle/>
+          <a:p>
+            <a:pPr indent="0" marL="0">
+              <a:buNone/>
+            </a:pPr>
+            <a:r>
+              <a:rPr lang="en-US" sz="1000" b="1" spc="100" kern="0" dirty="0">
+                <a:solidFill>
+                  <a:srgbClr val="F7A23B"/>
+                </a:solidFill>
+                <a:latin typeface="Arial" pitchFamily="34" charset="0"/>
+                <a:ea typeface="Arial" pitchFamily="34" charset="-122"/>
+                <a:cs typeface="Arial" pitchFamily="34" charset="-120"/>
+              </a:rPr>
+              <a:t>CONFIRA SUAS RESPOSTAS</a:t>
+            </a:r>
+            <a:endParaRPr lang="en-US" sz="1000" dirty="0"/>
+          </a:p>
+        </p:txBody>
+      </p:sp>
+      <p:sp>
+        <p:nvSpPr>
+          <p:cNvPr id="8" name="Text 5"/>
+          <p:cNvSpPr/>
+          <p:nvPr/>
+        </p:nvSpPr>
+        <p:spPr>
+          <a:xfrm>
+            <a:off x="777240" y="530352"/>
+            <a:ext cx="10881360" cy="566928"/>
+          </a:xfrm>
+          <a:prstGeom prst="rect">
+            <a:avLst/>
+          </a:prstGeom>
+          <a:noFill/>
+          <a:ln/>
+        </p:spPr>
+        <p:txBody>
+          <a:bodyPr wrap="square" rtlCol="0" anchor="ctr">
+            <a:normAutofit/>
+          </a:bodyPr>
+          <a:lstStyle/>
+          <a:p>
+            <a:pPr indent="0" marL="0">
+              <a:buNone/>
+            </a:pPr>
+            <a:r>
+              <a:rPr lang="en-US" sz="2600" b="1" dirty="0">
+                <a:solidFill>
+                  <a:srgbClr val="1B3A6B"/>
+                </a:solidFill>
+                <a:latin typeface="Arial" pitchFamily="34" charset="0"/>
+                <a:ea typeface="Arial" pitchFamily="34" charset="-122"/>
+                <a:cs typeface="Arial" pitchFamily="34" charset="-120"/>
+              </a:rPr>
+              <a:t>Gabarito do teste rápido</a:t>
+            </a:r>
+            <a:endParaRPr lang="en-US" sz="2600" dirty="0"/>
+          </a:p>
+        </p:txBody>
+      </p:sp>
+      <p:sp>
+        <p:nvSpPr>
+          <p:cNvPr id="9" name="Shape 6"/>
+          <p:cNvSpPr/>
+          <p:nvPr/>
+        </p:nvSpPr>
+        <p:spPr>
+          <a:xfrm>
+            <a:off x="548640" y="1325880"/>
+            <a:ext cx="3544824" cy="2331720"/>
+          </a:xfrm>
+          <a:prstGeom prst="roundRect">
+            <a:avLst>
+              <a:gd name="adj" fmla="val 3137"/>
+            </a:avLst>
+          </a:prstGeom>
+          <a:solidFill>
+            <a:srgbClr val="FFFFFF"/>
+          </a:solidFill>
+          <a:ln w="9525">
+            <a:solidFill>
+              <a:srgbClr val="D8E0EC"/>
+            </a:solidFill>
+            <a:prstDash val="solid"/>
+          </a:ln>
+          <a:effectLst>
+            <a:outerShdw sx="100000" sy="100000" kx="0" ky="0" algn="bl" rotWithShape="0" blurRad="38100" dist="12700" dir="5400000">
+              <a:srgbClr val="000000">
+                <a:alpha val="8000"/>
+              </a:srgbClr>
+            </a:outerShdw>
+          </a:effectLst>
+        </p:spPr>
+      </p:sp>
+      <p:sp>
+        <p:nvSpPr>
+          <p:cNvPr id="10" name="Shape 7"/>
+          <p:cNvSpPr/>
+          <p:nvPr/>
+        </p:nvSpPr>
+        <p:spPr>
+          <a:xfrm>
+            <a:off x="731520" y="1508760"/>
+            <a:ext cx="457200" cy="457200"/>
+          </a:xfrm>
+          <a:prstGeom prst="ellipse">
+            <a:avLst/>
+          </a:prstGeom>
+          <a:solidFill>
+            <a:srgbClr val="1B3A6B"/>
+          </a:solidFill>
+          <a:ln/>
+        </p:spPr>
+      </p:sp>
+      <p:sp>
+        <p:nvSpPr>
+          <p:cNvPr id="11" name="Text 8"/>
+          <p:cNvSpPr/>
+          <p:nvPr/>
+        </p:nvSpPr>
+        <p:spPr>
+          <a:xfrm>
+            <a:off x="731520" y="1508760"/>
+            <a:ext cx="457200" cy="457200"/>
+          </a:xfrm>
+          <a:prstGeom prst="rect">
+            <a:avLst/>
+          </a:prstGeom>
+          <a:noFill/>
+          <a:ln/>
+        </p:spPr>
+        <p:txBody>
+          <a:bodyPr wrap="square" rtlCol="0" anchor="ctr"/>
+          <a:lstStyle/>
+          <a:p>
+            <a:pPr algn="ctr" indent="0" marL="0">
+              <a:buNone/>
+            </a:pPr>
+            <a:r>
+              <a:rPr lang="en-US" sz="1400" b="1" dirty="0">
+                <a:solidFill>
+                  <a:srgbClr val="FFFFFF"/>
+                </a:solidFill>
+                <a:latin typeface="Arial" pitchFamily="34" charset="0"/>
+                <a:ea typeface="Arial" pitchFamily="34" charset="-122"/>
+                <a:cs typeface="Arial" pitchFamily="34" charset="-120"/>
+              </a:rPr>
+              <a:t>1</a:t>
+            </a:r>
+            <a:endParaRPr lang="en-US" sz="1400" dirty="0"/>
+          </a:p>
+        </p:txBody>
+      </p:sp>
+      <p:sp>
+        <p:nvSpPr>
+          <p:cNvPr id="12" name="Text 9"/>
+          <p:cNvSpPr/>
+          <p:nvPr/>
+        </p:nvSpPr>
+        <p:spPr>
+          <a:xfrm>
+            <a:off x="1325880" y="1435608"/>
+            <a:ext cx="2630424" cy="2112264"/>
+          </a:xfrm>
+          <a:prstGeom prst="rect">
+            <a:avLst/>
+          </a:prstGeom>
+          <a:noFill/>
+          <a:ln/>
+        </p:spPr>
+        <p:txBody>
+          <a:bodyPr wrap="square" rtlCol="0" anchor="ctr">
+            <a:normAutofit/>
+          </a:bodyPr>
+          <a:lstStyle/>
+          <a:p>
+            <a:pPr indent="0" marL="0">
+              <a:buNone/>
+            </a:pPr>
+            <a:r>
+              <a:rPr lang="en-US" sz="1800" dirty="0">
+                <a:solidFill>
+                  <a:srgbClr val="1F2937"/>
+                </a:solidFill>
+                <a:latin typeface="Arial" pitchFamily="34" charset="0"/>
+                <a:ea typeface="Arial" pitchFamily="34" charset="-122"/>
+                <a:cs typeface="Arial" pitchFamily="34" charset="-120"/>
+              </a:rPr>
+              <a:t>A) Receita mensal recorrente sobre a energia compensada dos clientes</a:t>
+            </a:r>
+            <a:endParaRPr lang="en-US" sz="1800" dirty="0"/>
+          </a:p>
+        </p:txBody>
+      </p:sp>
+      <p:sp>
+        <p:nvSpPr>
+          <p:cNvPr id="13" name="Shape 10"/>
+          <p:cNvSpPr/>
+          <p:nvPr/>
+        </p:nvSpPr>
+        <p:spPr>
+          <a:xfrm>
+            <a:off x="4322064" y="1325880"/>
+            <a:ext cx="3544824" cy="2331720"/>
+          </a:xfrm>
+          <a:prstGeom prst="roundRect">
+            <a:avLst>
+              <a:gd name="adj" fmla="val 3137"/>
+            </a:avLst>
+          </a:prstGeom>
+          <a:solidFill>
+            <a:srgbClr val="FFFFFF"/>
+          </a:solidFill>
+          <a:ln w="9525">
+            <a:solidFill>
+              <a:srgbClr val="D8E0EC"/>
+            </a:solidFill>
+            <a:prstDash val="solid"/>
+          </a:ln>
+          <a:effectLst>
+            <a:outerShdw sx="100000" sy="100000" kx="0" ky="0" algn="bl" rotWithShape="0" blurRad="38100" dist="12700" dir="5400000">
+              <a:srgbClr val="000000">
+                <a:alpha val="8000"/>
+              </a:srgbClr>
+            </a:outerShdw>
+          </a:effectLst>
+        </p:spPr>
+      </p:sp>
+      <p:sp>
+        <p:nvSpPr>
+          <p:cNvPr id="14" name="Shape 11"/>
+          <p:cNvSpPr/>
+          <p:nvPr/>
+        </p:nvSpPr>
+        <p:spPr>
+          <a:xfrm>
+            <a:off x="4504944" y="1508760"/>
+            <a:ext cx="457200" cy="457200"/>
+          </a:xfrm>
+          <a:prstGeom prst="ellipse">
+            <a:avLst/>
+          </a:prstGeom>
+          <a:solidFill>
+            <a:srgbClr val="F7A23B"/>
+          </a:solidFill>
+          <a:ln/>
+        </p:spPr>
+      </p:sp>
+      <p:sp>
+        <p:nvSpPr>
+          <p:cNvPr id="15" name="Text 12"/>
+          <p:cNvSpPr/>
+          <p:nvPr/>
+        </p:nvSpPr>
+        <p:spPr>
+          <a:xfrm>
+            <a:off x="4504944" y="1508760"/>
+            <a:ext cx="457200" cy="457200"/>
+          </a:xfrm>
+          <a:prstGeom prst="rect">
+            <a:avLst/>
+          </a:prstGeom>
+          <a:noFill/>
+          <a:ln/>
+        </p:spPr>
+        <p:txBody>
+          <a:bodyPr wrap="square" rtlCol="0" anchor="ctr"/>
+          <a:lstStyle/>
+          <a:p>
+            <a:pPr algn="ctr" indent="0" marL="0">
+              <a:buNone/>
+            </a:pPr>
+            <a:r>
+              <a:rPr lang="en-US" sz="1400" b="1" dirty="0">
+                <a:solidFill>
+                  <a:srgbClr val="FFFFFF"/>
+                </a:solidFill>
+                <a:latin typeface="Arial" pitchFamily="34" charset="0"/>
+                <a:ea typeface="Arial" pitchFamily="34" charset="-122"/>
+                <a:cs typeface="Arial" pitchFamily="34" charset="-120"/>
+              </a:rPr>
+              <a:t>2</a:t>
+            </a:r>
+            <a:endParaRPr lang="en-US" sz="1400" dirty="0"/>
+          </a:p>
+        </p:txBody>
+      </p:sp>
+      <p:sp>
+        <p:nvSpPr>
+          <p:cNvPr id="16" name="Text 13"/>
+          <p:cNvSpPr/>
+          <p:nvPr/>
+        </p:nvSpPr>
+        <p:spPr>
+          <a:xfrm>
+            <a:off x="5099304" y="1435608"/>
+            <a:ext cx="2630424" cy="2112264"/>
+          </a:xfrm>
+          <a:prstGeom prst="rect">
+            <a:avLst/>
+          </a:prstGeom>
+          <a:noFill/>
+          <a:ln/>
+        </p:spPr>
+        <p:txBody>
+          <a:bodyPr wrap="square" rtlCol="0" anchor="ctr">
+            <a:normAutofit/>
+          </a:bodyPr>
+          <a:lstStyle/>
+          <a:p>
+            <a:pPr indent="0" marL="0">
+              <a:buNone/>
+            </a:pPr>
+            <a:r>
+              <a:rPr lang="en-US" sz="1800" dirty="0">
+                <a:solidFill>
+                  <a:srgbClr val="1F2937"/>
+                </a:solidFill>
+                <a:latin typeface="Arial" pitchFamily="34" charset="0"/>
+                <a:ea typeface="Arial" pitchFamily="34" charset="-122"/>
+                <a:cs typeface="Arial" pitchFamily="34" charset="-120"/>
+              </a:rPr>
+              <a:t>C) 4</a:t>
+            </a:r>
+            <a:endParaRPr lang="en-US" sz="1800" dirty="0"/>
+          </a:p>
+        </p:txBody>
+      </p:sp>
+      <p:sp>
+        <p:nvSpPr>
+          <p:cNvPr id="17" name="Shape 14"/>
+          <p:cNvSpPr/>
+          <p:nvPr/>
+        </p:nvSpPr>
+        <p:spPr>
+          <a:xfrm>
+            <a:off x="8095488" y="1325880"/>
+            <a:ext cx="3544824" cy="2331720"/>
+          </a:xfrm>
+          <a:prstGeom prst="roundRect">
+            <a:avLst>
+              <a:gd name="adj" fmla="val 3137"/>
+            </a:avLst>
+          </a:prstGeom>
+          <a:solidFill>
+            <a:srgbClr val="FFFFFF"/>
+          </a:solidFill>
+          <a:ln w="9525">
+            <a:solidFill>
+              <a:srgbClr val="D8E0EC"/>
+            </a:solidFill>
+            <a:prstDash val="solid"/>
+          </a:ln>
+          <a:effectLst>
+            <a:outerShdw sx="100000" sy="100000" kx="0" ky="0" algn="bl" rotWithShape="0" blurRad="38100" dist="12700" dir="5400000">
+              <a:srgbClr val="000000">
+                <a:alpha val="8000"/>
+              </a:srgbClr>
+            </a:outerShdw>
+          </a:effectLst>
+        </p:spPr>
+      </p:sp>
+      <p:sp>
+        <p:nvSpPr>
+          <p:cNvPr id="18" name="Shape 15"/>
+          <p:cNvSpPr/>
+          <p:nvPr/>
+        </p:nvSpPr>
+        <p:spPr>
+          <a:xfrm>
+            <a:off x="8278368" y="1508760"/>
+            <a:ext cx="457200" cy="457200"/>
+          </a:xfrm>
+          <a:prstGeom prst="ellipse">
+            <a:avLst/>
+          </a:prstGeom>
+          <a:solidFill>
+            <a:srgbClr val="1B3A6B"/>
+          </a:solidFill>
+          <a:ln/>
+        </p:spPr>
+      </p:sp>
+      <p:sp>
+        <p:nvSpPr>
+          <p:cNvPr id="19" name="Text 16"/>
+          <p:cNvSpPr/>
+          <p:nvPr/>
+        </p:nvSpPr>
+        <p:spPr>
+          <a:xfrm>
+            <a:off x="8278368" y="1508760"/>
+            <a:ext cx="457200" cy="457200"/>
+          </a:xfrm>
+          <a:prstGeom prst="rect">
+            <a:avLst/>
+          </a:prstGeom>
+          <a:noFill/>
+          <a:ln/>
+        </p:spPr>
+        <p:txBody>
+          <a:bodyPr wrap="square" rtlCol="0" anchor="ctr"/>
+          <a:lstStyle/>
+          <a:p>
+            <a:pPr algn="ctr" indent="0" marL="0">
+              <a:buNone/>
+            </a:pPr>
+            <a:r>
+              <a:rPr lang="en-US" sz="1400" b="1" dirty="0">
+                <a:solidFill>
+                  <a:srgbClr val="FFFFFF"/>
+                </a:solidFill>
+                <a:latin typeface="Arial" pitchFamily="34" charset="0"/>
+                <a:ea typeface="Arial" pitchFamily="34" charset="-122"/>
+                <a:cs typeface="Arial" pitchFamily="34" charset="-120"/>
+              </a:rPr>
+              <a:t>3</a:t>
+            </a:r>
+            <a:endParaRPr lang="en-US" sz="1400" dirty="0"/>
+          </a:p>
+        </p:txBody>
+      </p:sp>
+      <p:sp>
+        <p:nvSpPr>
+          <p:cNvPr id="20" name="Text 17"/>
+          <p:cNvSpPr/>
+          <p:nvPr/>
+        </p:nvSpPr>
+        <p:spPr>
+          <a:xfrm>
+            <a:off x="8872728" y="1435608"/>
+            <a:ext cx="2630424" cy="2112264"/>
+          </a:xfrm>
+          <a:prstGeom prst="rect">
+            <a:avLst/>
+          </a:prstGeom>
+          <a:noFill/>
+          <a:ln/>
+        </p:spPr>
+        <p:txBody>
+          <a:bodyPr wrap="square" rtlCol="0" anchor="ctr">
+            <a:normAutofit/>
+          </a:bodyPr>
+          <a:lstStyle/>
+          <a:p>
+            <a:pPr indent="0" marL="0">
+              <a:buNone/>
+            </a:pPr>
+            <a:r>
+              <a:rPr lang="en-US" sz="1800" dirty="0">
+                <a:solidFill>
+                  <a:srgbClr val="1F2937"/>
+                </a:solidFill>
+                <a:latin typeface="Arial" pitchFamily="34" charset="0"/>
+                <a:ea typeface="Arial" pitchFamily="34" charset="-122"/>
+                <a:cs typeface="Arial" pitchFamily="34" charset="-120"/>
+              </a:rPr>
+              <a:t>A) O dono da usina</a:t>
+            </a:r>
+            <a:endParaRPr lang="en-US" sz="1800" dirty="0"/>
+          </a:p>
+        </p:txBody>
+      </p:sp>
+      <p:sp>
+        <p:nvSpPr>
+          <p:cNvPr id="21" name="Shape 18"/>
+          <p:cNvSpPr/>
+          <p:nvPr/>
+        </p:nvSpPr>
+        <p:spPr>
+          <a:xfrm>
+            <a:off x="548640" y="3886200"/>
+            <a:ext cx="3544824" cy="2331720"/>
+          </a:xfrm>
+          <a:prstGeom prst="roundRect">
+            <a:avLst>
+              <a:gd name="adj" fmla="val 3137"/>
+            </a:avLst>
+          </a:prstGeom>
+          <a:solidFill>
+            <a:srgbClr val="FFFFFF"/>
+          </a:solidFill>
+          <a:ln w="9525">
+            <a:solidFill>
+              <a:srgbClr val="D8E0EC"/>
+            </a:solidFill>
+            <a:prstDash val="solid"/>
+          </a:ln>
+          <a:effectLst>
+            <a:outerShdw sx="100000" sy="100000" kx="0" ky="0" algn="bl" rotWithShape="0" blurRad="38100" dist="12700" dir="5400000">
+              <a:srgbClr val="000000">
+                <a:alpha val="8000"/>
+              </a:srgbClr>
+            </a:outerShdw>
+          </a:effectLst>
+        </p:spPr>
+      </p:sp>
+      <p:sp>
+        <p:nvSpPr>
+          <p:cNvPr id="22" name="Shape 19"/>
+          <p:cNvSpPr/>
+          <p:nvPr/>
+        </p:nvSpPr>
+        <p:spPr>
+          <a:xfrm>
+            <a:off x="731520" y="4069080"/>
+            <a:ext cx="457200" cy="457200"/>
+          </a:xfrm>
+          <a:prstGeom prst="ellipse">
+            <a:avLst/>
+          </a:prstGeom>
+          <a:solidFill>
+            <a:srgbClr val="F7A23B"/>
+          </a:solidFill>
+          <a:ln/>
+        </p:spPr>
+      </p:sp>
+      <p:sp>
+        <p:nvSpPr>
+          <p:cNvPr id="23" name="Text 20"/>
+          <p:cNvSpPr/>
+          <p:nvPr/>
+        </p:nvSpPr>
+        <p:spPr>
+          <a:xfrm>
+            <a:off x="731520" y="4069080"/>
+            <a:ext cx="457200" cy="457200"/>
+          </a:xfrm>
+          <a:prstGeom prst="rect">
+            <a:avLst/>
+          </a:prstGeom>
+          <a:noFill/>
+          <a:ln/>
+        </p:spPr>
+        <p:txBody>
+          <a:bodyPr wrap="square" rtlCol="0" anchor="ctr"/>
+          <a:lstStyle/>
+          <a:p>
+            <a:pPr algn="ctr" indent="0" marL="0">
+              <a:buNone/>
+            </a:pPr>
+            <a:r>
+              <a:rPr lang="en-US" sz="1400" b="1" dirty="0">
+                <a:solidFill>
+                  <a:srgbClr val="FFFFFF"/>
+                </a:solidFill>
+                <a:latin typeface="Arial" pitchFamily="34" charset="0"/>
+                <a:ea typeface="Arial" pitchFamily="34" charset="-122"/>
+                <a:cs typeface="Arial" pitchFamily="34" charset="-120"/>
+              </a:rPr>
+              <a:t>4</a:t>
+            </a:r>
+            <a:endParaRPr lang="en-US" sz="1400" dirty="0"/>
+          </a:p>
+        </p:txBody>
+      </p:sp>
+      <p:sp>
+        <p:nvSpPr>
+          <p:cNvPr id="24" name="Text 21"/>
+          <p:cNvSpPr/>
+          <p:nvPr/>
+        </p:nvSpPr>
+        <p:spPr>
+          <a:xfrm>
+            <a:off x="1325880" y="3995928"/>
+            <a:ext cx="2630424" cy="2112264"/>
+          </a:xfrm>
+          <a:prstGeom prst="rect">
+            <a:avLst/>
+          </a:prstGeom>
+          <a:noFill/>
+          <a:ln/>
+        </p:spPr>
+        <p:txBody>
+          <a:bodyPr wrap="square" rtlCol="0" anchor="ctr">
+            <a:normAutofit/>
+          </a:bodyPr>
+          <a:lstStyle/>
+          <a:p>
+            <a:pPr indent="0" marL="0">
+              <a:buNone/>
+            </a:pPr>
+            <a:r>
+              <a:rPr lang="en-US" sz="1800" dirty="0">
+                <a:solidFill>
+                  <a:srgbClr val="1F2937"/>
+                </a:solidFill>
+                <a:latin typeface="Arial" pitchFamily="34" charset="0"/>
+                <a:ea typeface="Arial" pitchFamily="34" charset="-122"/>
+                <a:cs typeface="Arial" pitchFamily="34" charset="-120"/>
+              </a:rPr>
+              <a:t>B) Apenas os clientes da própria carteira</a:t>
+            </a:r>
+            <a:endParaRPr lang="en-US" sz="1800" dirty="0"/>
+          </a:p>
+        </p:txBody>
+      </p:sp>
+      <p:sp>
+        <p:nvSpPr>
+          <p:cNvPr id="25" name="Shape 22"/>
+          <p:cNvSpPr/>
+          <p:nvPr/>
+        </p:nvSpPr>
+        <p:spPr>
+          <a:xfrm>
+            <a:off x="4322064" y="3886200"/>
+            <a:ext cx="3544824" cy="2331720"/>
+          </a:xfrm>
+          <a:prstGeom prst="roundRect">
+            <a:avLst>
+              <a:gd name="adj" fmla="val 3137"/>
+            </a:avLst>
+          </a:prstGeom>
+          <a:solidFill>
+            <a:srgbClr val="FFFFFF"/>
+          </a:solidFill>
+          <a:ln w="9525">
+            <a:solidFill>
+              <a:srgbClr val="D8E0EC"/>
+            </a:solidFill>
+            <a:prstDash val="solid"/>
+          </a:ln>
+          <a:effectLst>
+            <a:outerShdw sx="100000" sy="100000" kx="0" ky="0" algn="bl" rotWithShape="0" blurRad="38100" dist="12700" dir="5400000">
+              <a:srgbClr val="000000">
+                <a:alpha val="8000"/>
+              </a:srgbClr>
+            </a:outerShdw>
+          </a:effectLst>
+        </p:spPr>
+      </p:sp>
+      <p:sp>
+        <p:nvSpPr>
+          <p:cNvPr id="26" name="Shape 23"/>
+          <p:cNvSpPr/>
+          <p:nvPr/>
+        </p:nvSpPr>
+        <p:spPr>
+          <a:xfrm>
+            <a:off x="4504944" y="4069080"/>
+            <a:ext cx="457200" cy="457200"/>
+          </a:xfrm>
+          <a:prstGeom prst="ellipse">
+            <a:avLst/>
+          </a:prstGeom>
+          <a:solidFill>
+            <a:srgbClr val="1B3A6B"/>
+          </a:solidFill>
+          <a:ln/>
+        </p:spPr>
+      </p:sp>
+      <p:sp>
+        <p:nvSpPr>
+          <p:cNvPr id="27" name="Text 24"/>
+          <p:cNvSpPr/>
+          <p:nvPr/>
+        </p:nvSpPr>
+        <p:spPr>
+          <a:xfrm>
+            <a:off x="4504944" y="4069080"/>
+            <a:ext cx="457200" cy="457200"/>
+          </a:xfrm>
+          <a:prstGeom prst="rect">
+            <a:avLst/>
+          </a:prstGeom>
+          <a:noFill/>
+          <a:ln/>
+        </p:spPr>
+        <p:txBody>
+          <a:bodyPr wrap="square" rtlCol="0" anchor="ctr"/>
+          <a:lstStyle/>
+          <a:p>
+            <a:pPr algn="ctr" indent="0" marL="0">
+              <a:buNone/>
+            </a:pPr>
+            <a:r>
+              <a:rPr lang="en-US" sz="1400" b="1" dirty="0">
+                <a:solidFill>
+                  <a:srgbClr val="FFFFFF"/>
+                </a:solidFill>
+                <a:latin typeface="Arial" pitchFamily="34" charset="0"/>
+                <a:ea typeface="Arial" pitchFamily="34" charset="-122"/>
+                <a:cs typeface="Arial" pitchFamily="34" charset="-120"/>
+              </a:rPr>
+              <a:t>5</a:t>
+            </a:r>
+            <a:endParaRPr lang="en-US" sz="1400" dirty="0"/>
+          </a:p>
+        </p:txBody>
+      </p:sp>
+      <p:sp>
+        <p:nvSpPr>
+          <p:cNvPr id="28" name="Text 25"/>
+          <p:cNvSpPr/>
+          <p:nvPr/>
+        </p:nvSpPr>
+        <p:spPr>
+          <a:xfrm>
+            <a:off x="5099304" y="3995928"/>
+            <a:ext cx="2630424" cy="2112264"/>
+          </a:xfrm>
+          <a:prstGeom prst="rect">
+            <a:avLst/>
+          </a:prstGeom>
+          <a:noFill/>
+          <a:ln/>
+        </p:spPr>
+        <p:txBody>
+          <a:bodyPr wrap="square" rtlCol="0" anchor="ctr">
+            <a:normAutofit/>
+          </a:bodyPr>
+          <a:lstStyle/>
+          <a:p>
+            <a:pPr indent="0" marL="0">
+              <a:buNone/>
+            </a:pPr>
+            <a:r>
+              <a:rPr lang="en-US" sz="1800" dirty="0">
+                <a:solidFill>
+                  <a:srgbClr val="1F2937"/>
+                </a:solidFill>
+                <a:latin typeface="Arial" pitchFamily="34" charset="0"/>
+                <a:ea typeface="Arial" pitchFamily="34" charset="-122"/>
+                <a:cs typeface="Arial" pitchFamily="34" charset="-120"/>
+              </a:rPr>
+              <a:t>A) Uma operação completa simulada com usina, clientes, 3 meses de faturamento e relatório executivo</a:t>
+            </a:r>
+            <a:endParaRPr lang="en-US" sz="1800" dirty="0"/>
+          </a:p>
+        </p:txBody>
+      </p:sp>
+      <p:sp>
+        <p:nvSpPr>
+          <p:cNvPr id="25" name="Slide Number Placeholder 0"/>
+          <p:cNvSpPr>
+            <a:spLocks noGrp="1"/>
+          </p:cNvSpPr>
+          <p:nvPr>
+            <p:ph type="sldNum" sz="quarter" idx="4294967295"/>
+          </p:nvPr>
+        </p:nvSpPr>
+        <p:spPr>
+          <a:xfrm>
+            <a:off x="11292840" y="6556248"/>
+            <a:ext cx="548640" cy="256032"/>
+          </a:xfrm>
+          <a:prstGeom prst="rect">
+            <a:avLst/>
+          </a:prstGeom>
+          <a:extLst>
+            <a:ext uri="{C572A759-6A51-4108-AA02-DFA0A04FC94B}">
+              <ma14:wrappingTextBoxFlag xmlns:ma14="http://schemas.microsoft.com/office/mac/drawingml/2011/main" val="0"/>
+            </a:ext>
+          </a:extLst>
+        </p:spPr>
+        <p:txBody>
+          <a:bodyPr/>
+          <a:lstStyle>
+            <a:lvl1pPr>
+              <a:defRPr sz="900">
+                <a:solidFill>
+                  <a:srgbClr val="1B3A6B"/>
+                </a:solidFill>
+                <a:latin typeface="Arial"/>
+                <a:ea typeface="Arial"/>
+                <a:cs typeface="Arial"/>
+              </a:defRPr>
+            </a:lvl1pPr>
+          </a:lstStyle>
+          <a:p>
+            <a:pPr algn="r"/>
+            <a:fld id="{F7021451-1387-4CA6-816F-3879F97B5CBC}" type="slidenum">
+              <a:rPr b="1" lang="en-US"/>
+              <a:t>21</a:t>
+            </a:fld>
+            <a:endParaRPr lang="en-US"/>
+          </a:p>
+        </p:txBody>
+      </p:sp>
+    </p:spTree>
+  </p:cSld>
+  <p:clrMapOvr>
+    <a:masterClrMapping/>
+  </p:clrMapOvr>
+</p:sld>
+</file>
+
+<file path=ppt/slides/slide22.xml><?xml version="1.0" encoding="utf-8"?>
+<p:sld xmlns:a="http://schemas.openxmlformats.org/drawingml/2006/main" xmlns:r="http://schemas.openxmlformats.org/officeDocument/2006/relationships" xmlns:p="http://schemas.openxmlformats.org/presentationml/2006/main">
+  <p:cSld name="Slide 22">
+    <p:bg>
+      <p:bgPr>
+        <a:solidFill>
+          <a:srgbClr val="F6F8FB"/>
+        </a:solidFill>
+      </p:bgPr>
+    </p:bg>
+    <p:spTree>
+      <p:nvGrpSpPr>
+        <p:cNvPr id="1" name=""/>
+        <p:cNvGrpSpPr/>
+        <p:nvPr/>
+      </p:nvGrpSpPr>
+      <p:grpSpPr>
+        <a:xfrm>
+          <a:off x="0" y="0"/>
+          <a:ext cx="0" cy="0"/>
+          <a:chOff x="0" y="0"/>
+          <a:chExt cx="0" cy="0"/>
+        </a:xfrm>
+      </p:grpSpPr>
+      <p:sp>
+        <p:nvSpPr>
+          <p:cNvPr id="2" name="Shape 0"/>
+          <p:cNvSpPr/>
+          <p:nvPr/>
+        </p:nvSpPr>
+        <p:spPr>
+          <a:xfrm>
+            <a:off x="0" y="6510528"/>
+            <a:ext cx="12191695" cy="347472"/>
+          </a:xfrm>
+          <a:prstGeom prst="rect">
+            <a:avLst/>
+          </a:prstGeom>
+          <a:solidFill>
+            <a:srgbClr val="FFFFFF"/>
+          </a:solidFill>
+          <a:ln w="6350">
+            <a:solidFill>
+              <a:srgbClr val="D8E0EC"/>
+            </a:solidFill>
+            <a:prstDash val="solid"/>
+          </a:ln>
+        </p:spPr>
+      </p:sp>
+      <p:pic>
+        <p:nvPicPr>
+          <p:cNvPr id="3" name="Image 0" descr="/www/wwwroot/rexar/gdsolar/docs/curso/slides/assets/logo-gdsolar.png">    </p:cNvPr>
+          <p:cNvPicPr>
+            <a:picLocks noChangeAspect="1"/>
+          </p:cNvPicPr>
+          <p:nvPr/>
+        </p:nvPicPr>
+        <p:blipFill>
+          <a:blip r:embed="rId1"/>
+          <a:stretch>
+            <a:fillRect/>
+          </a:stretch>
+        </p:blipFill>
+        <p:spPr>
+          <a:xfrm>
+            <a:off x="548640" y="6547104"/>
+            <a:ext cx="274320" cy="274320"/>
+          </a:xfrm>
+          <a:prstGeom prst="rect">
+            <a:avLst/>
+          </a:prstGeom>
+        </p:spPr>
+      </p:pic>
+      <p:sp>
+        <p:nvSpPr>
+          <p:cNvPr id="4" name="Text 1"/>
+          <p:cNvSpPr/>
+          <p:nvPr/>
+        </p:nvSpPr>
+        <p:spPr>
+          <a:xfrm>
+            <a:off x="886968" y="6528816"/>
+            <a:ext cx="6400800" cy="310896"/>
+          </a:xfrm>
+          <a:prstGeom prst="rect">
+            <a:avLst/>
+          </a:prstGeom>
+          <a:noFill/>
+          <a:ln/>
+        </p:spPr>
+        <p:txBody>
+          <a:bodyPr wrap="square" rtlCol="0" anchor="ctr"/>
+          <a:lstStyle/>
+          <a:p>
+            <a:pPr indent="0" marL="0">
+              <a:buNone/>
+            </a:pPr>
+            <a:r>
+              <a:rPr lang="en-US" sz="900" b="1" dirty="0">
+                <a:solidFill>
+                  <a:srgbClr val="64748B"/>
+                </a:solidFill>
+                <a:latin typeface="Arial" pitchFamily="34" charset="0"/>
+                <a:ea typeface="Arial" pitchFamily="34" charset="-122"/>
+                <a:cs typeface="Arial" pitchFamily="34" charset="-120"/>
+              </a:rPr>
+              <a:t>GD Solar  ·  Formação em Energia por Assinatura</a:t>
+            </a:r>
+            <a:endParaRPr lang="en-US" sz="900" dirty="0"/>
+          </a:p>
+        </p:txBody>
+      </p:sp>
+      <p:sp>
+        <p:nvSpPr>
+          <p:cNvPr id="5" name="Text 2"/>
+          <p:cNvSpPr/>
+          <p:nvPr/>
+        </p:nvSpPr>
+        <p:spPr>
+          <a:xfrm>
+            <a:off x="7132320" y="6528816"/>
+            <a:ext cx="4023360" cy="310896"/>
+          </a:xfrm>
+          <a:prstGeom prst="rect">
+            <a:avLst/>
+          </a:prstGeom>
+          <a:noFill/>
+          <a:ln/>
+        </p:spPr>
+        <p:txBody>
+          <a:bodyPr wrap="square" rtlCol="0" anchor="ctr"/>
+          <a:lstStyle/>
+          <a:p>
+            <a:pPr algn="r" indent="0" marL="0">
+              <a:buNone/>
+            </a:pPr>
+            <a:r>
+              <a:rPr lang="en-US" sz="900" dirty="0">
+                <a:solidFill>
+                  <a:srgbClr val="64748B"/>
+                </a:solidFill>
+                <a:latin typeface="Arial" pitchFamily="34" charset="0"/>
+                <a:ea typeface="Arial" pitchFamily="34" charset="-122"/>
+                <a:cs typeface="Arial" pitchFamily="34" charset="-120"/>
+              </a:rPr>
+              <a:t>M0 · Fechamento</a:t>
+            </a:r>
+            <a:endParaRPr lang="en-US" sz="900" dirty="0"/>
+          </a:p>
+        </p:txBody>
+      </p:sp>
+      <p:sp>
+        <p:nvSpPr>
+          <p:cNvPr id="6" name="Shape 3"/>
+          <p:cNvSpPr/>
+          <p:nvPr/>
+        </p:nvSpPr>
+        <p:spPr>
+          <a:xfrm>
+            <a:off x="548640" y="384048"/>
+            <a:ext cx="82296" cy="658368"/>
+          </a:xfrm>
+          <a:prstGeom prst="rect">
+            <a:avLst/>
+          </a:prstGeom>
+          <a:solidFill>
+            <a:srgbClr val="F7A23B"/>
+          </a:solidFill>
+          <a:ln/>
+        </p:spPr>
+      </p:sp>
+      <p:sp>
+        <p:nvSpPr>
+          <p:cNvPr id="7" name="Text 4"/>
+          <p:cNvSpPr/>
+          <p:nvPr/>
+        </p:nvSpPr>
+        <p:spPr>
+          <a:xfrm>
+            <a:off x="777240" y="292608"/>
+            <a:ext cx="10972800" cy="274320"/>
+          </a:xfrm>
+          <a:prstGeom prst="rect">
+            <a:avLst/>
+          </a:prstGeom>
+          <a:noFill/>
+          <a:ln/>
+        </p:spPr>
+        <p:txBody>
+          <a:bodyPr wrap="square" rtlCol="0" anchor="ctr"/>
+          <a:lstStyle/>
+          <a:p>
+            <a:pPr indent="0" marL="0">
+              <a:buNone/>
+            </a:pPr>
+            <a:r>
+              <a:rPr lang="en-US" sz="1000" b="1" spc="100" kern="0" dirty="0">
+                <a:solidFill>
+                  <a:srgbClr val="F7A23B"/>
+                </a:solidFill>
+                <a:latin typeface="Arial" pitchFamily="34" charset="0"/>
+                <a:ea typeface="Arial" pitchFamily="34" charset="-122"/>
+                <a:cs typeface="Arial" pitchFamily="34" charset="-120"/>
+              </a:rPr>
+              <a:t>FECHAMENTO DO MÓDULO</a:t>
+            </a:r>
+            <a:endParaRPr lang="en-US" sz="1000" dirty="0"/>
+          </a:p>
+        </p:txBody>
+      </p:sp>
+      <p:sp>
+        <p:nvSpPr>
+          <p:cNvPr id="8" name="Text 5"/>
+          <p:cNvSpPr/>
+          <p:nvPr/>
+        </p:nvSpPr>
+        <p:spPr>
+          <a:xfrm>
+            <a:off x="777240" y="530352"/>
+            <a:ext cx="10881360" cy="566928"/>
+          </a:xfrm>
+          <a:prstGeom prst="rect">
+            <a:avLst/>
+          </a:prstGeom>
+          <a:noFill/>
+          <a:ln/>
+        </p:spPr>
+        <p:txBody>
+          <a:bodyPr wrap="square" rtlCol="0" anchor="ctr">
+            <a:normAutofit/>
+          </a:bodyPr>
+          <a:lstStyle/>
+          <a:p>
+            <a:pPr indent="0" marL="0">
+              <a:buNone/>
+            </a:pPr>
+            <a:r>
+              <a:rPr lang="en-US" sz="2600" b="1" dirty="0">
+                <a:solidFill>
+                  <a:srgbClr val="1B3A6B"/>
+                </a:solidFill>
+                <a:latin typeface="Arial" pitchFamily="34" charset="0"/>
+                <a:ea typeface="Arial" pitchFamily="34" charset="-122"/>
+                <a:cs typeface="Arial" pitchFamily="34" charset="-120"/>
+              </a:rPr>
+              <a:t>Pratique e entregue</a:t>
+            </a:r>
+            <a:endParaRPr lang="en-US" sz="2600" dirty="0"/>
+          </a:p>
+        </p:txBody>
+      </p:sp>
+      <p:sp>
+        <p:nvSpPr>
+          <p:cNvPr id="9" name="Shape 6"/>
+          <p:cNvSpPr/>
+          <p:nvPr/>
+        </p:nvSpPr>
+        <p:spPr>
+          <a:xfrm>
+            <a:off x="548640" y="1325880"/>
+            <a:ext cx="11091672" cy="4937760"/>
+          </a:xfrm>
+          <a:prstGeom prst="roundRect">
+            <a:avLst>
+              <a:gd name="adj" fmla="val 1852"/>
+            </a:avLst>
+          </a:prstGeom>
+          <a:solidFill>
+            <a:srgbClr val="1B3A6B"/>
+          </a:solidFill>
+          <a:ln/>
+        </p:spPr>
+      </p:sp>
+      <p:sp>
+        <p:nvSpPr>
+          <p:cNvPr id="10" name="Text 7"/>
+          <p:cNvSpPr/>
+          <p:nvPr/>
+        </p:nvSpPr>
+        <p:spPr>
+          <a:xfrm>
+            <a:off x="868680" y="1554480"/>
+            <a:ext cx="10451592" cy="4480560"/>
+          </a:xfrm>
+          <a:prstGeom prst="rect">
+            <a:avLst/>
+          </a:prstGeom>
+          <a:noFill/>
+          <a:ln/>
+        </p:spPr>
+        <p:txBody>
+          <a:bodyPr wrap="square" rtlCol="0" anchor="t">
+            <a:normAutofit/>
+          </a:bodyPr>
+          <a:lstStyle/>
+          <a:p>
+            <a:pPr indent="0" marL="0">
+              <a:buNone/>
+            </a:pPr>
+            <a:r>
+              <a:rPr lang="en-US" sz="1300" b="1" spc="100" kern="0" dirty="0">
+                <a:solidFill>
+                  <a:srgbClr val="F7A23B"/>
+                </a:solidFill>
+                <a:latin typeface="Arial" pitchFamily="34" charset="0"/>
+                <a:ea typeface="Arial" pitchFamily="34" charset="-122"/>
+                <a:cs typeface="Arial" pitchFamily="34" charset="-120"/>
+              </a:rPr>
+              <a:t>ENTREGÁVEL DO MÓDULO
+</a:t>
+            </a:r>
+            <a:pPr indent="0" marL="0">
+              <a:buNone/>
+            </a:pPr>
+            <a:r>
+              <a:rPr lang="en-US" sz="1600" dirty="0">
+                <a:solidFill>
+                  <a:srgbClr val="FFFFFF"/>
+                </a:solidFill>
+                <a:latin typeface="Arial" pitchFamily="34" charset="0"/>
+                <a:ea typeface="Arial" pitchFamily="34" charset="-122"/>
+                <a:cs typeface="Arial" pitchFamily="34" charset="-120"/>
+              </a:rPr>
+              <a:t>Ficha da minha empresa (modelo em 06-materiais-de-apoio.md): nome fictício da empresa, cidade/estado de atuação, distribuidora da região, perfil (começando do zero ou empresa solar), meta para 12 meses (ex.: 1 usina, 150 clientes). Postar na comunidade.</a:t>
+            </a:r>
+            <a:endParaRPr lang="en-US" sz="1300" dirty="0"/>
+          </a:p>
+        </p:txBody>
+      </p:sp>
+      <p:sp>
+        <p:nvSpPr>
+          <p:cNvPr id="25" name="Slide Number Placeholder 0"/>
+          <p:cNvSpPr>
+            <a:spLocks noGrp="1"/>
+          </p:cNvSpPr>
+          <p:nvPr>
+            <p:ph type="sldNum" sz="quarter" idx="4294967295"/>
+          </p:nvPr>
+        </p:nvSpPr>
+        <p:spPr>
+          <a:xfrm>
+            <a:off x="11292840" y="6556248"/>
+            <a:ext cx="548640" cy="256032"/>
+          </a:xfrm>
+          <a:prstGeom prst="rect">
+            <a:avLst/>
+          </a:prstGeom>
+          <a:extLst>
+            <a:ext uri="{C572A759-6A51-4108-AA02-DFA0A04FC94B}">
+              <ma14:wrappingTextBoxFlag xmlns:ma14="http://schemas.microsoft.com/office/mac/drawingml/2011/main" val="0"/>
+            </a:ext>
+          </a:extLst>
+        </p:spPr>
+        <p:txBody>
+          <a:bodyPr/>
+          <a:lstStyle>
+            <a:lvl1pPr>
+              <a:defRPr sz="900">
+                <a:solidFill>
+                  <a:srgbClr val="1B3A6B"/>
+                </a:solidFill>
+                <a:latin typeface="Arial"/>
+                <a:ea typeface="Arial"/>
+                <a:cs typeface="Arial"/>
+              </a:defRPr>
+            </a:lvl1pPr>
+          </a:lstStyle>
+          <a:p>
+            <a:pPr algn="r"/>
+            <a:fld id="{F7021451-1387-4CA6-816F-3879F97B5CBC}" type="slidenum">
+              <a:rPr b="1" lang="en-US"/>
+              <a:t>22</a:t>
+            </a:fld>
+            <a:endParaRPr lang="en-US"/>
+          </a:p>
+        </p:txBody>
+      </p:sp>
+    </p:spTree>
+  </p:cSld>
+  <p:clrMapOvr>
+    <a:masterClrMapping/>
+  </p:clrMapOvr>
+</p:sld>
+</file>
+
 <file path=ppt/slides/slide3.xml><?xml version="1.0" encoding="utf-8"?>
 <p:sld xmlns:a="http://schemas.openxmlformats.org/drawingml/2006/main" xmlns:r="http://schemas.openxmlformats.org/officeDocument/2006/relationships" xmlns:p="http://schemas.openxmlformats.org/presentationml/2006/main">
   <p:cSld name="Slide 3">
@@ -7983,7 +13090,7 @@
         </p:nvSpPr>
         <p:spPr>
           <a:xfrm>
-            <a:off x="548640" y="2651760"/>
+            <a:off x="548640" y="2583180"/>
             <a:ext cx="2852928" cy="1463040"/>
           </a:xfrm>
           <a:prstGeom prst="chevron">
@@ -8008,7 +13115,7 @@
         </p:nvSpPr>
         <p:spPr>
           <a:xfrm>
-            <a:off x="868680" y="2651760"/>
+            <a:off x="868680" y="2583180"/>
             <a:ext cx="2331720" cy="1463040"/>
           </a:xfrm>
           <a:prstGeom prst="rect">
@@ -8049,7 +13156,7 @@
         </p:nvSpPr>
         <p:spPr>
           <a:xfrm>
-            <a:off x="3291840" y="2651760"/>
+            <a:off x="3291840" y="2583180"/>
             <a:ext cx="2852928" cy="1463040"/>
           </a:xfrm>
           <a:prstGeom prst="chevron">
@@ -8074,7 +13181,7 @@
         </p:nvSpPr>
         <p:spPr>
           <a:xfrm>
-            <a:off x="3611880" y="2651760"/>
+            <a:off x="3611880" y="2583180"/>
             <a:ext cx="2331720" cy="1463040"/>
           </a:xfrm>
           <a:prstGeom prst="rect">
@@ -8115,7 +13222,7 @@
         </p:nvSpPr>
         <p:spPr>
           <a:xfrm>
-            <a:off x="6035040" y="2651760"/>
+            <a:off x="6035040" y="2583180"/>
             <a:ext cx="2852928" cy="1463040"/>
           </a:xfrm>
           <a:prstGeom prst="chevron">
@@ -8140,7 +13247,7 @@
         </p:nvSpPr>
         <p:spPr>
           <a:xfrm>
-            <a:off x="6355080" y="2651760"/>
+            <a:off x="6355080" y="2583180"/>
             <a:ext cx="2331720" cy="1463040"/>
           </a:xfrm>
           <a:prstGeom prst="rect">
@@ -8181,7 +13288,7 @@
         </p:nvSpPr>
         <p:spPr>
           <a:xfrm>
-            <a:off x="8778240" y="2651760"/>
+            <a:off x="8778240" y="2583180"/>
             <a:ext cx="2852928" cy="1463040"/>
           </a:xfrm>
           <a:prstGeom prst="chevron">
@@ -8206,7 +13313,7 @@
         </p:nvSpPr>
         <p:spPr>
           <a:xfrm>
-            <a:off x="9098280" y="2651760"/>
+            <a:off x="9098280" y="2583180"/>
             <a:ext cx="2331720" cy="1463040"/>
           </a:xfrm>
           <a:prstGeom prst="rect">
@@ -8234,6 +13341,92 @@
                 <a:cs typeface="Arial" pitchFamily="34" charset="-120"/>
               </a:rPr>
               <a:t>sua empresa organiza e cobra</a:t>
+            </a:r>
+            <a:endParaRPr lang="en-US" sz="1500" dirty="0"/>
+          </a:p>
+        </p:txBody>
+      </p:sp>
+      <p:sp>
+        <p:nvSpPr>
+          <p:cNvPr id="17" name="Shape 14"/>
+          <p:cNvSpPr/>
+          <p:nvPr/>
+        </p:nvSpPr>
+        <p:spPr>
+          <a:xfrm>
+            <a:off x="548640" y="5413248"/>
+            <a:ext cx="11091672" cy="868680"/>
+          </a:xfrm>
+          <a:prstGeom prst="roundRect">
+            <a:avLst>
+              <a:gd name="adj" fmla="val 8421"/>
+            </a:avLst>
+          </a:prstGeom>
+          <a:solidFill>
+            <a:srgbClr val="EEF3FA"/>
+          </a:solidFill>
+          <a:ln w="6350">
+            <a:solidFill>
+              <a:srgbClr val="D8E0EC"/>
+            </a:solidFill>
+            <a:prstDash val="solid"/>
+          </a:ln>
+        </p:spPr>
+      </p:sp>
+      <p:sp>
+        <p:nvSpPr>
+          <p:cNvPr id="18" name="Shape 15"/>
+          <p:cNvSpPr/>
+          <p:nvPr/>
+        </p:nvSpPr>
+        <p:spPr>
+          <a:xfrm>
+            <a:off x="548640" y="5413248"/>
+            <a:ext cx="91440" cy="868680"/>
+          </a:xfrm>
+          <a:prstGeom prst="rect">
+            <a:avLst/>
+          </a:prstGeom>
+          <a:solidFill>
+            <a:srgbClr val="F7A23B"/>
+          </a:solidFill>
+          <a:ln/>
+        </p:spPr>
+      </p:sp>
+      <p:sp>
+        <p:nvSpPr>
+          <p:cNvPr id="19" name="Text 16"/>
+          <p:cNvSpPr/>
+          <p:nvPr/>
+        </p:nvSpPr>
+        <p:spPr>
+          <a:xfrm>
+            <a:off x="777240" y="5458968"/>
+            <a:ext cx="10744200" cy="777240"/>
+          </a:xfrm>
+          <a:prstGeom prst="rect">
+            <a:avLst/>
+          </a:prstGeom>
+          <a:noFill/>
+          <a:ln/>
+        </p:spPr>
+        <p:txBody>
+          <a:bodyPr wrap="square" rtlCol="0" anchor="ctr"/>
+          <a:lstStyle/>
+          <a:p>
+            <a:pPr indent="0" marL="0">
+              <a:buNone/>
+            </a:pPr>
+            <a:r>
+              <a:rPr lang="en-US" sz="1500" dirty="0">
+                <a:solidFill>
+                  <a:srgbClr val="1F2937"/>
+                </a:solidFill>
+                <a:latin typeface="Arial" pitchFamily="34" charset="0"/>
+                <a:ea typeface="Arial" pitchFamily="34" charset="-122"/>
+                <a:cs typeface="Arial" pitchFamily="34" charset="-120"/>
+              </a:rPr>
+              <a:t>Veja o negócio inteiro numa imagem. A usina injeta energia na rede da distribuidora, essa energia vira créditos, e os créditos abatem a conta dos clientes. O cliente paga menos à distribuidora e uma mensalidade menor à sua empresa. É permitido e regulado pela Lei 14.300.</a:t>
             </a:r>
             <a:endParaRPr lang="en-US" sz="1500" dirty="0"/>
           </a:p>
@@ -8555,7 +13748,7 @@
         <p:spPr>
           <a:xfrm>
             <a:off x="548640" y="1325880"/>
-            <a:ext cx="3544824" cy="4892040"/>
+            <a:ext cx="3544824" cy="3977640"/>
           </a:xfrm>
           <a:prstGeom prst="roundRect">
             <a:avLst>
@@ -8648,7 +13841,7 @@
         <p:spPr>
           <a:xfrm>
             <a:off x="1325880" y="1435608"/>
-            <a:ext cx="2630424" cy="4672584"/>
+            <a:ext cx="2630424" cy="3758184"/>
           </a:xfrm>
           <a:prstGeom prst="rect">
             <a:avLst/>
@@ -8689,7 +13882,7 @@
         <p:spPr>
           <a:xfrm>
             <a:off x="4322064" y="1325880"/>
-            <a:ext cx="3544824" cy="4892040"/>
+            <a:ext cx="3544824" cy="3977640"/>
           </a:xfrm>
           <a:prstGeom prst="roundRect">
             <a:avLst>
@@ -8782,7 +13975,7 @@
         <p:spPr>
           <a:xfrm>
             <a:off x="5099304" y="1435608"/>
-            <a:ext cx="2630424" cy="4672584"/>
+            <a:ext cx="2630424" cy="3758184"/>
           </a:xfrm>
           <a:prstGeom prst="rect">
             <a:avLst/>
@@ -8823,7 +14016,7 @@
         <p:spPr>
           <a:xfrm>
             <a:off x="8095488" y="1325880"/>
-            <a:ext cx="3544824" cy="4892040"/>
+            <a:ext cx="3544824" cy="3977640"/>
           </a:xfrm>
           <a:prstGeom prst="roundRect">
             <a:avLst>
@@ -8916,7 +14109,7 @@
         <p:spPr>
           <a:xfrm>
             <a:off x="8872728" y="1435608"/>
-            <a:ext cx="2630424" cy="4672584"/>
+            <a:ext cx="2630424" cy="3758184"/>
           </a:xfrm>
           <a:prstGeom prst="rect">
             <a:avLst/>
@@ -8945,6 +14138,92 @@
               <a:t>Todos ganham</a:t>
             </a:r>
             <a:endParaRPr lang="en-US" sz="1800" dirty="0"/>
+          </a:p>
+        </p:txBody>
+      </p:sp>
+      <p:sp>
+        <p:nvSpPr>
+          <p:cNvPr id="21" name="Shape 18"/>
+          <p:cNvSpPr/>
+          <p:nvPr/>
+        </p:nvSpPr>
+        <p:spPr>
+          <a:xfrm>
+            <a:off x="548640" y="5413248"/>
+            <a:ext cx="11091672" cy="868680"/>
+          </a:xfrm>
+          <a:prstGeom prst="roundRect">
+            <a:avLst>
+              <a:gd name="adj" fmla="val 8421"/>
+            </a:avLst>
+          </a:prstGeom>
+          <a:solidFill>
+            <a:srgbClr val="EEF3FA"/>
+          </a:solidFill>
+          <a:ln w="6350">
+            <a:solidFill>
+              <a:srgbClr val="D8E0EC"/>
+            </a:solidFill>
+            <a:prstDash val="solid"/>
+          </a:ln>
+        </p:spPr>
+      </p:sp>
+      <p:sp>
+        <p:nvSpPr>
+          <p:cNvPr id="22" name="Shape 19"/>
+          <p:cNvSpPr/>
+          <p:nvPr/>
+        </p:nvSpPr>
+        <p:spPr>
+          <a:xfrm>
+            <a:off x="548640" y="5413248"/>
+            <a:ext cx="91440" cy="868680"/>
+          </a:xfrm>
+          <a:prstGeom prst="rect">
+            <a:avLst/>
+          </a:prstGeom>
+          <a:solidFill>
+            <a:srgbClr val="F7A23B"/>
+          </a:solidFill>
+          <a:ln/>
+        </p:spPr>
+      </p:sp>
+      <p:sp>
+        <p:nvSpPr>
+          <p:cNvPr id="23" name="Text 20"/>
+          <p:cNvSpPr/>
+          <p:nvPr/>
+        </p:nvSpPr>
+        <p:spPr>
+          <a:xfrm>
+            <a:off x="777240" y="5458968"/>
+            <a:ext cx="10744200" cy="777240"/>
+          </a:xfrm>
+          <a:prstGeom prst="rect">
+            <a:avLst/>
+          </a:prstGeom>
+          <a:noFill/>
+          <a:ln/>
+        </p:spPr>
+        <p:txBody>
+          <a:bodyPr wrap="square" rtlCol="0" anchor="ctr"/>
+          <a:lstStyle/>
+          <a:p>
+            <a:pPr indent="0" marL="0">
+              <a:buNone/>
+            </a:pPr>
+            <a:r>
+              <a:rPr lang="en-US" sz="1500" dirty="0">
+                <a:solidFill>
+                  <a:srgbClr val="1F2937"/>
+                </a:solidFill>
+                <a:latin typeface="Arial" pitchFamily="34" charset="0"/>
+                <a:ea typeface="Arial" pitchFamily="34" charset="-122"/>
+                <a:cs typeface="Arial" pitchFamily="34" charset="-120"/>
+              </a:rPr>
+              <a:t>Três motivos fazem desse um bom negócio: a receita é recorrente, a estrutura escala e todo mundo ganha. Mas negócio bom não é negócio fácil: existem regras, custos de rede, inadimplência e uma operação mensal. É isso que você vai dominar.</a:t>
+            </a:r>
+            <a:endParaRPr lang="en-US" sz="1500" dirty="0"/>
           </a:p>
         </p:txBody>
       </p:sp>
@@ -9264,7 +14543,7 @@
         <p:spPr>
           <a:xfrm>
             <a:off x="548640" y="1325880"/>
-            <a:ext cx="5486400" cy="4937760"/>
+            <a:ext cx="5486400" cy="3977640"/>
           </a:xfrm>
           <a:prstGeom prst="rect">
             <a:avLst/>
@@ -9368,7 +14647,7 @@
         <p:spPr>
           <a:xfrm>
             <a:off x="6263640" y="1325880"/>
-            <a:ext cx="5486400" cy="4937760"/>
+            <a:ext cx="5486400" cy="3977640"/>
           </a:xfrm>
           <a:prstGeom prst="rect">
             <a:avLst/>
@@ -9440,6 +14719,92 @@
               <a:t>7. Montar o plano da sua empresa</a:t>
             </a:r>
             <a:endParaRPr lang="en-US" sz="1800" dirty="0"/>
+          </a:p>
+        </p:txBody>
+      </p:sp>
+      <p:sp>
+        <p:nvSpPr>
+          <p:cNvPr id="11" name="Shape 8"/>
+          <p:cNvSpPr/>
+          <p:nvPr/>
+        </p:nvSpPr>
+        <p:spPr>
+          <a:xfrm>
+            <a:off x="548640" y="5413248"/>
+            <a:ext cx="11091672" cy="868680"/>
+          </a:xfrm>
+          <a:prstGeom prst="roundRect">
+            <a:avLst>
+              <a:gd name="adj" fmla="val 8421"/>
+            </a:avLst>
+          </a:prstGeom>
+          <a:solidFill>
+            <a:srgbClr val="EEF3FA"/>
+          </a:solidFill>
+          <a:ln w="6350">
+            <a:solidFill>
+              <a:srgbClr val="D8E0EC"/>
+            </a:solidFill>
+            <a:prstDash val="solid"/>
+          </a:ln>
+        </p:spPr>
+      </p:sp>
+      <p:sp>
+        <p:nvSpPr>
+          <p:cNvPr id="12" name="Shape 9"/>
+          <p:cNvSpPr/>
+          <p:nvPr/>
+        </p:nvSpPr>
+        <p:spPr>
+          <a:xfrm>
+            <a:off x="548640" y="5413248"/>
+            <a:ext cx="91440" cy="868680"/>
+          </a:xfrm>
+          <a:prstGeom prst="rect">
+            <a:avLst/>
+          </a:prstGeom>
+          <a:solidFill>
+            <a:srgbClr val="F7A23B"/>
+          </a:solidFill>
+          <a:ln/>
+        </p:spPr>
+      </p:sp>
+      <p:sp>
+        <p:nvSpPr>
+          <p:cNvPr id="13" name="Text 10"/>
+          <p:cNvSpPr/>
+          <p:nvPr/>
+        </p:nvSpPr>
+        <p:spPr>
+          <a:xfrm>
+            <a:off x="777240" y="5458968"/>
+            <a:ext cx="10744200" cy="777240"/>
+          </a:xfrm>
+          <a:prstGeom prst="rect">
+            <a:avLst/>
+          </a:prstGeom>
+          <a:noFill/>
+          <a:ln/>
+        </p:spPr>
+        <p:txBody>
+          <a:bodyPr wrap="square" rtlCol="0" anchor="ctr"/>
+          <a:lstStyle/>
+          <a:p>
+            <a:pPr indent="0" marL="0">
+              <a:buNone/>
+            </a:pPr>
+            <a:r>
+              <a:rPr lang="en-US" sz="1500" dirty="0">
+                <a:solidFill>
+                  <a:srgbClr val="1F2937"/>
+                </a:solidFill>
+                <a:latin typeface="Arial" pitchFamily="34" charset="0"/>
+                <a:ea typeface="Arial" pitchFamily="34" charset="-122"/>
+                <a:cs typeface="Arial" pitchFamily="34" charset="-120"/>
+              </a:rPr>
+              <a:t>Na tela estão as sete coisas que você vai saber fazer ao final. Repare que todas são práticas: ler, calcular, propor, distribuir, cobrar, medir e planejar.</a:t>
+            </a:r>
+            <a:endParaRPr lang="en-US" sz="1500" dirty="0"/>
           </a:p>
         </p:txBody>
       </p:sp>
@@ -10753,7 +16118,7 @@
         <p:spPr>
           <a:xfrm>
             <a:off x="822960" y="2286000"/>
-            <a:ext cx="2965704" cy="3749040"/>
+            <a:ext cx="2965704" cy="2286000"/>
           </a:xfrm>
           <a:prstGeom prst="rect">
             <a:avLst/>
@@ -10851,6 +16216,65 @@
       <p:sp>
         <p:nvSpPr>
           <p:cNvPr id="13" name="Shape 10"/>
+          <p:cNvSpPr/>
+          <p:nvPr/>
+        </p:nvSpPr>
+        <p:spPr>
+          <a:xfrm>
+            <a:off x="822960" y="4663440"/>
+            <a:ext cx="2965704" cy="18288"/>
+          </a:xfrm>
+          <a:prstGeom prst="rect">
+            <a:avLst/>
+          </a:prstGeom>
+          <a:solidFill>
+            <a:srgbClr val="D8E0EC"/>
+          </a:solidFill>
+          <a:ln/>
+        </p:spPr>
+      </p:sp>
+      <p:sp>
+        <p:nvSpPr>
+          <p:cNvPr id="14" name="Text 11"/>
+          <p:cNvSpPr/>
+          <p:nvPr/>
+        </p:nvSpPr>
+        <p:spPr>
+          <a:xfrm>
+            <a:off x="822960" y="4754880"/>
+            <a:ext cx="2965704" cy="1371600"/>
+          </a:xfrm>
+          <a:prstGeom prst="rect">
+            <a:avLst/>
+          </a:prstGeom>
+          <a:noFill/>
+          <a:ln/>
+        </p:spPr>
+        <p:txBody>
+          <a:bodyPr wrap="square" rtlCol="0" anchor="t"/>
+          <a:lstStyle/>
+          <a:p>
+            <a:pPr indent="0" marL="0">
+              <a:buNone/>
+            </a:pPr>
+            <a:r>
+              <a:rPr lang="en-US" sz="1300" i="1" dirty="0">
+                <a:solidFill>
+                  <a:srgbClr val="64748B"/>
+                </a:solidFill>
+                <a:latin typeface="Arial" pitchFamily="34" charset="0"/>
+                <a:ea typeface="Arial" pitchFamily="34" charset="-122"/>
+                <a:cs typeface="Arial" pitchFamily="34" charset="-120"/>
+              </a:rPr>
+              <a:t>São quatro etapas, e cada uma sobe um degrau: primeiro os fundamentos de energia, depois as regras e a conta do negócio, então a operação de ponta a ponta e, por fim, a gestão da empresa.</a:t>
+            </a:r>
+            <a:endParaRPr lang="en-US" sz="1300" dirty="0"/>
+          </a:p>
+        </p:txBody>
+      </p:sp>
+      <p:sp>
+        <p:nvSpPr>
+          <p:cNvPr id="15" name="Shape 12"/>
           <p:cNvSpPr/>
           <p:nvPr/>
         </p:nvSpPr>
@@ -10884,7 +16308,7 @@
       </p:sp>
       <p:sp>
         <p:nvSpPr>
-          <p:cNvPr id="14" name="Shape 11"/>
+          <p:cNvPr id="16" name="Shape 13"/>
           <p:cNvSpPr/>
           <p:nvPr/>
         </p:nvSpPr>
@@ -10904,7 +16328,7 @@
       </p:sp>
       <p:sp>
         <p:nvSpPr>
-          <p:cNvPr id="15" name="Text 12"/>
+          <p:cNvPr id="17" name="Text 14"/>
           <p:cNvSpPr/>
           <p:nvPr/>
         </p:nvSpPr>
@@ -10945,14 +16369,14 @@
       </p:sp>
       <p:sp>
         <p:nvSpPr>
-          <p:cNvPr id="16" name="Text 13"/>
+          <p:cNvPr id="18" name="Text 15"/>
           <p:cNvSpPr/>
           <p:nvPr/>
         </p:nvSpPr>
         <p:spPr>
           <a:xfrm>
             <a:off x="4611624" y="2286000"/>
-            <a:ext cx="2965704" cy="3749040"/>
+            <a:ext cx="2965704" cy="2286000"/>
           </a:xfrm>
           <a:prstGeom prst="rect">
             <a:avLst/>
@@ -11011,7 +16435,66 @@
       </p:sp>
       <p:sp>
         <p:nvSpPr>
-          <p:cNvPr id="17" name="Shape 14"/>
+          <p:cNvPr id="19" name="Shape 16"/>
+          <p:cNvSpPr/>
+          <p:nvPr/>
+        </p:nvSpPr>
+        <p:spPr>
+          <a:xfrm>
+            <a:off x="4611624" y="4663440"/>
+            <a:ext cx="2965704" cy="18288"/>
+          </a:xfrm>
+          <a:prstGeom prst="rect">
+            <a:avLst/>
+          </a:prstGeom>
+          <a:solidFill>
+            <a:srgbClr val="D8E0EC"/>
+          </a:solidFill>
+          <a:ln/>
+        </p:spPr>
+      </p:sp>
+      <p:sp>
+        <p:nvSpPr>
+          <p:cNvPr id="20" name="Text 17"/>
+          <p:cNvSpPr/>
+          <p:nvPr/>
+        </p:nvSpPr>
+        <p:spPr>
+          <a:xfrm>
+            <a:off x="4611624" y="4754880"/>
+            <a:ext cx="2965704" cy="1371600"/>
+          </a:xfrm>
+          <a:prstGeom prst="rect">
+            <a:avLst/>
+          </a:prstGeom>
+          <a:noFill/>
+          <a:ln/>
+        </p:spPr>
+        <p:txBody>
+          <a:bodyPr wrap="square" rtlCol="0" anchor="t"/>
+          <a:lstStyle/>
+          <a:p>
+            <a:pPr indent="0" marL="0">
+              <a:buNone/>
+            </a:pPr>
+            <a:r>
+              <a:rPr lang="en-US" sz="1300" i="1" dirty="0">
+                <a:solidFill>
+                  <a:srgbClr val="64748B"/>
+                </a:solidFill>
+                <a:latin typeface="Arial" pitchFamily="34" charset="0"/>
+                <a:ea typeface="Arial" pitchFamily="34" charset="-122"/>
+                <a:cs typeface="Arial" pitchFamily="34" charset="-120"/>
+              </a:rPr>
+              <a:t>Há dois tipos de aula: as expositivas, que explicam o conceito, e os laboratórios, guiados por telas e passos na tela. A regra de ouro: viu o laboratório, faça o laboratório.</a:t>
+            </a:r>
+            <a:endParaRPr lang="en-US" sz="1300" dirty="0"/>
+          </a:p>
+        </p:txBody>
+      </p:sp>
+      <p:sp>
+        <p:nvSpPr>
+          <p:cNvPr id="21" name="Shape 18"/>
           <p:cNvSpPr/>
           <p:nvPr/>
         </p:nvSpPr>
@@ -11045,7 +16528,7 @@
       </p:sp>
       <p:sp>
         <p:nvSpPr>
-          <p:cNvPr id="18" name="Shape 15"/>
+          <p:cNvPr id="22" name="Shape 19"/>
           <p:cNvSpPr/>
           <p:nvPr/>
         </p:nvSpPr>
@@ -11065,7 +16548,7 @@
       </p:sp>
       <p:sp>
         <p:nvSpPr>
-          <p:cNvPr id="19" name="Text 16"/>
+          <p:cNvPr id="23" name="Text 20"/>
           <p:cNvSpPr/>
           <p:nvPr/>
         </p:nvSpPr>
@@ -11106,14 +16589,14 @@
       </p:sp>
       <p:sp>
         <p:nvSpPr>
-          <p:cNvPr id="20" name="Text 17"/>
+          <p:cNvPr id="24" name="Text 21"/>
           <p:cNvSpPr/>
           <p:nvPr/>
         </p:nvSpPr>
         <p:spPr>
           <a:xfrm>
             <a:off x="8400288" y="2286000"/>
-            <a:ext cx="2965704" cy="3749040"/>
+            <a:ext cx="2965704" cy="2286000"/>
           </a:xfrm>
           <a:prstGeom prst="rect">
             <a:avLst/>
@@ -11188,6 +16671,65 @@
               <a:t>Projeto final = sua empresa operando</a:t>
             </a:r>
             <a:endParaRPr lang="en-US" sz="1700" dirty="0"/>
+          </a:p>
+        </p:txBody>
+      </p:sp>
+      <p:sp>
+        <p:nvSpPr>
+          <p:cNvPr id="25" name="Shape 22"/>
+          <p:cNvSpPr/>
+          <p:nvPr/>
+        </p:nvSpPr>
+        <p:spPr>
+          <a:xfrm>
+            <a:off x="8400288" y="4663440"/>
+            <a:ext cx="2965704" cy="18288"/>
+          </a:xfrm>
+          <a:prstGeom prst="rect">
+            <a:avLst/>
+          </a:prstGeom>
+          <a:solidFill>
+            <a:srgbClr val="D8E0EC"/>
+          </a:solidFill>
+          <a:ln/>
+        </p:spPr>
+      </p:sp>
+      <p:sp>
+        <p:nvSpPr>
+          <p:cNvPr id="26" name="Text 23"/>
+          <p:cNvSpPr/>
+          <p:nvPr/>
+        </p:nvSpPr>
+        <p:spPr>
+          <a:xfrm>
+            <a:off x="8400288" y="4754880"/>
+            <a:ext cx="2965704" cy="1371600"/>
+          </a:xfrm>
+          <a:prstGeom prst="rect">
+            <a:avLst/>
+          </a:prstGeom>
+          <a:noFill/>
+          <a:ln/>
+        </p:spPr>
+        <p:txBody>
+          <a:bodyPr wrap="square" rtlCol="0" anchor="t"/>
+          <a:lstStyle/>
+          <a:p>
+            <a:pPr indent="0" marL="0">
+              <a:buNone/>
+            </a:pPr>
+            <a:r>
+              <a:rPr lang="en-US" sz="1300" i="1" dirty="0">
+                <a:solidFill>
+                  <a:srgbClr val="64748B"/>
+                </a:solidFill>
+                <a:latin typeface="Arial" pitchFamily="34" charset="0"/>
+                <a:ea typeface="Arial" pitchFamily="34" charset="-122"/>
+                <a:cs typeface="Arial" pitchFamily="34" charset="-120"/>
+              </a:rPr>
+              <a:t>Cada módulo tem um teste rápido e um entregável. Somados, eles viram o projeto final: a sua empresa operando.</a:t>
+            </a:r>
+            <a:endParaRPr lang="en-US" sz="1300" dirty="0"/>
           </a:p>
         </p:txBody>
       </p:sp>
@@ -11507,11 +17049,11 @@
         <p:spPr>
           <a:xfrm>
             <a:off x="548640" y="1325880"/>
-            <a:ext cx="5431536" cy="2331720"/>
+            <a:ext cx="5431536" cy="1874520"/>
           </a:xfrm>
           <a:prstGeom prst="roundRect">
             <a:avLst>
-              <a:gd name="adj" fmla="val 3137"/>
+              <a:gd name="adj" fmla="val 3902"/>
             </a:avLst>
           </a:prstGeom>
           <a:solidFill>
@@ -11600,7 +17142,7 @@
         <p:spPr>
           <a:xfrm>
             <a:off x="1325880" y="1435608"/>
-            <a:ext cx="4517136" cy="2112264"/>
+            <a:ext cx="4517136" cy="1655064"/>
           </a:xfrm>
           <a:prstGeom prst="rect">
             <a:avLst/>
@@ -11641,11 +17183,11 @@
         <p:spPr>
           <a:xfrm>
             <a:off x="6208776" y="1325880"/>
-            <a:ext cx="5431536" cy="2331720"/>
+            <a:ext cx="5431536" cy="1874520"/>
           </a:xfrm>
           <a:prstGeom prst="roundRect">
             <a:avLst>
-              <a:gd name="adj" fmla="val 3137"/>
+              <a:gd name="adj" fmla="val 3902"/>
             </a:avLst>
           </a:prstGeom>
           <a:solidFill>
@@ -11734,7 +17276,7 @@
         <p:spPr>
           <a:xfrm>
             <a:off x="6986016" y="1435608"/>
-            <a:ext cx="4517136" cy="2112264"/>
+            <a:ext cx="4517136" cy="1655064"/>
           </a:xfrm>
           <a:prstGeom prst="rect">
             <a:avLst/>
@@ -11774,12 +17316,12 @@
         </p:nvSpPr>
         <p:spPr>
           <a:xfrm>
-            <a:off x="548640" y="3886200"/>
-            <a:ext cx="5431536" cy="2331720"/>
+            <a:off x="548640" y="3429000"/>
+            <a:ext cx="5431536" cy="1874520"/>
           </a:xfrm>
           <a:prstGeom prst="roundRect">
             <a:avLst>
-              <a:gd name="adj" fmla="val 3137"/>
+              <a:gd name="adj" fmla="val 3902"/>
             </a:avLst>
           </a:prstGeom>
           <a:solidFill>
@@ -11808,7 +17350,7 @@
         </p:nvSpPr>
         <p:spPr>
           <a:xfrm>
-            <a:off x="731520" y="4069080"/>
+            <a:off x="731520" y="3611880"/>
             <a:ext cx="457200" cy="457200"/>
           </a:xfrm>
           <a:prstGeom prst="ellipse">
@@ -11828,7 +17370,7 @@
         </p:nvSpPr>
         <p:spPr>
           <a:xfrm>
-            <a:off x="731520" y="4069080"/>
+            <a:off x="731520" y="3611880"/>
             <a:ext cx="457200" cy="457200"/>
           </a:xfrm>
           <a:prstGeom prst="rect">
@@ -11867,8 +17409,8 @@
         </p:nvSpPr>
         <p:spPr>
           <a:xfrm>
-            <a:off x="1325880" y="3995928"/>
-            <a:ext cx="4517136" cy="2112264"/>
+            <a:off x="1325880" y="3538728"/>
+            <a:ext cx="4517136" cy="1655064"/>
           </a:xfrm>
           <a:prstGeom prst="rect">
             <a:avLst/>
@@ -11908,12 +17450,12 @@
         </p:nvSpPr>
         <p:spPr>
           <a:xfrm>
-            <a:off x="6208776" y="3886200"/>
-            <a:ext cx="5431536" cy="2331720"/>
+            <a:off x="6208776" y="3429000"/>
+            <a:ext cx="5431536" cy="1874520"/>
           </a:xfrm>
           <a:prstGeom prst="roundRect">
             <a:avLst>
-              <a:gd name="adj" fmla="val 3137"/>
+              <a:gd name="adj" fmla="val 3902"/>
             </a:avLst>
           </a:prstGeom>
           <a:solidFill>
@@ -11942,7 +17484,7 @@
         </p:nvSpPr>
         <p:spPr>
           <a:xfrm>
-            <a:off x="6391656" y="4069080"/>
+            <a:off x="6391656" y="3611880"/>
             <a:ext cx="457200" cy="457200"/>
           </a:xfrm>
           <a:prstGeom prst="ellipse">
@@ -11962,7 +17504,7 @@
         </p:nvSpPr>
         <p:spPr>
           <a:xfrm>
-            <a:off x="6391656" y="4069080"/>
+            <a:off x="6391656" y="3611880"/>
             <a:ext cx="457200" cy="457200"/>
           </a:xfrm>
           <a:prstGeom prst="rect">
@@ -12001,8 +17543,8 @@
         </p:nvSpPr>
         <p:spPr>
           <a:xfrm>
-            <a:off x="6986016" y="3995928"/>
-            <a:ext cx="4517136" cy="2112264"/>
+            <a:off x="6986016" y="3538728"/>
+            <a:ext cx="4517136" cy="1655064"/>
           </a:xfrm>
           <a:prstGeom prst="rect">
             <a:avLst/>
@@ -12031,6 +17573,92 @@
               <a:t>- Use a calculadora e os modelos no seu negócio real</a:t>
             </a:r>
             <a:endParaRPr lang="en-US" sz="1800" dirty="0"/>
+          </a:p>
+        </p:txBody>
+      </p:sp>
+      <p:sp>
+        <p:nvSpPr>
+          <p:cNvPr id="25" name="Shape 22"/>
+          <p:cNvSpPr/>
+          <p:nvPr/>
+        </p:nvSpPr>
+        <p:spPr>
+          <a:xfrm>
+            <a:off x="548640" y="5413248"/>
+            <a:ext cx="11091672" cy="868680"/>
+          </a:xfrm>
+          <a:prstGeom prst="roundRect">
+            <a:avLst>
+              <a:gd name="adj" fmla="val 8421"/>
+            </a:avLst>
+          </a:prstGeom>
+          <a:solidFill>
+            <a:srgbClr val="EEF3FA"/>
+          </a:solidFill>
+          <a:ln w="6350">
+            <a:solidFill>
+              <a:srgbClr val="D8E0EC"/>
+            </a:solidFill>
+            <a:prstDash val="solid"/>
+          </a:ln>
+        </p:spPr>
+      </p:sp>
+      <p:sp>
+        <p:nvSpPr>
+          <p:cNvPr id="26" name="Shape 23"/>
+          <p:cNvSpPr/>
+          <p:nvPr/>
+        </p:nvSpPr>
+        <p:spPr>
+          <a:xfrm>
+            <a:off x="548640" y="5413248"/>
+            <a:ext cx="91440" cy="868680"/>
+          </a:xfrm>
+          <a:prstGeom prst="rect">
+            <a:avLst/>
+          </a:prstGeom>
+          <a:solidFill>
+            <a:srgbClr val="F7A23B"/>
+          </a:solidFill>
+          <a:ln/>
+        </p:spPr>
+      </p:sp>
+      <p:sp>
+        <p:nvSpPr>
+          <p:cNvPr id="27" name="Text 24"/>
+          <p:cNvSpPr/>
+          <p:nvPr/>
+        </p:nvSpPr>
+        <p:spPr>
+          <a:xfrm>
+            <a:off x="777240" y="5458968"/>
+            <a:ext cx="10744200" cy="777240"/>
+          </a:xfrm>
+          <a:prstGeom prst="rect">
+            <a:avLst/>
+          </a:prstGeom>
+          <a:noFill/>
+          <a:ln/>
+        </p:spPr>
+        <p:txBody>
+          <a:bodyPr wrap="square" rtlCol="0" anchor="ctr"/>
+          <a:lstStyle/>
+          <a:p>
+            <a:pPr indent="0" marL="0">
+              <a:buNone/>
+            </a:pPr>
+            <a:r>
+              <a:rPr lang="en-US" sz="1500" dirty="0">
+                <a:solidFill>
+                  <a:srgbClr val="1F2937"/>
+                </a:solidFill>
+                <a:latin typeface="Arial" pitchFamily="34" charset="0"/>
+                <a:ea typeface="Arial" pitchFamily="34" charset="-122"/>
+                <a:cs typeface="Arial" pitchFamily="34" charset="-120"/>
+              </a:rPr>
+              <a:t>Reserve de três a cinco horas por semana e use desde já os materiais no seu negócio real.</a:t>
+            </a:r>
+            <a:endParaRPr lang="en-US" sz="1500" dirty="0"/>
           </a:p>
         </p:txBody>
       </p:sp>
